--- a/slides/pcs-workshop-intro.pptx
+++ b/slides/pcs-workshop-intro.pptx
@@ -379,7 +379,7 @@
             <a:pPr indent="0" algn="r">
               <a:buNone/>
             </a:pPr>
-            <a:fld id="{B705BE66-CE22-4D7B-948D-F61259C785D1}" type="slidenum">
+            <a:fld id="{96EF3A0D-03BF-474C-81D7-45FAFEA370CD}" type="slidenum">
               <a:rPr lang="en-US" sz="1400" b="0" u="none" strike="noStrike">
                 <a:solidFill>
                   <a:srgbClr val="000000"/>
@@ -426,7 +426,7 @@
       </p:grpSpPr>
       <p:sp>
         <p:nvSpPr>
-          <p:cNvPr id="628" name=""/>
+          <p:cNvPr id="605" name=""/>
           <p:cNvSpPr txBox="1"/>
           <p:nvPr/>
         </p:nvSpPr>
@@ -540,7 +540,7 @@
       </p:grpSpPr>
       <p:sp>
         <p:nvSpPr>
-          <p:cNvPr id="637" name=""/>
+          <p:cNvPr id="614" name=""/>
           <p:cNvSpPr txBox="1"/>
           <p:nvPr/>
         </p:nvSpPr>
@@ -633,7 +633,7 @@
       </p:grpSpPr>
       <p:sp>
         <p:nvSpPr>
-          <p:cNvPr id="638" name=""/>
+          <p:cNvPr id="615" name=""/>
           <p:cNvSpPr txBox="1"/>
           <p:nvPr/>
         </p:nvSpPr>
@@ -789,7 +789,7 @@
       </p:grpSpPr>
       <p:sp>
         <p:nvSpPr>
-          <p:cNvPr id="639" name=""/>
+          <p:cNvPr id="616" name=""/>
           <p:cNvSpPr txBox="1"/>
           <p:nvPr/>
         </p:nvSpPr>
@@ -882,7 +882,7 @@
       </p:grpSpPr>
       <p:sp>
         <p:nvSpPr>
-          <p:cNvPr id="640" name=""/>
+          <p:cNvPr id="617" name=""/>
           <p:cNvSpPr txBox="1"/>
           <p:nvPr/>
         </p:nvSpPr>
@@ -975,7 +975,7 @@
       </p:grpSpPr>
       <p:sp>
         <p:nvSpPr>
-          <p:cNvPr id="641" name=""/>
+          <p:cNvPr id="618" name=""/>
           <p:cNvSpPr txBox="1"/>
           <p:nvPr/>
         </p:nvSpPr>
@@ -1068,7 +1068,7 @@
       </p:grpSpPr>
       <p:sp>
         <p:nvSpPr>
-          <p:cNvPr id="642" name=""/>
+          <p:cNvPr id="619" name=""/>
           <p:cNvSpPr txBox="1"/>
           <p:nvPr/>
         </p:nvSpPr>
@@ -1182,7 +1182,7 @@
       </p:grpSpPr>
       <p:sp>
         <p:nvSpPr>
-          <p:cNvPr id="629" name=""/>
+          <p:cNvPr id="606" name=""/>
           <p:cNvSpPr txBox="1"/>
           <p:nvPr/>
         </p:nvSpPr>
@@ -1296,7 +1296,7 @@
       </p:grpSpPr>
       <p:sp>
         <p:nvSpPr>
-          <p:cNvPr id="630" name=""/>
+          <p:cNvPr id="607" name=""/>
           <p:cNvSpPr txBox="1"/>
           <p:nvPr/>
         </p:nvSpPr>
@@ -1389,7 +1389,7 @@
       </p:grpSpPr>
       <p:sp>
         <p:nvSpPr>
-          <p:cNvPr id="631" name=""/>
+          <p:cNvPr id="608" name=""/>
           <p:cNvSpPr txBox="1"/>
           <p:nvPr/>
         </p:nvSpPr>
@@ -1482,7 +1482,7 @@
       </p:grpSpPr>
       <p:sp>
         <p:nvSpPr>
-          <p:cNvPr id="632" name=""/>
+          <p:cNvPr id="609" name=""/>
           <p:cNvSpPr txBox="1"/>
           <p:nvPr/>
         </p:nvSpPr>
@@ -1659,7 +1659,7 @@
       </p:grpSpPr>
       <p:sp>
         <p:nvSpPr>
-          <p:cNvPr id="633" name=""/>
+          <p:cNvPr id="610" name=""/>
           <p:cNvSpPr txBox="1"/>
           <p:nvPr/>
         </p:nvSpPr>
@@ -1794,7 +1794,7 @@
       </p:grpSpPr>
       <p:sp>
         <p:nvSpPr>
-          <p:cNvPr id="634" name=""/>
+          <p:cNvPr id="611" name=""/>
           <p:cNvSpPr txBox="1"/>
           <p:nvPr/>
         </p:nvSpPr>
@@ -1950,7 +1950,7 @@
       </p:grpSpPr>
       <p:sp>
         <p:nvSpPr>
-          <p:cNvPr id="635" name=""/>
+          <p:cNvPr id="612" name=""/>
           <p:cNvSpPr txBox="1"/>
           <p:nvPr/>
         </p:nvSpPr>
@@ -2043,7 +2043,7 @@
       </p:grpSpPr>
       <p:sp>
         <p:nvSpPr>
-          <p:cNvPr id="636" name=""/>
+          <p:cNvPr id="613" name=""/>
           <p:cNvSpPr txBox="1"/>
           <p:nvPr/>
         </p:nvSpPr>
@@ -2210,7 +2210,7 @@
         <p:txBody>
           <a:bodyPr/>
           <a:p>
-            <a:fld id="{B5D06C07-5965-413A-AC63-6F1C1EA2D5B3}" type="slidenum">
+            <a:fld id="{CECF3C5A-6456-4183-A450-3F08FF311EDA}" type="slidenum">
               <a:t>&lt;#&gt;</a:t>
             </a:fld>
           </a:p>
@@ -2377,7 +2377,7 @@
         <p:txBody>
           <a:bodyPr/>
           <a:p>
-            <a:fld id="{9ACC77B3-5458-49D4-9394-6707F8AD65F9}" type="slidenum">
+            <a:fld id="{25BAC615-98EA-4643-BA59-0E9C07CBFCBF}" type="slidenum">
               <a:t>&lt;#&gt;</a:t>
             </a:fld>
           </a:p>
@@ -3056,7 +3056,7 @@
             <a:pPr indent="0" algn="r">
               <a:buNone/>
             </a:pPr>
-            <a:fld id="{2498ED7F-72C6-4065-8D8F-D040606A9FFB}" type="slidenum">
+            <a:fld id="{6F828918-75DD-4C2E-A07E-8D5F7C758FC4}" type="slidenum">
               <a:rPr lang="en-US" sz="1400" b="0" u="none" strike="noStrike">
                 <a:solidFill>
                   <a:srgbClr val="000000"/>
@@ -6715,7 +6715,7 @@
       </p:grpSpPr>
       <p:sp>
         <p:nvSpPr>
-          <p:cNvPr id="344" name=""/>
+          <p:cNvPr id="345" name=""/>
           <p:cNvSpPr/>
           <p:nvPr/>
         </p:nvSpPr>
@@ -6752,7 +6752,7 @@
       </p:sp>
       <p:sp>
         <p:nvSpPr>
-          <p:cNvPr id="345" name=""/>
+          <p:cNvPr id="346" name=""/>
           <p:cNvSpPr/>
           <p:nvPr/>
         </p:nvSpPr>
@@ -6789,7 +6789,7 @@
       </p:sp>
       <p:sp>
         <p:nvSpPr>
-          <p:cNvPr id="346" name=""/>
+          <p:cNvPr id="347" name=""/>
           <p:cNvSpPr/>
           <p:nvPr/>
         </p:nvSpPr>
@@ -6826,7 +6826,7 @@
       </p:sp>
       <p:sp>
         <p:nvSpPr>
-          <p:cNvPr id="347" name=""/>
+          <p:cNvPr id="348" name=""/>
           <p:cNvSpPr/>
           <p:nvPr/>
         </p:nvSpPr>
@@ -6863,7 +6863,7 @@
       </p:sp>
       <p:sp>
         <p:nvSpPr>
-          <p:cNvPr id="348" name=""/>
+          <p:cNvPr id="349" name=""/>
           <p:cNvSpPr/>
           <p:nvPr/>
         </p:nvSpPr>
@@ -6900,7 +6900,7 @@
       </p:sp>
       <p:sp>
         <p:nvSpPr>
-          <p:cNvPr id="349" name=""/>
+          <p:cNvPr id="350" name=""/>
           <p:cNvSpPr/>
           <p:nvPr/>
         </p:nvSpPr>
@@ -6937,7 +6937,7 @@
       </p:sp>
       <p:sp>
         <p:nvSpPr>
-          <p:cNvPr id="350" name=""/>
+          <p:cNvPr id="351" name=""/>
           <p:cNvSpPr/>
           <p:nvPr/>
         </p:nvSpPr>
@@ -6974,7 +6974,7 @@
       </p:sp>
       <p:sp>
         <p:nvSpPr>
-          <p:cNvPr id="351" name=""/>
+          <p:cNvPr id="352" name=""/>
           <p:cNvSpPr txBox="1"/>
           <p:nvPr/>
         </p:nvSpPr>
@@ -7020,7 +7020,7 @@
       </p:sp>
       <p:sp>
         <p:nvSpPr>
-          <p:cNvPr id="352" name=""/>
+          <p:cNvPr id="353" name=""/>
           <p:cNvSpPr txBox="1"/>
           <p:nvPr/>
         </p:nvSpPr>
@@ -7066,7 +7066,7 @@
       </p:sp>
       <p:sp>
         <p:nvSpPr>
-          <p:cNvPr id="353" name=""/>
+          <p:cNvPr id="354" name=""/>
           <p:cNvSpPr txBox="1"/>
           <p:nvPr/>
         </p:nvSpPr>
@@ -7185,7 +7185,7 @@
       </p:sp>
       <p:sp>
         <p:nvSpPr>
-          <p:cNvPr id="354" name=""/>
+          <p:cNvPr id="355" name=""/>
           <p:cNvSpPr/>
           <p:nvPr/>
         </p:nvSpPr>
@@ -7225,7 +7225,7 @@
       </p:sp>
       <p:sp>
         <p:nvSpPr>
-          <p:cNvPr id="355" name=""/>
+          <p:cNvPr id="356" name=""/>
           <p:cNvSpPr txBox="1"/>
           <p:nvPr/>
         </p:nvSpPr>
@@ -7271,7 +7271,7 @@
       </p:sp>
       <p:sp>
         <p:nvSpPr>
-          <p:cNvPr id="356" name=""/>
+          <p:cNvPr id="357" name=""/>
           <p:cNvSpPr/>
           <p:nvPr/>
         </p:nvSpPr>
@@ -7311,7 +7311,7 @@
       </p:sp>
       <p:sp>
         <p:nvSpPr>
-          <p:cNvPr id="357" name=""/>
+          <p:cNvPr id="358" name=""/>
           <p:cNvSpPr/>
           <p:nvPr/>
         </p:nvSpPr>
@@ -7348,7 +7348,7 @@
       </p:sp>
       <p:sp>
         <p:nvSpPr>
-          <p:cNvPr id="358" name=""/>
+          <p:cNvPr id="359" name=""/>
           <p:cNvSpPr txBox="1"/>
           <p:nvPr/>
         </p:nvSpPr>
@@ -7395,7 +7395,7 @@
       </p:sp>
       <p:sp>
         <p:nvSpPr>
-          <p:cNvPr id="359" name=""/>
+          <p:cNvPr id="360" name=""/>
           <p:cNvSpPr txBox="1"/>
           <p:nvPr/>
         </p:nvSpPr>
@@ -7441,7 +7441,7 @@
       </p:sp>
       <p:sp>
         <p:nvSpPr>
-          <p:cNvPr id="360" name=""/>
+          <p:cNvPr id="361" name=""/>
           <p:cNvSpPr txBox="1"/>
           <p:nvPr/>
         </p:nvSpPr>
@@ -7525,7 +7525,7 @@
       </p:grpSpPr>
       <p:sp>
         <p:nvSpPr>
-          <p:cNvPr id="361" name=""/>
+          <p:cNvPr id="362" name=""/>
           <p:cNvSpPr/>
           <p:nvPr/>
         </p:nvSpPr>
@@ -7562,7 +7562,7 @@
       </p:sp>
       <p:sp>
         <p:nvSpPr>
-          <p:cNvPr id="362" name=""/>
+          <p:cNvPr id="363" name=""/>
           <p:cNvSpPr/>
           <p:nvPr/>
         </p:nvSpPr>
@@ -7599,7 +7599,7 @@
       </p:sp>
       <p:sp>
         <p:nvSpPr>
-          <p:cNvPr id="363" name=""/>
+          <p:cNvPr id="364" name=""/>
           <p:cNvSpPr/>
           <p:nvPr/>
         </p:nvSpPr>
@@ -7636,7 +7636,7 @@
       </p:sp>
       <p:sp>
         <p:nvSpPr>
-          <p:cNvPr id="364" name=""/>
+          <p:cNvPr id="365" name=""/>
           <p:cNvSpPr/>
           <p:nvPr/>
         </p:nvSpPr>
@@ -7673,7 +7673,7 @@
       </p:sp>
       <p:sp>
         <p:nvSpPr>
-          <p:cNvPr id="365" name=""/>
+          <p:cNvPr id="366" name=""/>
           <p:cNvSpPr/>
           <p:nvPr/>
         </p:nvSpPr>
@@ -7710,7 +7710,7 @@
       </p:sp>
       <p:sp>
         <p:nvSpPr>
-          <p:cNvPr id="366" name=""/>
+          <p:cNvPr id="367" name=""/>
           <p:cNvSpPr/>
           <p:nvPr/>
         </p:nvSpPr>
@@ -7747,7 +7747,7 @@
       </p:sp>
       <p:sp>
         <p:nvSpPr>
-          <p:cNvPr id="367" name=""/>
+          <p:cNvPr id="368" name=""/>
           <p:cNvSpPr/>
           <p:nvPr/>
         </p:nvSpPr>
@@ -7784,7 +7784,7 @@
       </p:sp>
       <p:sp>
         <p:nvSpPr>
-          <p:cNvPr id="368" name=""/>
+          <p:cNvPr id="369" name=""/>
           <p:cNvSpPr txBox="1"/>
           <p:nvPr/>
         </p:nvSpPr>
@@ -7815,7 +7815,7 @@
                 <a:uFillTx/>
                 <a:latin typeface="Arial"/>
               </a:rPr>
-              <a:t>LIVE BUILD · UPDATE</a:t>
+              <a:t>INSIDE THE LOOP · THE UPDATE</a:t>
             </a:r>
             <a:endParaRPr lang="en-US" sz="1150" b="0" u="none" strike="noStrike">
               <a:solidFill>
@@ -7830,7 +7830,7 @@
       </p:sp>
       <p:sp>
         <p:nvSpPr>
-          <p:cNvPr id="369" name=""/>
+          <p:cNvPr id="370" name=""/>
           <p:cNvSpPr txBox="1"/>
           <p:nvPr/>
         </p:nvSpPr>
@@ -7876,7 +7876,7 @@
       </p:sp>
       <p:sp>
         <p:nvSpPr>
-          <p:cNvPr id="370" name=""/>
+          <p:cNvPr id="371" name=""/>
           <p:cNvSpPr/>
           <p:nvPr/>
         </p:nvSpPr>
@@ -7916,7 +7916,7 @@
       </p:sp>
       <p:sp>
         <p:nvSpPr>
-          <p:cNvPr id="371" name=""/>
+          <p:cNvPr id="372" name=""/>
           <p:cNvSpPr txBox="1"/>
           <p:nvPr/>
         </p:nvSpPr>
@@ -8087,7 +8087,7 @@
       </p:sp>
       <p:sp>
         <p:nvSpPr>
-          <p:cNvPr id="372" name=""/>
+          <p:cNvPr id="373" name=""/>
           <p:cNvSpPr/>
           <p:nvPr/>
         </p:nvSpPr>
@@ -8127,7 +8127,7 @@
       </p:sp>
       <p:sp>
         <p:nvSpPr>
-          <p:cNvPr id="373" name=""/>
+          <p:cNvPr id="374" name=""/>
           <p:cNvSpPr txBox="1"/>
           <p:nvPr/>
         </p:nvSpPr>
@@ -8257,7 +8257,7 @@
       </p:sp>
       <p:sp>
         <p:nvSpPr>
-          <p:cNvPr id="374" name=""/>
+          <p:cNvPr id="375" name=""/>
           <p:cNvSpPr txBox="1"/>
           <p:nvPr/>
         </p:nvSpPr>
@@ -8366,7 +8366,7 @@
       </p:sp>
       <p:sp>
         <p:nvSpPr>
-          <p:cNvPr id="375" name=""/>
+          <p:cNvPr id="376" name=""/>
           <p:cNvSpPr/>
           <p:nvPr/>
         </p:nvSpPr>
@@ -8406,7 +8406,7 @@
       </p:sp>
       <p:sp>
         <p:nvSpPr>
-          <p:cNvPr id="376" name=""/>
+          <p:cNvPr id="377" name=""/>
           <p:cNvSpPr txBox="1"/>
           <p:nvPr/>
         </p:nvSpPr>
@@ -8452,7 +8452,7 @@
       </p:sp>
       <p:sp>
         <p:nvSpPr>
-          <p:cNvPr id="377" name=""/>
+          <p:cNvPr id="378" name=""/>
           <p:cNvSpPr txBox="1"/>
           <p:nvPr/>
         </p:nvSpPr>
@@ -8536,7 +8536,7 @@
       </p:grpSpPr>
       <p:sp>
         <p:nvSpPr>
-          <p:cNvPr id="378" name=""/>
+          <p:cNvPr id="379" name=""/>
           <p:cNvSpPr/>
           <p:nvPr/>
         </p:nvSpPr>
@@ -8573,7 +8573,7 @@
       </p:sp>
       <p:sp>
         <p:nvSpPr>
-          <p:cNvPr id="379" name=""/>
+          <p:cNvPr id="380" name=""/>
           <p:cNvSpPr/>
           <p:nvPr/>
         </p:nvSpPr>
@@ -8610,7 +8610,7 @@
       </p:sp>
       <p:sp>
         <p:nvSpPr>
-          <p:cNvPr id="380" name=""/>
+          <p:cNvPr id="381" name=""/>
           <p:cNvSpPr/>
           <p:nvPr/>
         </p:nvSpPr>
@@ -8647,7 +8647,7 @@
       </p:sp>
       <p:sp>
         <p:nvSpPr>
-          <p:cNvPr id="381" name=""/>
+          <p:cNvPr id="382" name=""/>
           <p:cNvSpPr/>
           <p:nvPr/>
         </p:nvSpPr>
@@ -8684,7 +8684,7 @@
       </p:sp>
       <p:sp>
         <p:nvSpPr>
-          <p:cNvPr id="382" name=""/>
+          <p:cNvPr id="383" name=""/>
           <p:cNvSpPr/>
           <p:nvPr/>
         </p:nvSpPr>
@@ -8721,7 +8721,7 @@
       </p:sp>
       <p:sp>
         <p:nvSpPr>
-          <p:cNvPr id="383" name=""/>
+          <p:cNvPr id="384" name=""/>
           <p:cNvSpPr/>
           <p:nvPr/>
         </p:nvSpPr>
@@ -8758,7 +8758,7 @@
       </p:sp>
       <p:sp>
         <p:nvSpPr>
-          <p:cNvPr id="384" name=""/>
+          <p:cNvPr id="385" name=""/>
           <p:cNvSpPr/>
           <p:nvPr/>
         </p:nvSpPr>
@@ -8795,7 +8795,7 @@
       </p:sp>
       <p:sp>
         <p:nvSpPr>
-          <p:cNvPr id="385" name=""/>
+          <p:cNvPr id="386" name=""/>
           <p:cNvSpPr txBox="1"/>
           <p:nvPr/>
         </p:nvSpPr>
@@ -8826,7 +8826,7 @@
                 <a:uFillTx/>
                 <a:latin typeface="Arial"/>
               </a:rPr>
-              <a:t>THE CODE IS THE LOOP</a:t>
+              <a:t>STEP 5 · MAIN</a:t>
             </a:r>
             <a:endParaRPr lang="en-US" sz="1150" b="0" u="none" strike="noStrike">
               <a:solidFill>
@@ -8841,14 +8841,14 @@
       </p:sp>
       <p:sp>
         <p:nvSpPr>
-          <p:cNvPr id="386" name=""/>
+          <p:cNvPr id="387" name=""/>
           <p:cNvSpPr txBox="1"/>
           <p:nvPr/>
         </p:nvSpPr>
         <p:spPr>
           <a:xfrm>
             <a:off x="630000" y="702000"/>
-            <a:ext cx="6300000" cy="936000"/>
+            <a:ext cx="5040000" cy="936000"/>
           </a:xfrm>
           <a:prstGeom prst="rect">
             <a:avLst/>
@@ -8864,7 +8864,7 @@
           </a:bodyPr>
           <a:p>
             <a:r>
-              <a:rPr lang="en-US" sz="3200" b="1" u="none" strike="noStrike">
+              <a:rPr lang="en-US" sz="3000" b="1" u="none" strike="noStrike">
                 <a:solidFill>
                   <a:srgbClr val="ECEEF2"/>
                 </a:solidFill>
@@ -8874,47 +8874,7 @@
               </a:rPr>
               <a:t>Nothing is hidden</a:t>
             </a:r>
-            <a:endParaRPr lang="en-US" sz="3200" b="0" u="none" strike="noStrike">
-              <a:solidFill>
-                <a:srgbClr val="FFFFFF"/>
-              </a:solidFill>
-              <a:effectLst/>
-              <a:uFillTx/>
-              <a:latin typeface="Arial"/>
-            </a:endParaRPr>
-          </a:p>
-        </p:txBody>
-      </p:sp>
-      <p:sp>
-        <p:nvSpPr>
-          <p:cNvPr id="387" name=""/>
-          <p:cNvSpPr/>
-          <p:nvPr/>
-        </p:nvSpPr>
-        <p:spPr>
-          <a:xfrm>
-            <a:off x="630000" y="1404000"/>
-            <a:ext cx="1375200" cy="900000"/>
-          </a:xfrm>
-          <a:prstGeom prst="rect">
-            <a:avLst/>
-          </a:prstGeom>
-          <a:solidFill>
-            <a:srgbClr val="1A1836"/>
-          </a:solidFill>
-          <a:ln w="9360">
-            <a:solidFill>
-              <a:srgbClr val="8B80F9"/>
-            </a:solidFill>
-            <a:round/>
-          </a:ln>
-        </p:spPr>
-        <p:txBody>
-          <a:bodyPr lIns="0" tIns="0" rIns="0" bIns="0" anchor="t">
-            <a:noAutofit/>
-          </a:bodyPr>
-          <a:p>
-            <a:endParaRPr lang="en-US" sz="1800" b="0" u="none" strike="noStrike">
+            <a:endParaRPr lang="en-US" sz="3000" b="0" u="none" strike="noStrike">
               <a:solidFill>
                 <a:srgbClr val="FFFFFF"/>
               </a:solidFill>
@@ -8928,1061 +8888,13 @@
       <p:sp>
         <p:nvSpPr>
           <p:cNvPr id="388" name=""/>
-          <p:cNvSpPr txBox="1"/>
-          <p:nvPr/>
-        </p:nvSpPr>
-        <p:spPr>
-          <a:xfrm>
-            <a:off x="738000" y="1494000"/>
-            <a:ext cx="1195200" cy="216000"/>
-          </a:xfrm>
-          <a:prstGeom prst="rect">
-            <a:avLst/>
-          </a:prstGeom>
-          <a:noFill/>
-          <a:ln w="0">
-            <a:noFill/>
-          </a:ln>
-        </p:spPr>
-        <p:txBody>
-          <a:bodyPr lIns="0" tIns="0" rIns="0" bIns="0" anchor="t">
-            <a:noAutofit/>
-          </a:bodyPr>
-          <a:p>
-            <a:r>
-              <a:rPr lang="en-US" sz="1100" b="1" u="none" strike="noStrike">
-                <a:solidFill>
-                  <a:srgbClr val="8B80F9"/>
-                </a:solidFill>
-                <a:effectLst/>
-                <a:uFillTx/>
-                <a:latin typeface="Arial"/>
-              </a:rPr>
-              <a:t>1 ✓</a:t>
-            </a:r>
-            <a:endParaRPr lang="en-US" sz="1100" b="0" u="none" strike="noStrike">
-              <a:solidFill>
-                <a:srgbClr val="FFFFFF"/>
-              </a:solidFill>
-              <a:effectLst/>
-              <a:uFillTx/>
-              <a:latin typeface="Arial"/>
-            </a:endParaRPr>
-          </a:p>
-        </p:txBody>
-      </p:sp>
-      <p:sp>
-        <p:nvSpPr>
-          <p:cNvPr id="389" name=""/>
-          <p:cNvSpPr txBox="1"/>
-          <p:nvPr/>
-        </p:nvSpPr>
-        <p:spPr>
-          <a:xfrm>
-            <a:off x="630000" y="1746000"/>
-            <a:ext cx="1375200" cy="288000"/>
-          </a:xfrm>
-          <a:prstGeom prst="rect">
-            <a:avLst/>
-          </a:prstGeom>
-          <a:noFill/>
-          <a:ln w="0">
-            <a:noFill/>
-          </a:ln>
-        </p:spPr>
-        <p:txBody>
-          <a:bodyPr lIns="0" tIns="0" rIns="0" bIns="0" anchor="t">
-            <a:noAutofit/>
-          </a:bodyPr>
-          <a:p>
-            <a:pPr algn="ctr"/>
-            <a:r>
-              <a:rPr lang="en-US" sz="1300" b="1" u="none" strike="noStrike">
-                <a:solidFill>
-                  <a:srgbClr val="ECEEF2"/>
-                </a:solidFill>
-                <a:effectLst/>
-                <a:uFillTx/>
-                <a:latin typeface="Arial"/>
-              </a:rPr>
-              <a:t>Forward</a:t>
-            </a:r>
-            <a:endParaRPr lang="en-US" sz="1300" b="0" u="none" strike="noStrike">
-              <a:solidFill>
-                <a:srgbClr val="FFFFFF"/>
-              </a:solidFill>
-              <a:effectLst/>
-              <a:uFillTx/>
-              <a:latin typeface="Arial"/>
-            </a:endParaRPr>
-          </a:p>
-        </p:txBody>
-      </p:sp>
-      <p:sp>
-        <p:nvSpPr>
-          <p:cNvPr id="390" name=""/>
-          <p:cNvSpPr txBox="1"/>
-          <p:nvPr/>
-        </p:nvSpPr>
-        <p:spPr>
-          <a:xfrm>
-            <a:off x="630000" y="1980000"/>
-            <a:ext cx="1375200" cy="252000"/>
-          </a:xfrm>
-          <a:prstGeom prst="rect">
-            <a:avLst/>
-          </a:prstGeom>
-          <a:noFill/>
-          <a:ln w="0">
-            <a:noFill/>
-          </a:ln>
-        </p:spPr>
-        <p:txBody>
-          <a:bodyPr lIns="0" tIns="0" rIns="0" bIns="0" anchor="t">
-            <a:noAutofit/>
-          </a:bodyPr>
-          <a:p>
-            <a:pPr algn="ctr"/>
-            <a:r>
-              <a:rPr lang="en-US" sz="900" b="0" u="none" strike="noStrike">
-                <a:solidFill>
-                  <a:srgbClr val="6B7480"/>
-                </a:solidFill>
-                <a:effectLst/>
-                <a:uFillTx/>
-                <a:latin typeface="Arial"/>
-              </a:rPr>
-              <a:t>make a guess</a:t>
-            </a:r>
-            <a:endParaRPr lang="en-US" sz="900" b="0" u="none" strike="noStrike">
-              <a:solidFill>
-                <a:srgbClr val="FFFFFF"/>
-              </a:solidFill>
-              <a:effectLst/>
-              <a:uFillTx/>
-              <a:latin typeface="Arial"/>
-            </a:endParaRPr>
-          </a:p>
-        </p:txBody>
-      </p:sp>
-      <p:sp>
-        <p:nvSpPr>
-          <p:cNvPr id="391" name=""/>
-          <p:cNvSpPr txBox="1"/>
-          <p:nvPr/>
-        </p:nvSpPr>
-        <p:spPr>
-          <a:xfrm>
-            <a:off x="2005200" y="1404000"/>
-            <a:ext cx="252000" cy="900000"/>
-          </a:xfrm>
-          <a:prstGeom prst="rect">
-            <a:avLst/>
-          </a:prstGeom>
-          <a:noFill/>
-          <a:ln w="0">
-            <a:noFill/>
-          </a:ln>
-        </p:spPr>
-        <p:txBody>
-          <a:bodyPr lIns="0" tIns="0" rIns="0" bIns="0" anchor="ctr">
-            <a:noAutofit/>
-          </a:bodyPr>
-          <a:p>
-            <a:pPr algn="ctr"/>
-            <a:r>
-              <a:rPr lang="en-US" sz="1500" b="1" u="none" strike="noStrike">
-                <a:solidFill>
-                  <a:srgbClr val="8B80F9"/>
-                </a:solidFill>
-                <a:effectLst/>
-                <a:uFillTx/>
-                <a:latin typeface="Arial"/>
-              </a:rPr>
-              <a:t>→</a:t>
-            </a:r>
-            <a:endParaRPr lang="en-US" sz="1500" b="0" u="none" strike="noStrike">
-              <a:solidFill>
-                <a:srgbClr val="FFFFFF"/>
-              </a:solidFill>
-              <a:effectLst/>
-              <a:uFillTx/>
-              <a:latin typeface="Arial"/>
-            </a:endParaRPr>
-          </a:p>
-        </p:txBody>
-      </p:sp>
-      <p:sp>
-        <p:nvSpPr>
-          <p:cNvPr id="392" name=""/>
-          <p:cNvSpPr/>
-          <p:nvPr/>
-        </p:nvSpPr>
-        <p:spPr>
-          <a:xfrm>
-            <a:off x="2257200" y="1404000"/>
-            <a:ext cx="1375200" cy="900000"/>
-          </a:xfrm>
-          <a:prstGeom prst="rect">
-            <a:avLst/>
-          </a:prstGeom>
-          <a:solidFill>
-            <a:srgbClr val="1A1836"/>
-          </a:solidFill>
-          <a:ln w="9360">
-            <a:solidFill>
-              <a:srgbClr val="8B80F9"/>
-            </a:solidFill>
-            <a:round/>
-          </a:ln>
-        </p:spPr>
-        <p:txBody>
-          <a:bodyPr lIns="0" tIns="0" rIns="0" bIns="0" anchor="t">
-            <a:noAutofit/>
-          </a:bodyPr>
-          <a:p>
-            <a:endParaRPr lang="en-US" sz="1800" b="0" u="none" strike="noStrike">
-              <a:solidFill>
-                <a:srgbClr val="FFFFFF"/>
-              </a:solidFill>
-              <a:effectLst/>
-              <a:uFillTx/>
-              <a:latin typeface="Arial"/>
-            </a:endParaRPr>
-          </a:p>
-        </p:txBody>
-      </p:sp>
-      <p:sp>
-        <p:nvSpPr>
-          <p:cNvPr id="393" name=""/>
-          <p:cNvSpPr txBox="1"/>
-          <p:nvPr/>
-        </p:nvSpPr>
-        <p:spPr>
-          <a:xfrm>
-            <a:off x="2365200" y="1494000"/>
-            <a:ext cx="1195200" cy="216000"/>
-          </a:xfrm>
-          <a:prstGeom prst="rect">
-            <a:avLst/>
-          </a:prstGeom>
-          <a:noFill/>
-          <a:ln w="0">
-            <a:noFill/>
-          </a:ln>
-        </p:spPr>
-        <p:txBody>
-          <a:bodyPr lIns="0" tIns="0" rIns="0" bIns="0" anchor="t">
-            <a:noAutofit/>
-          </a:bodyPr>
-          <a:p>
-            <a:r>
-              <a:rPr lang="en-US" sz="1100" b="1" u="none" strike="noStrike">
-                <a:solidFill>
-                  <a:srgbClr val="8B80F9"/>
-                </a:solidFill>
-                <a:effectLst/>
-                <a:uFillTx/>
-                <a:latin typeface="Arial"/>
-              </a:rPr>
-              <a:t>2 ✓</a:t>
-            </a:r>
-            <a:endParaRPr lang="en-US" sz="1100" b="0" u="none" strike="noStrike">
-              <a:solidFill>
-                <a:srgbClr val="FFFFFF"/>
-              </a:solidFill>
-              <a:effectLst/>
-              <a:uFillTx/>
-              <a:latin typeface="Arial"/>
-            </a:endParaRPr>
-          </a:p>
-        </p:txBody>
-      </p:sp>
-      <p:sp>
-        <p:nvSpPr>
-          <p:cNvPr id="394" name=""/>
-          <p:cNvSpPr txBox="1"/>
-          <p:nvPr/>
-        </p:nvSpPr>
-        <p:spPr>
-          <a:xfrm>
-            <a:off x="2257200" y="1746000"/>
-            <a:ext cx="1375200" cy="288000"/>
-          </a:xfrm>
-          <a:prstGeom prst="rect">
-            <a:avLst/>
-          </a:prstGeom>
-          <a:noFill/>
-          <a:ln w="0">
-            <a:noFill/>
-          </a:ln>
-        </p:spPr>
-        <p:txBody>
-          <a:bodyPr lIns="0" tIns="0" rIns="0" bIns="0" anchor="t">
-            <a:noAutofit/>
-          </a:bodyPr>
-          <a:p>
-            <a:pPr algn="ctr"/>
-            <a:r>
-              <a:rPr lang="en-US" sz="1300" b="1" u="none" strike="noStrike">
-                <a:solidFill>
-                  <a:srgbClr val="ECEEF2"/>
-                </a:solidFill>
-                <a:effectLst/>
-                <a:uFillTx/>
-                <a:latin typeface="Arial"/>
-              </a:rPr>
-              <a:t>Loss</a:t>
-            </a:r>
-            <a:endParaRPr lang="en-US" sz="1300" b="0" u="none" strike="noStrike">
-              <a:solidFill>
-                <a:srgbClr val="FFFFFF"/>
-              </a:solidFill>
-              <a:effectLst/>
-              <a:uFillTx/>
-              <a:latin typeface="Arial"/>
-            </a:endParaRPr>
-          </a:p>
-        </p:txBody>
-      </p:sp>
-      <p:sp>
-        <p:nvSpPr>
-          <p:cNvPr id="395" name=""/>
-          <p:cNvSpPr txBox="1"/>
-          <p:nvPr/>
-        </p:nvSpPr>
-        <p:spPr>
-          <a:xfrm>
-            <a:off x="2257200" y="1980000"/>
-            <a:ext cx="1375200" cy="252000"/>
-          </a:xfrm>
-          <a:prstGeom prst="rect">
-            <a:avLst/>
-          </a:prstGeom>
-          <a:noFill/>
-          <a:ln w="0">
-            <a:noFill/>
-          </a:ln>
-        </p:spPr>
-        <p:txBody>
-          <a:bodyPr lIns="0" tIns="0" rIns="0" bIns="0" anchor="t">
-            <a:noAutofit/>
-          </a:bodyPr>
-          <a:p>
-            <a:pPr algn="ctr"/>
-            <a:r>
-              <a:rPr lang="en-US" sz="900" b="0" u="none" strike="noStrike">
-                <a:solidFill>
-                  <a:srgbClr val="6B7480"/>
-                </a:solidFill>
-                <a:effectLst/>
-                <a:uFillTx/>
-                <a:latin typeface="Arial"/>
-              </a:rPr>
-              <a:t>measure wrongness</a:t>
-            </a:r>
-            <a:endParaRPr lang="en-US" sz="900" b="0" u="none" strike="noStrike">
-              <a:solidFill>
-                <a:srgbClr val="FFFFFF"/>
-              </a:solidFill>
-              <a:effectLst/>
-              <a:uFillTx/>
-              <a:latin typeface="Arial"/>
-            </a:endParaRPr>
-          </a:p>
-        </p:txBody>
-      </p:sp>
-      <p:sp>
-        <p:nvSpPr>
-          <p:cNvPr id="396" name=""/>
-          <p:cNvSpPr txBox="1"/>
-          <p:nvPr/>
-        </p:nvSpPr>
-        <p:spPr>
-          <a:xfrm>
-            <a:off x="3632400" y="1404000"/>
-            <a:ext cx="252000" cy="900000"/>
-          </a:xfrm>
-          <a:prstGeom prst="rect">
-            <a:avLst/>
-          </a:prstGeom>
-          <a:noFill/>
-          <a:ln w="0">
-            <a:noFill/>
-          </a:ln>
-        </p:spPr>
-        <p:txBody>
-          <a:bodyPr lIns="0" tIns="0" rIns="0" bIns="0" anchor="ctr">
-            <a:noAutofit/>
-          </a:bodyPr>
-          <a:p>
-            <a:pPr algn="ctr"/>
-            <a:r>
-              <a:rPr lang="en-US" sz="1500" b="1" u="none" strike="noStrike">
-                <a:solidFill>
-                  <a:srgbClr val="8B80F9"/>
-                </a:solidFill>
-                <a:effectLst/>
-                <a:uFillTx/>
-                <a:latin typeface="Arial"/>
-              </a:rPr>
-              <a:t>→</a:t>
-            </a:r>
-            <a:endParaRPr lang="en-US" sz="1500" b="0" u="none" strike="noStrike">
-              <a:solidFill>
-                <a:srgbClr val="FFFFFF"/>
-              </a:solidFill>
-              <a:effectLst/>
-              <a:uFillTx/>
-              <a:latin typeface="Arial"/>
-            </a:endParaRPr>
-          </a:p>
-        </p:txBody>
-      </p:sp>
-      <p:sp>
-        <p:nvSpPr>
-          <p:cNvPr id="397" name=""/>
-          <p:cNvSpPr/>
-          <p:nvPr/>
-        </p:nvSpPr>
-        <p:spPr>
-          <a:xfrm>
-            <a:off x="3884400" y="1404000"/>
-            <a:ext cx="1375200" cy="900000"/>
-          </a:xfrm>
-          <a:prstGeom prst="rect">
-            <a:avLst/>
-          </a:prstGeom>
-          <a:solidFill>
-            <a:srgbClr val="1A1836"/>
-          </a:solidFill>
-          <a:ln w="9360">
-            <a:solidFill>
-              <a:srgbClr val="8B80F9"/>
-            </a:solidFill>
-            <a:round/>
-          </a:ln>
-        </p:spPr>
-        <p:txBody>
-          <a:bodyPr lIns="0" tIns="0" rIns="0" bIns="0" anchor="t">
-            <a:noAutofit/>
-          </a:bodyPr>
-          <a:p>
-            <a:endParaRPr lang="en-US" sz="1800" b="0" u="none" strike="noStrike">
-              <a:solidFill>
-                <a:srgbClr val="FFFFFF"/>
-              </a:solidFill>
-              <a:effectLst/>
-              <a:uFillTx/>
-              <a:latin typeface="Arial"/>
-            </a:endParaRPr>
-          </a:p>
-        </p:txBody>
-      </p:sp>
-      <p:sp>
-        <p:nvSpPr>
-          <p:cNvPr id="398" name=""/>
-          <p:cNvSpPr txBox="1"/>
-          <p:nvPr/>
-        </p:nvSpPr>
-        <p:spPr>
-          <a:xfrm>
-            <a:off x="3992400" y="1494000"/>
-            <a:ext cx="1195200" cy="216000"/>
-          </a:xfrm>
-          <a:prstGeom prst="rect">
-            <a:avLst/>
-          </a:prstGeom>
-          <a:noFill/>
-          <a:ln w="0">
-            <a:noFill/>
-          </a:ln>
-        </p:spPr>
-        <p:txBody>
-          <a:bodyPr lIns="0" tIns="0" rIns="0" bIns="0" anchor="t">
-            <a:noAutofit/>
-          </a:bodyPr>
-          <a:p>
-            <a:r>
-              <a:rPr lang="en-US" sz="1100" b="1" u="none" strike="noStrike">
-                <a:solidFill>
-                  <a:srgbClr val="8B80F9"/>
-                </a:solidFill>
-                <a:effectLst/>
-                <a:uFillTx/>
-                <a:latin typeface="Arial"/>
-              </a:rPr>
-              <a:t>3 ✓</a:t>
-            </a:r>
-            <a:endParaRPr lang="en-US" sz="1100" b="0" u="none" strike="noStrike">
-              <a:solidFill>
-                <a:srgbClr val="FFFFFF"/>
-              </a:solidFill>
-              <a:effectLst/>
-              <a:uFillTx/>
-              <a:latin typeface="Arial"/>
-            </a:endParaRPr>
-          </a:p>
-        </p:txBody>
-      </p:sp>
-      <p:sp>
-        <p:nvSpPr>
-          <p:cNvPr id="399" name=""/>
-          <p:cNvSpPr txBox="1"/>
-          <p:nvPr/>
-        </p:nvSpPr>
-        <p:spPr>
-          <a:xfrm>
-            <a:off x="3884400" y="1746000"/>
-            <a:ext cx="1375200" cy="288000"/>
-          </a:xfrm>
-          <a:prstGeom prst="rect">
-            <a:avLst/>
-          </a:prstGeom>
-          <a:noFill/>
-          <a:ln w="0">
-            <a:noFill/>
-          </a:ln>
-        </p:spPr>
-        <p:txBody>
-          <a:bodyPr lIns="0" tIns="0" rIns="0" bIns="0" anchor="t">
-            <a:noAutofit/>
-          </a:bodyPr>
-          <a:p>
-            <a:pPr algn="ctr"/>
-            <a:r>
-              <a:rPr lang="en-US" sz="1300" b="1" u="none" strike="noStrike">
-                <a:solidFill>
-                  <a:srgbClr val="ECEEF2"/>
-                </a:solidFill>
-                <a:effectLst/>
-                <a:uFillTx/>
-                <a:latin typeface="Arial"/>
-              </a:rPr>
-              <a:t>Backprop</a:t>
-            </a:r>
-            <a:endParaRPr lang="en-US" sz="1300" b="0" u="none" strike="noStrike">
-              <a:solidFill>
-                <a:srgbClr val="FFFFFF"/>
-              </a:solidFill>
-              <a:effectLst/>
-              <a:uFillTx/>
-              <a:latin typeface="Arial"/>
-            </a:endParaRPr>
-          </a:p>
-        </p:txBody>
-      </p:sp>
-      <p:sp>
-        <p:nvSpPr>
-          <p:cNvPr id="400" name=""/>
-          <p:cNvSpPr txBox="1"/>
-          <p:nvPr/>
-        </p:nvSpPr>
-        <p:spPr>
-          <a:xfrm>
-            <a:off x="3884400" y="1980000"/>
-            <a:ext cx="1375200" cy="252000"/>
-          </a:xfrm>
-          <a:prstGeom prst="rect">
-            <a:avLst/>
-          </a:prstGeom>
-          <a:noFill/>
-          <a:ln w="0">
-            <a:noFill/>
-          </a:ln>
-        </p:spPr>
-        <p:txBody>
-          <a:bodyPr lIns="0" tIns="0" rIns="0" bIns="0" anchor="t">
-            <a:noAutofit/>
-          </a:bodyPr>
-          <a:p>
-            <a:pPr algn="ctr"/>
-            <a:r>
-              <a:rPr lang="en-US" sz="900" b="0" u="none" strike="noStrike">
-                <a:solidFill>
-                  <a:srgbClr val="6B7480"/>
-                </a:solidFill>
-                <a:effectLst/>
-                <a:uFillTx/>
-                <a:latin typeface="Arial"/>
-              </a:rPr>
-              <a:t>find gradients</a:t>
-            </a:r>
-            <a:endParaRPr lang="en-US" sz="900" b="0" u="none" strike="noStrike">
-              <a:solidFill>
-                <a:srgbClr val="FFFFFF"/>
-              </a:solidFill>
-              <a:effectLst/>
-              <a:uFillTx/>
-              <a:latin typeface="Arial"/>
-            </a:endParaRPr>
-          </a:p>
-        </p:txBody>
-      </p:sp>
-      <p:sp>
-        <p:nvSpPr>
-          <p:cNvPr id="401" name=""/>
-          <p:cNvSpPr txBox="1"/>
-          <p:nvPr/>
-        </p:nvSpPr>
-        <p:spPr>
-          <a:xfrm>
-            <a:off x="5259600" y="1404000"/>
-            <a:ext cx="252000" cy="900000"/>
-          </a:xfrm>
-          <a:prstGeom prst="rect">
-            <a:avLst/>
-          </a:prstGeom>
-          <a:noFill/>
-          <a:ln w="0">
-            <a:noFill/>
-          </a:ln>
-        </p:spPr>
-        <p:txBody>
-          <a:bodyPr lIns="0" tIns="0" rIns="0" bIns="0" anchor="ctr">
-            <a:noAutofit/>
-          </a:bodyPr>
-          <a:p>
-            <a:pPr algn="ctr"/>
-            <a:r>
-              <a:rPr lang="en-US" sz="1500" b="1" u="none" strike="noStrike">
-                <a:solidFill>
-                  <a:srgbClr val="8B80F9"/>
-                </a:solidFill>
-                <a:effectLst/>
-                <a:uFillTx/>
-                <a:latin typeface="Arial"/>
-              </a:rPr>
-              <a:t>→</a:t>
-            </a:r>
-            <a:endParaRPr lang="en-US" sz="1500" b="0" u="none" strike="noStrike">
-              <a:solidFill>
-                <a:srgbClr val="FFFFFF"/>
-              </a:solidFill>
-              <a:effectLst/>
-              <a:uFillTx/>
-              <a:latin typeface="Arial"/>
-            </a:endParaRPr>
-          </a:p>
-        </p:txBody>
-      </p:sp>
-      <p:sp>
-        <p:nvSpPr>
-          <p:cNvPr id="402" name=""/>
-          <p:cNvSpPr/>
-          <p:nvPr/>
-        </p:nvSpPr>
-        <p:spPr>
-          <a:xfrm>
-            <a:off x="5511600" y="1404000"/>
-            <a:ext cx="1375200" cy="900000"/>
-          </a:xfrm>
-          <a:prstGeom prst="rect">
-            <a:avLst/>
-          </a:prstGeom>
-          <a:solidFill>
-            <a:srgbClr val="1A1836"/>
-          </a:solidFill>
-          <a:ln w="9360">
-            <a:solidFill>
-              <a:srgbClr val="8B80F9"/>
-            </a:solidFill>
-            <a:round/>
-          </a:ln>
-        </p:spPr>
-        <p:txBody>
-          <a:bodyPr lIns="0" tIns="0" rIns="0" bIns="0" anchor="t">
-            <a:noAutofit/>
-          </a:bodyPr>
-          <a:p>
-            <a:endParaRPr lang="en-US" sz="1800" b="0" u="none" strike="noStrike">
-              <a:solidFill>
-                <a:srgbClr val="FFFFFF"/>
-              </a:solidFill>
-              <a:effectLst/>
-              <a:uFillTx/>
-              <a:latin typeface="Arial"/>
-            </a:endParaRPr>
-          </a:p>
-        </p:txBody>
-      </p:sp>
-      <p:sp>
-        <p:nvSpPr>
-          <p:cNvPr id="403" name=""/>
-          <p:cNvSpPr txBox="1"/>
-          <p:nvPr/>
-        </p:nvSpPr>
-        <p:spPr>
-          <a:xfrm>
-            <a:off x="5619600" y="1494000"/>
-            <a:ext cx="1195200" cy="216000"/>
-          </a:xfrm>
-          <a:prstGeom prst="rect">
-            <a:avLst/>
-          </a:prstGeom>
-          <a:noFill/>
-          <a:ln w="0">
-            <a:noFill/>
-          </a:ln>
-        </p:spPr>
-        <p:txBody>
-          <a:bodyPr lIns="0" tIns="0" rIns="0" bIns="0" anchor="t">
-            <a:noAutofit/>
-          </a:bodyPr>
-          <a:p>
-            <a:r>
-              <a:rPr lang="en-US" sz="1100" b="1" u="none" strike="noStrike">
-                <a:solidFill>
-                  <a:srgbClr val="8B80F9"/>
-                </a:solidFill>
-                <a:effectLst/>
-                <a:uFillTx/>
-                <a:latin typeface="Arial"/>
-              </a:rPr>
-              <a:t>4 ✓</a:t>
-            </a:r>
-            <a:endParaRPr lang="en-US" sz="1100" b="0" u="none" strike="noStrike">
-              <a:solidFill>
-                <a:srgbClr val="FFFFFF"/>
-              </a:solidFill>
-              <a:effectLst/>
-              <a:uFillTx/>
-              <a:latin typeface="Arial"/>
-            </a:endParaRPr>
-          </a:p>
-        </p:txBody>
-      </p:sp>
-      <p:sp>
-        <p:nvSpPr>
-          <p:cNvPr id="404" name=""/>
-          <p:cNvSpPr txBox="1"/>
-          <p:nvPr/>
-        </p:nvSpPr>
-        <p:spPr>
-          <a:xfrm>
-            <a:off x="5511600" y="1746000"/>
-            <a:ext cx="1375200" cy="288000"/>
-          </a:xfrm>
-          <a:prstGeom prst="rect">
-            <a:avLst/>
-          </a:prstGeom>
-          <a:noFill/>
-          <a:ln w="0">
-            <a:noFill/>
-          </a:ln>
-        </p:spPr>
-        <p:txBody>
-          <a:bodyPr lIns="0" tIns="0" rIns="0" bIns="0" anchor="t">
-            <a:noAutofit/>
-          </a:bodyPr>
-          <a:p>
-            <a:pPr algn="ctr"/>
-            <a:r>
-              <a:rPr lang="en-US" sz="1300" b="1" u="none" strike="noStrike">
-                <a:solidFill>
-                  <a:srgbClr val="ECEEF2"/>
-                </a:solidFill>
-                <a:effectLst/>
-                <a:uFillTx/>
-                <a:latin typeface="Arial"/>
-              </a:rPr>
-              <a:t>Update</a:t>
-            </a:r>
-            <a:endParaRPr lang="en-US" sz="1300" b="0" u="none" strike="noStrike">
-              <a:solidFill>
-                <a:srgbClr val="FFFFFF"/>
-              </a:solidFill>
-              <a:effectLst/>
-              <a:uFillTx/>
-              <a:latin typeface="Arial"/>
-            </a:endParaRPr>
-          </a:p>
-        </p:txBody>
-      </p:sp>
-      <p:sp>
-        <p:nvSpPr>
-          <p:cNvPr id="405" name=""/>
-          <p:cNvSpPr txBox="1"/>
-          <p:nvPr/>
-        </p:nvSpPr>
-        <p:spPr>
-          <a:xfrm>
-            <a:off x="5511600" y="1980000"/>
-            <a:ext cx="1375200" cy="252000"/>
-          </a:xfrm>
-          <a:prstGeom prst="rect">
-            <a:avLst/>
-          </a:prstGeom>
-          <a:noFill/>
-          <a:ln w="0">
-            <a:noFill/>
-          </a:ln>
-        </p:spPr>
-        <p:txBody>
-          <a:bodyPr lIns="0" tIns="0" rIns="0" bIns="0" anchor="t">
-            <a:noAutofit/>
-          </a:bodyPr>
-          <a:p>
-            <a:pPr algn="ctr"/>
-            <a:r>
-              <a:rPr lang="en-US" sz="900" b="0" u="none" strike="noStrike">
-                <a:solidFill>
-                  <a:srgbClr val="6B7480"/>
-                </a:solidFill>
-                <a:effectLst/>
-                <a:uFillTx/>
-                <a:latin typeface="Arial"/>
-              </a:rPr>
-              <a:t>change weights</a:t>
-            </a:r>
-            <a:endParaRPr lang="en-US" sz="900" b="0" u="none" strike="noStrike">
-              <a:solidFill>
-                <a:srgbClr val="FFFFFF"/>
-              </a:solidFill>
-              <a:effectLst/>
-              <a:uFillTx/>
-              <a:latin typeface="Arial"/>
-            </a:endParaRPr>
-          </a:p>
-        </p:txBody>
-      </p:sp>
-      <p:sp>
-        <p:nvSpPr>
-          <p:cNvPr id="406" name=""/>
-          <p:cNvSpPr txBox="1"/>
-          <p:nvPr/>
-        </p:nvSpPr>
-        <p:spPr>
-          <a:xfrm>
-            <a:off x="6886800" y="1404000"/>
-            <a:ext cx="252000" cy="900000"/>
-          </a:xfrm>
-          <a:prstGeom prst="rect">
-            <a:avLst/>
-          </a:prstGeom>
-          <a:noFill/>
-          <a:ln w="0">
-            <a:noFill/>
-          </a:ln>
-        </p:spPr>
-        <p:txBody>
-          <a:bodyPr lIns="0" tIns="0" rIns="0" bIns="0" anchor="ctr">
-            <a:noAutofit/>
-          </a:bodyPr>
-          <a:p>
-            <a:pPr algn="ctr"/>
-            <a:r>
-              <a:rPr lang="en-US" sz="1500" b="1" u="none" strike="noStrike">
-                <a:solidFill>
-                  <a:srgbClr val="8B80F9"/>
-                </a:solidFill>
-                <a:effectLst/>
-                <a:uFillTx/>
-                <a:latin typeface="Arial"/>
-              </a:rPr>
-              <a:t>→</a:t>
-            </a:r>
-            <a:endParaRPr lang="en-US" sz="1500" b="0" u="none" strike="noStrike">
-              <a:solidFill>
-                <a:srgbClr val="FFFFFF"/>
-              </a:solidFill>
-              <a:effectLst/>
-              <a:uFillTx/>
-              <a:latin typeface="Arial"/>
-            </a:endParaRPr>
-          </a:p>
-        </p:txBody>
-      </p:sp>
-      <p:sp>
-        <p:nvSpPr>
-          <p:cNvPr id="407" name=""/>
-          <p:cNvSpPr/>
-          <p:nvPr/>
-        </p:nvSpPr>
-        <p:spPr>
-          <a:xfrm>
-            <a:off x="7138800" y="1404000"/>
-            <a:ext cx="1375200" cy="900000"/>
-          </a:xfrm>
-          <a:prstGeom prst="rect">
-            <a:avLst/>
-          </a:prstGeom>
-          <a:solidFill>
-            <a:srgbClr val="1A1836"/>
-          </a:solidFill>
-          <a:ln w="9360">
-            <a:solidFill>
-              <a:srgbClr val="8B80F9"/>
-            </a:solidFill>
-            <a:round/>
-          </a:ln>
-        </p:spPr>
-        <p:txBody>
-          <a:bodyPr lIns="0" tIns="0" rIns="0" bIns="0" anchor="t">
-            <a:noAutofit/>
-          </a:bodyPr>
-          <a:p>
-            <a:endParaRPr lang="en-US" sz="1800" b="0" u="none" strike="noStrike">
-              <a:solidFill>
-                <a:srgbClr val="FFFFFF"/>
-              </a:solidFill>
-              <a:effectLst/>
-              <a:uFillTx/>
-              <a:latin typeface="Arial"/>
-            </a:endParaRPr>
-          </a:p>
-        </p:txBody>
-      </p:sp>
-      <p:sp>
-        <p:nvSpPr>
-          <p:cNvPr id="408" name=""/>
-          <p:cNvSpPr txBox="1"/>
-          <p:nvPr/>
-        </p:nvSpPr>
-        <p:spPr>
-          <a:xfrm>
-            <a:off x="7246800" y="1494000"/>
-            <a:ext cx="1195200" cy="216000"/>
-          </a:xfrm>
-          <a:prstGeom prst="rect">
-            <a:avLst/>
-          </a:prstGeom>
-          <a:noFill/>
-          <a:ln w="0">
-            <a:noFill/>
-          </a:ln>
-        </p:spPr>
-        <p:txBody>
-          <a:bodyPr lIns="0" tIns="0" rIns="0" bIns="0" anchor="t">
-            <a:noAutofit/>
-          </a:bodyPr>
-          <a:p>
-            <a:r>
-              <a:rPr lang="en-US" sz="1100" b="1" u="none" strike="noStrike">
-                <a:solidFill>
-                  <a:srgbClr val="8B80F9"/>
-                </a:solidFill>
-                <a:effectLst/>
-                <a:uFillTx/>
-                <a:latin typeface="Arial"/>
-              </a:rPr>
-              <a:t>5 ✓</a:t>
-            </a:r>
-            <a:endParaRPr lang="en-US" sz="1100" b="0" u="none" strike="noStrike">
-              <a:solidFill>
-                <a:srgbClr val="FFFFFF"/>
-              </a:solidFill>
-              <a:effectLst/>
-              <a:uFillTx/>
-              <a:latin typeface="Arial"/>
-            </a:endParaRPr>
-          </a:p>
-        </p:txBody>
-      </p:sp>
-      <p:sp>
-        <p:nvSpPr>
-          <p:cNvPr id="409" name=""/>
-          <p:cNvSpPr txBox="1"/>
-          <p:nvPr/>
-        </p:nvSpPr>
-        <p:spPr>
-          <a:xfrm>
-            <a:off x="7138800" y="1746000"/>
-            <a:ext cx="1375200" cy="288000"/>
-          </a:xfrm>
-          <a:prstGeom prst="rect">
-            <a:avLst/>
-          </a:prstGeom>
-          <a:noFill/>
-          <a:ln w="0">
-            <a:noFill/>
-          </a:ln>
-        </p:spPr>
-        <p:txBody>
-          <a:bodyPr lIns="0" tIns="0" rIns="0" bIns="0" anchor="t">
-            <a:noAutofit/>
-          </a:bodyPr>
-          <a:p>
-            <a:pPr algn="ctr"/>
-            <a:r>
-              <a:rPr lang="en-US" sz="1300" b="1" u="none" strike="noStrike">
-                <a:solidFill>
-                  <a:srgbClr val="ECEEF2"/>
-                </a:solidFill>
-                <a:effectLst/>
-                <a:uFillTx/>
-                <a:latin typeface="Arial"/>
-              </a:rPr>
-              <a:t>Repeat</a:t>
-            </a:r>
-            <a:endParaRPr lang="en-US" sz="1300" b="0" u="none" strike="noStrike">
-              <a:solidFill>
-                <a:srgbClr val="FFFFFF"/>
-              </a:solidFill>
-              <a:effectLst/>
-              <a:uFillTx/>
-              <a:latin typeface="Arial"/>
-            </a:endParaRPr>
-          </a:p>
-        </p:txBody>
-      </p:sp>
-      <p:sp>
-        <p:nvSpPr>
-          <p:cNvPr id="410" name=""/>
-          <p:cNvSpPr txBox="1"/>
-          <p:nvPr/>
-        </p:nvSpPr>
-        <p:spPr>
-          <a:xfrm>
-            <a:off x="7138800" y="1980000"/>
-            <a:ext cx="1375200" cy="252000"/>
-          </a:xfrm>
-          <a:prstGeom prst="rect">
-            <a:avLst/>
-          </a:prstGeom>
-          <a:noFill/>
-          <a:ln w="0">
-            <a:noFill/>
-          </a:ln>
-        </p:spPr>
-        <p:txBody>
-          <a:bodyPr lIns="0" tIns="0" rIns="0" bIns="0" anchor="t">
-            <a:noAutofit/>
-          </a:bodyPr>
-          <a:p>
-            <a:pPr algn="ctr"/>
-            <a:r>
-              <a:rPr lang="en-US" sz="900" b="0" u="none" strike="noStrike">
-                <a:solidFill>
-                  <a:srgbClr val="6B7480"/>
-                </a:solidFill>
-                <a:effectLst/>
-                <a:uFillTx/>
-                <a:latin typeface="Arial"/>
-              </a:rPr>
-              <a:t>try again</a:t>
-            </a:r>
-            <a:endParaRPr lang="en-US" sz="900" b="0" u="none" strike="noStrike">
-              <a:solidFill>
-                <a:srgbClr val="FFFFFF"/>
-              </a:solidFill>
-              <a:effectLst/>
-              <a:uFillTx/>
-              <a:latin typeface="Arial"/>
-            </a:endParaRPr>
-          </a:p>
-        </p:txBody>
-      </p:sp>
-      <p:sp>
-        <p:nvSpPr>
-          <p:cNvPr id="411" name=""/>
-          <p:cNvSpPr/>
-          <p:nvPr/>
-        </p:nvSpPr>
-        <p:spPr>
-          <a:xfrm>
-            <a:off x="630000" y="2592000"/>
-            <a:ext cx="7884000" cy="1584000"/>
+          <p:cNvSpPr/>
+          <p:nvPr/>
+        </p:nvSpPr>
+        <p:spPr>
+          <a:xfrm>
+            <a:off x="630000" y="1224000"/>
+            <a:ext cx="7884000" cy="3420000"/>
           </a:xfrm>
           <a:prstGeom prst="rect">
             <a:avLst/>
@@ -10015,14 +8927,14 @@
       </p:sp>
       <p:sp>
         <p:nvSpPr>
-          <p:cNvPr id="412" name=""/>
+          <p:cNvPr id="389" name=""/>
           <p:cNvSpPr txBox="1"/>
           <p:nvPr/>
         </p:nvSpPr>
         <p:spPr>
           <a:xfrm>
-            <a:off x="810000" y="2754000"/>
-            <a:ext cx="7524000" cy="1296000"/>
+            <a:off x="810000" y="1386000"/>
+            <a:ext cx="7524000" cy="3132000"/>
           </a:xfrm>
           <a:prstGeom prst="rect">
             <a:avLst/>
@@ -10038,7 +8950,7 @@
           </a:bodyPr>
           <a:p>
             <a:r>
-              <a:rPr lang="en-US" sz="950" b="0" u="none" strike="noStrike">
+              <a:rPr lang="en-US" sz="1000" b="0" u="none" strike="noStrike">
                 <a:solidFill>
                   <a:srgbClr val="ECEEF2"/>
                 </a:solidFill>
@@ -10046,20 +8958,20 @@
                 <a:uFillTx/>
                 <a:latin typeface="Arial"/>
               </a:rPr>
-              <a:t>prediction = model.forward(x) # 1 forward</a:t>
-            </a:r>
-            <a:endParaRPr lang="en-US" sz="950" b="0" u="none" strike="noStrike">
-              <a:solidFill>
-                <a:srgbClr val="FFFFFF"/>
-              </a:solidFill>
-              <a:effectLst/>
-              <a:uFillTx/>
-              <a:latin typeface="Arial"/>
-            </a:endParaRPr>
-          </a:p>
-          <a:p>
-            <a:r>
-              <a:rPr lang="en-US" sz="950" b="0" u="none" strike="noStrike">
+              <a:t>def main():</a:t>
+            </a:r>
+            <a:endParaRPr lang="en-US" sz="1000" b="0" u="none" strike="noStrike">
+              <a:solidFill>
+                <a:srgbClr val="FFFFFF"/>
+              </a:solidFill>
+              <a:effectLst/>
+              <a:uFillTx/>
+              <a:latin typeface="Arial"/>
+            </a:endParaRPr>
+          </a:p>
+          <a:p>
+            <a:r>
+              <a:rPr lang="en-US" sz="1000" b="0" u="none" strike="noStrike">
                 <a:solidFill>
                   <a:srgbClr val="ECEEF2"/>
                 </a:solidFill>
@@ -10067,20 +8979,20 @@
                 <a:uFillTx/>
                 <a:latin typeface="Arial"/>
               </a:rPr>
-              <a:t>loss = cross_entropy(prediction, target) # 2 loss</a:t>
-            </a:r>
-            <a:endParaRPr lang="en-US" sz="950" b="0" u="none" strike="noStrike">
-              <a:solidFill>
-                <a:srgbClr val="FFFFFF"/>
-              </a:solidFill>
-              <a:effectLst/>
-              <a:uFillTx/>
-              <a:latin typeface="Arial"/>
-            </a:endParaRPr>
-          </a:p>
-          <a:p>
-            <a:r>
-              <a:rPr lang="en-US" sz="950" b="0" u="none" strike="noStrike">
+              <a:t>    x, target, x_test, target_test = load_data()</a:t>
+            </a:r>
+            <a:endParaRPr lang="en-US" sz="1000" b="0" u="none" strike="noStrike">
+              <a:solidFill>
+                <a:srgbClr val="FFFFFF"/>
+              </a:solidFill>
+              <a:effectLst/>
+              <a:uFillTx/>
+              <a:latin typeface="Arial"/>
+            </a:endParaRPr>
+          </a:p>
+          <a:p>
+            <a:r>
+              <a:rPr lang="en-US" sz="1000" b="0" u="none" strike="noStrike">
                 <a:solidFill>
                   <a:srgbClr val="ECEEF2"/>
                 </a:solidFill>
@@ -10088,20 +9000,20 @@
                 <a:uFillTx/>
                 <a:latin typeface="Arial"/>
               </a:rPr>
-              <a:t>loss.backward() # 3 backprop</a:t>
-            </a:r>
-            <a:endParaRPr lang="en-US" sz="950" b="0" u="none" strike="noStrike">
-              <a:solidFill>
-                <a:srgbClr val="FFFFFF"/>
-              </a:solidFill>
-              <a:effectLst/>
-              <a:uFillTx/>
-              <a:latin typeface="Arial"/>
-            </a:endParaRPr>
-          </a:p>
-          <a:p>
-            <a:r>
-              <a:rPr lang="en-US" sz="950" b="0" u="none" strike="noStrike">
+              <a:t>    model = NeuralNetwork(784, 128, 10)</a:t>
+            </a:r>
+            <a:endParaRPr lang="en-US" sz="1000" b="0" u="none" strike="noStrike">
+              <a:solidFill>
+                <a:srgbClr val="FFFFFF"/>
+              </a:solidFill>
+              <a:effectLst/>
+              <a:uFillTx/>
+              <a:latin typeface="Arial"/>
+            </a:endParaRPr>
+          </a:p>
+          <a:p>
+            <a:r>
+              <a:rPr lang="en-US" sz="1000" b="0" u="none" strike="noStrike">
                 <a:solidFill>
                   <a:srgbClr val="ECEEF2"/>
                 </a:solidFill>
@@ -10109,20 +9021,20 @@
                 <a:uFillTx/>
                 <a:latin typeface="Arial"/>
               </a:rPr>
-              <a:t>parameter -= learning_rate * parameter.grad # 4 update</a:t>
-            </a:r>
-            <a:endParaRPr lang="en-US" sz="950" b="0" u="none" strike="noStrike">
-              <a:solidFill>
-                <a:srgbClr val="FFFFFF"/>
-              </a:solidFill>
-              <a:effectLst/>
-              <a:uFillTx/>
-              <a:latin typeface="Arial"/>
-            </a:endParaRPr>
-          </a:p>
-          <a:p>
-            <a:r>
-              <a:rPr lang="en-US" sz="950" b="0" u="none" strike="noStrike">
+              <a:t>    learning_rate = 0.1</a:t>
+            </a:r>
+            <a:endParaRPr lang="en-US" sz="1000" b="0" u="none" strike="noStrike">
+              <a:solidFill>
+                <a:srgbClr val="FFFFFF"/>
+              </a:solidFill>
+              <a:effectLst/>
+              <a:uFillTx/>
+              <a:latin typeface="Arial"/>
+            </a:endParaRPr>
+          </a:p>
+          <a:p>
+            <a:r>
+              <a:rPr lang="en-US" sz="1000" b="0" u="none" strike="noStrike">
                 <a:solidFill>
                   <a:srgbClr val="ECEEF2"/>
                 </a:solidFill>
@@ -10130,22 +9042,293 @@
                 <a:uFillTx/>
                 <a:latin typeface="Arial"/>
               </a:rPr>
-              <a:t>parameter.grad.zero_() # 5 repeat -&gt; next epoch</a:t>
-            </a:r>
-            <a:endParaRPr lang="en-US" sz="950" b="0" u="none" strike="noStrike">
-              <a:solidFill>
-                <a:srgbClr val="FFFFFF"/>
-              </a:solidFill>
-              <a:effectLst/>
-              <a:uFillTx/>
-              <a:latin typeface="Arial"/>
-            </a:endParaRPr>
-          </a:p>
-        </p:txBody>
-      </p:sp>
-      <p:sp>
-        <p:nvSpPr>
-          <p:cNvPr id="413" name=""/>
+              <a:t>    epochs = 10</a:t>
+            </a:r>
+            <a:endParaRPr lang="en-US" sz="1000" b="0" u="none" strike="noStrike">
+              <a:solidFill>
+                <a:srgbClr val="FFFFFF"/>
+              </a:solidFill>
+              <a:effectLst/>
+              <a:uFillTx/>
+              <a:latin typeface="Arial"/>
+            </a:endParaRPr>
+          </a:p>
+          <a:p>
+            <a:endParaRPr lang="en-US" sz="1000" b="0" u="none" strike="noStrike">
+              <a:solidFill>
+                <a:srgbClr val="FFFFFF"/>
+              </a:solidFill>
+              <a:effectLst/>
+              <a:uFillTx/>
+              <a:latin typeface="Arial"/>
+            </a:endParaRPr>
+          </a:p>
+          <a:p>
+            <a:r>
+              <a:rPr lang="en-US" sz="1000" b="0" u="none" strike="noStrike">
+                <a:solidFill>
+                  <a:srgbClr val="ECEEF2"/>
+                </a:solidFill>
+                <a:effectLst/>
+                <a:uFillTx/>
+                <a:latin typeface="Arial"/>
+              </a:rPr>
+              <a:t>    for epoch in range(1, epochs + 1):</a:t>
+            </a:r>
+            <a:endParaRPr lang="en-US" sz="1000" b="0" u="none" strike="noStrike">
+              <a:solidFill>
+                <a:srgbClr val="FFFFFF"/>
+              </a:solidFill>
+              <a:effectLst/>
+              <a:uFillTx/>
+              <a:latin typeface="Arial"/>
+            </a:endParaRPr>
+          </a:p>
+          <a:p>
+            <a:r>
+              <a:rPr lang="en-US" sz="1000" b="0" u="none" strike="noStrike">
+                <a:solidFill>
+                  <a:srgbClr val="ECEEF2"/>
+                </a:solidFill>
+                <a:effectLst/>
+                <a:uFillTx/>
+                <a:latin typeface="Arial"/>
+              </a:rPr>
+              <a:t>        prediction = model.forward(x)</a:t>
+            </a:r>
+            <a:endParaRPr lang="en-US" sz="1000" b="0" u="none" strike="noStrike">
+              <a:solidFill>
+                <a:srgbClr val="FFFFFF"/>
+              </a:solidFill>
+              <a:effectLst/>
+              <a:uFillTx/>
+              <a:latin typeface="Arial"/>
+            </a:endParaRPr>
+          </a:p>
+          <a:p>
+            <a:r>
+              <a:rPr lang="en-US" sz="1000" b="0" u="none" strike="noStrike">
+                <a:solidFill>
+                  <a:srgbClr val="ECEEF2"/>
+                </a:solidFill>
+                <a:effectLst/>
+                <a:uFillTx/>
+                <a:latin typeface="Arial"/>
+              </a:rPr>
+              <a:t>        loss = torch.nn.functional.cross_entropy(prediction, target)</a:t>
+            </a:r>
+            <a:endParaRPr lang="en-US" sz="1000" b="0" u="none" strike="noStrike">
+              <a:solidFill>
+                <a:srgbClr val="FFFFFF"/>
+              </a:solidFill>
+              <a:effectLst/>
+              <a:uFillTx/>
+              <a:latin typeface="Arial"/>
+            </a:endParaRPr>
+          </a:p>
+          <a:p>
+            <a:r>
+              <a:rPr lang="en-US" sz="1000" b="0" u="none" strike="noStrike">
+                <a:solidFill>
+                  <a:srgbClr val="ECEEF2"/>
+                </a:solidFill>
+                <a:effectLst/>
+                <a:uFillTx/>
+                <a:latin typeface="Arial"/>
+              </a:rPr>
+              <a:t>        loss.backward()</a:t>
+            </a:r>
+            <a:endParaRPr lang="en-US" sz="1000" b="0" u="none" strike="noStrike">
+              <a:solidFill>
+                <a:srgbClr val="FFFFFF"/>
+              </a:solidFill>
+              <a:effectLst/>
+              <a:uFillTx/>
+              <a:latin typeface="Arial"/>
+            </a:endParaRPr>
+          </a:p>
+          <a:p>
+            <a:endParaRPr lang="en-US" sz="1000" b="0" u="none" strike="noStrike">
+              <a:solidFill>
+                <a:srgbClr val="FFFFFF"/>
+              </a:solidFill>
+              <a:effectLst/>
+              <a:uFillTx/>
+              <a:latin typeface="Arial"/>
+            </a:endParaRPr>
+          </a:p>
+          <a:p>
+            <a:r>
+              <a:rPr lang="en-US" sz="1000" b="0" u="none" strike="noStrike">
+                <a:solidFill>
+                  <a:srgbClr val="ECEEF2"/>
+                </a:solidFill>
+                <a:effectLst/>
+                <a:uFillTx/>
+                <a:latin typeface="Arial"/>
+              </a:rPr>
+              <a:t>        with torch.no_grad():</a:t>
+            </a:r>
+            <a:endParaRPr lang="en-US" sz="1000" b="0" u="none" strike="noStrike">
+              <a:solidFill>
+                <a:srgbClr val="FFFFFF"/>
+              </a:solidFill>
+              <a:effectLst/>
+              <a:uFillTx/>
+              <a:latin typeface="Arial"/>
+            </a:endParaRPr>
+          </a:p>
+          <a:p>
+            <a:r>
+              <a:rPr lang="en-US" sz="1000" b="0" u="none" strike="noStrike">
+                <a:solidFill>
+                  <a:srgbClr val="ECEEF2"/>
+                </a:solidFill>
+                <a:effectLst/>
+                <a:uFillTx/>
+                <a:latin typeface="Arial"/>
+              </a:rPr>
+              <a:t>            for parameter in model.parameters():</a:t>
+            </a:r>
+            <a:endParaRPr lang="en-US" sz="1000" b="0" u="none" strike="noStrike">
+              <a:solidFill>
+                <a:srgbClr val="FFFFFF"/>
+              </a:solidFill>
+              <a:effectLst/>
+              <a:uFillTx/>
+              <a:latin typeface="Arial"/>
+            </a:endParaRPr>
+          </a:p>
+          <a:p>
+            <a:r>
+              <a:rPr lang="en-US" sz="1000" b="0" u="none" strike="noStrike">
+                <a:solidFill>
+                  <a:srgbClr val="ECEEF2"/>
+                </a:solidFill>
+                <a:effectLst/>
+                <a:uFillTx/>
+                <a:latin typeface="Arial"/>
+              </a:rPr>
+              <a:t>                parameter -= learning_rate * parameter.grad</a:t>
+            </a:r>
+            <a:endParaRPr lang="en-US" sz="1000" b="0" u="none" strike="noStrike">
+              <a:solidFill>
+                <a:srgbClr val="FFFFFF"/>
+              </a:solidFill>
+              <a:effectLst/>
+              <a:uFillTx/>
+              <a:latin typeface="Arial"/>
+            </a:endParaRPr>
+          </a:p>
+          <a:p>
+            <a:endParaRPr lang="en-US" sz="1000" b="0" u="none" strike="noStrike">
+              <a:solidFill>
+                <a:srgbClr val="FFFFFF"/>
+              </a:solidFill>
+              <a:effectLst/>
+              <a:uFillTx/>
+              <a:latin typeface="Arial"/>
+            </a:endParaRPr>
+          </a:p>
+          <a:p>
+            <a:r>
+              <a:rPr lang="en-US" sz="1000" b="0" u="none" strike="noStrike">
+                <a:solidFill>
+                  <a:srgbClr val="ECEEF2"/>
+                </a:solidFill>
+                <a:effectLst/>
+                <a:uFillTx/>
+                <a:latin typeface="Arial"/>
+              </a:rPr>
+              <a:t>        for parameter in model.parameters():</a:t>
+            </a:r>
+            <a:endParaRPr lang="en-US" sz="1000" b="0" u="none" strike="noStrike">
+              <a:solidFill>
+                <a:srgbClr val="FFFFFF"/>
+              </a:solidFill>
+              <a:effectLst/>
+              <a:uFillTx/>
+              <a:latin typeface="Arial"/>
+            </a:endParaRPr>
+          </a:p>
+          <a:p>
+            <a:r>
+              <a:rPr lang="en-US" sz="1000" b="0" u="none" strike="noStrike">
+                <a:solidFill>
+                  <a:srgbClr val="ECEEF2"/>
+                </a:solidFill>
+                <a:effectLst/>
+                <a:uFillTx/>
+                <a:latin typeface="Arial"/>
+              </a:rPr>
+              <a:t>            parameter.grad.zero_()</a:t>
+            </a:r>
+            <a:endParaRPr lang="en-US" sz="1000" b="0" u="none" strike="noStrike">
+              <a:solidFill>
+                <a:srgbClr val="FFFFFF"/>
+              </a:solidFill>
+              <a:effectLst/>
+              <a:uFillTx/>
+              <a:latin typeface="Arial"/>
+            </a:endParaRPr>
+          </a:p>
+          <a:p>
+            <a:endParaRPr lang="en-US" sz="1000" b="0" u="none" strike="noStrike">
+              <a:solidFill>
+                <a:srgbClr val="FFFFFF"/>
+              </a:solidFill>
+              <a:effectLst/>
+              <a:uFillTx/>
+              <a:latin typeface="Arial"/>
+            </a:endParaRPr>
+          </a:p>
+          <a:p>
+            <a:r>
+              <a:rPr lang="en-US" sz="1000" b="0" u="none" strike="noStrike">
+                <a:solidFill>
+                  <a:srgbClr val="ECEEF2"/>
+                </a:solidFill>
+                <a:effectLst/>
+                <a:uFillTx/>
+                <a:latin typeface="Arial"/>
+              </a:rPr>
+              <a:t>        if epoch == 1 or epoch % 5 == 0 or epoch == epochs:</a:t>
+            </a:r>
+            <a:endParaRPr lang="en-US" sz="1000" b="0" u="none" strike="noStrike">
+              <a:solidFill>
+                <a:srgbClr val="FFFFFF"/>
+              </a:solidFill>
+              <a:effectLst/>
+              <a:uFillTx/>
+              <a:latin typeface="Arial"/>
+            </a:endParaRPr>
+          </a:p>
+          <a:p>
+            <a:r>
+              <a:rPr lang="en-US" sz="1000" b="0" u="none" strike="noStrike">
+                <a:solidFill>
+                  <a:srgbClr val="ECEEF2"/>
+                </a:solidFill>
+                <a:effectLst/>
+                <a:uFillTx/>
+                <a:latin typeface="Arial"/>
+              </a:rPr>
+              <a:t>            report(epoch, loss, model, x_test, target_test)</a:t>
+            </a:r>
+            <a:endParaRPr lang="en-US" sz="1000" b="0" u="none" strike="noStrike">
+              <a:solidFill>
+                <a:srgbClr val="FFFFFF"/>
+              </a:solidFill>
+              <a:effectLst/>
+              <a:uFillTx/>
+              <a:latin typeface="Arial"/>
+            </a:endParaRPr>
+          </a:p>
+        </p:txBody>
+      </p:sp>
+      <p:sp>
+        <p:nvSpPr>
+          <p:cNvPr id="390" name=""/>
           <p:cNvSpPr txBox="1"/>
           <p:nvPr/>
         </p:nvSpPr>
@@ -10229,7 +9412,7 @@
       </p:grpSpPr>
       <p:sp>
         <p:nvSpPr>
-          <p:cNvPr id="414" name=""/>
+          <p:cNvPr id="391" name=""/>
           <p:cNvSpPr/>
           <p:nvPr/>
         </p:nvSpPr>
@@ -10266,7 +9449,7 @@
       </p:sp>
       <p:sp>
         <p:nvSpPr>
-          <p:cNvPr id="415" name=""/>
+          <p:cNvPr id="392" name=""/>
           <p:cNvSpPr/>
           <p:nvPr/>
         </p:nvSpPr>
@@ -10303,7 +9486,7 @@
       </p:sp>
       <p:sp>
         <p:nvSpPr>
-          <p:cNvPr id="416" name=""/>
+          <p:cNvPr id="393" name=""/>
           <p:cNvSpPr/>
           <p:nvPr/>
         </p:nvSpPr>
@@ -10340,7 +9523,7 @@
       </p:sp>
       <p:sp>
         <p:nvSpPr>
-          <p:cNvPr id="417" name=""/>
+          <p:cNvPr id="394" name=""/>
           <p:cNvSpPr/>
           <p:nvPr/>
         </p:nvSpPr>
@@ -10377,7 +9560,7 @@
       </p:sp>
       <p:sp>
         <p:nvSpPr>
-          <p:cNvPr id="418" name=""/>
+          <p:cNvPr id="395" name=""/>
           <p:cNvSpPr/>
           <p:nvPr/>
         </p:nvSpPr>
@@ -10414,7 +9597,7 @@
       </p:sp>
       <p:sp>
         <p:nvSpPr>
-          <p:cNvPr id="419" name=""/>
+          <p:cNvPr id="396" name=""/>
           <p:cNvSpPr/>
           <p:nvPr/>
         </p:nvSpPr>
@@ -10451,7 +9634,7 @@
       </p:sp>
       <p:sp>
         <p:nvSpPr>
-          <p:cNvPr id="420" name=""/>
+          <p:cNvPr id="397" name=""/>
           <p:cNvSpPr/>
           <p:nvPr/>
         </p:nvSpPr>
@@ -10488,7 +9671,7 @@
       </p:sp>
       <p:sp>
         <p:nvSpPr>
-          <p:cNvPr id="421" name=""/>
+          <p:cNvPr id="398" name=""/>
           <p:cNvSpPr txBox="1"/>
           <p:nvPr/>
         </p:nvSpPr>
@@ -10534,7 +9717,7 @@
       </p:sp>
       <p:sp>
         <p:nvSpPr>
-          <p:cNvPr id="422" name=""/>
+          <p:cNvPr id="399" name=""/>
           <p:cNvSpPr txBox="1"/>
           <p:nvPr/>
         </p:nvSpPr>
@@ -10580,7 +9763,7 @@
       </p:sp>
       <p:sp>
         <p:nvSpPr>
-          <p:cNvPr id="423" name=""/>
+          <p:cNvPr id="400" name=""/>
           <p:cNvSpPr/>
           <p:nvPr/>
         </p:nvSpPr>
@@ -10620,7 +9803,7 @@
       </p:sp>
       <p:sp>
         <p:nvSpPr>
-          <p:cNvPr id="424" name=""/>
+          <p:cNvPr id="401" name=""/>
           <p:cNvSpPr txBox="1"/>
           <p:nvPr/>
         </p:nvSpPr>
@@ -10667,7 +9850,7 @@
       </p:sp>
       <p:sp>
         <p:nvSpPr>
-          <p:cNvPr id="425" name=""/>
+          <p:cNvPr id="402" name=""/>
           <p:cNvSpPr txBox="1"/>
           <p:nvPr/>
         </p:nvSpPr>
@@ -10714,7 +9897,7 @@
       </p:sp>
       <p:sp>
         <p:nvSpPr>
-          <p:cNvPr id="426" name=""/>
+          <p:cNvPr id="403" name=""/>
           <p:cNvSpPr/>
           <p:nvPr/>
         </p:nvSpPr>
@@ -10754,7 +9937,7 @@
       </p:sp>
       <p:sp>
         <p:nvSpPr>
-          <p:cNvPr id="427" name=""/>
+          <p:cNvPr id="404" name=""/>
           <p:cNvSpPr txBox="1"/>
           <p:nvPr/>
         </p:nvSpPr>
@@ -10801,7 +9984,7 @@
       </p:sp>
       <p:sp>
         <p:nvSpPr>
-          <p:cNvPr id="428" name=""/>
+          <p:cNvPr id="405" name=""/>
           <p:cNvSpPr txBox="1"/>
           <p:nvPr/>
         </p:nvSpPr>
@@ -10848,7 +10031,7 @@
       </p:sp>
       <p:sp>
         <p:nvSpPr>
-          <p:cNvPr id="429" name=""/>
+          <p:cNvPr id="406" name=""/>
           <p:cNvSpPr/>
           <p:nvPr/>
         </p:nvSpPr>
@@ -10888,7 +10071,7 @@
       </p:sp>
       <p:sp>
         <p:nvSpPr>
-          <p:cNvPr id="430" name=""/>
+          <p:cNvPr id="407" name=""/>
           <p:cNvSpPr txBox="1"/>
           <p:nvPr/>
         </p:nvSpPr>
@@ -10935,7 +10118,7 @@
       </p:sp>
       <p:sp>
         <p:nvSpPr>
-          <p:cNvPr id="431" name=""/>
+          <p:cNvPr id="408" name=""/>
           <p:cNvSpPr txBox="1"/>
           <p:nvPr/>
         </p:nvSpPr>
@@ -10982,7 +10165,7 @@
       </p:sp>
       <p:sp>
         <p:nvSpPr>
-          <p:cNvPr id="432" name=""/>
+          <p:cNvPr id="409" name=""/>
           <p:cNvSpPr/>
           <p:nvPr/>
         </p:nvSpPr>
@@ -11022,7 +10205,7 @@
       </p:sp>
       <p:sp>
         <p:nvSpPr>
-          <p:cNvPr id="433" name=""/>
+          <p:cNvPr id="410" name=""/>
           <p:cNvSpPr/>
           <p:nvPr/>
         </p:nvSpPr>
@@ -11059,7 +10242,7 @@
       </p:sp>
       <p:sp>
         <p:nvSpPr>
-          <p:cNvPr id="434" name=""/>
+          <p:cNvPr id="411" name=""/>
           <p:cNvSpPr txBox="1"/>
           <p:nvPr/>
         </p:nvSpPr>
@@ -11106,7 +10289,7 @@
       </p:sp>
       <p:sp>
         <p:nvSpPr>
-          <p:cNvPr id="435" name=""/>
+          <p:cNvPr id="412" name=""/>
           <p:cNvSpPr txBox="1"/>
           <p:nvPr/>
         </p:nvSpPr>
@@ -11152,7 +10335,7 @@
       </p:sp>
       <p:sp>
         <p:nvSpPr>
-          <p:cNvPr id="436" name=""/>
+          <p:cNvPr id="413" name=""/>
           <p:cNvSpPr txBox="1"/>
           <p:nvPr/>
         </p:nvSpPr>
@@ -11198,7 +10381,7 @@
       </p:sp>
       <p:sp>
         <p:nvSpPr>
-          <p:cNvPr id="437" name=""/>
+          <p:cNvPr id="414" name=""/>
           <p:cNvSpPr txBox="1"/>
           <p:nvPr/>
         </p:nvSpPr>
@@ -11244,7 +10427,7 @@
       </p:sp>
       <p:sp>
         <p:nvSpPr>
-          <p:cNvPr id="438" name=""/>
+          <p:cNvPr id="415" name=""/>
           <p:cNvSpPr txBox="1"/>
           <p:nvPr/>
         </p:nvSpPr>
@@ -11328,7 +10511,7 @@
       </p:grpSpPr>
       <p:sp>
         <p:nvSpPr>
-          <p:cNvPr id="439" name=""/>
+          <p:cNvPr id="416" name=""/>
           <p:cNvSpPr/>
           <p:nvPr/>
         </p:nvSpPr>
@@ -11365,7 +10548,7 @@
       </p:sp>
       <p:sp>
         <p:nvSpPr>
-          <p:cNvPr id="440" name=""/>
+          <p:cNvPr id="417" name=""/>
           <p:cNvSpPr/>
           <p:nvPr/>
         </p:nvSpPr>
@@ -11402,7 +10585,7 @@
       </p:sp>
       <p:sp>
         <p:nvSpPr>
-          <p:cNvPr id="441" name=""/>
+          <p:cNvPr id="418" name=""/>
           <p:cNvSpPr/>
           <p:nvPr/>
         </p:nvSpPr>
@@ -11439,7 +10622,7 @@
       </p:sp>
       <p:sp>
         <p:nvSpPr>
-          <p:cNvPr id="442" name=""/>
+          <p:cNvPr id="419" name=""/>
           <p:cNvSpPr/>
           <p:nvPr/>
         </p:nvSpPr>
@@ -11476,7 +10659,7 @@
       </p:sp>
       <p:sp>
         <p:nvSpPr>
-          <p:cNvPr id="443" name=""/>
+          <p:cNvPr id="420" name=""/>
           <p:cNvSpPr/>
           <p:nvPr/>
         </p:nvSpPr>
@@ -11513,7 +10696,7 @@
       </p:sp>
       <p:sp>
         <p:nvSpPr>
-          <p:cNvPr id="444" name=""/>
+          <p:cNvPr id="421" name=""/>
           <p:cNvSpPr/>
           <p:nvPr/>
         </p:nvSpPr>
@@ -11550,7 +10733,7 @@
       </p:sp>
       <p:sp>
         <p:nvSpPr>
-          <p:cNvPr id="445" name=""/>
+          <p:cNvPr id="422" name=""/>
           <p:cNvSpPr/>
           <p:nvPr/>
         </p:nvSpPr>
@@ -11587,7 +10770,7 @@
       </p:sp>
       <p:sp>
         <p:nvSpPr>
-          <p:cNvPr id="446" name=""/>
+          <p:cNvPr id="423" name=""/>
           <p:cNvSpPr txBox="1"/>
           <p:nvPr/>
         </p:nvSpPr>
@@ -11633,7 +10816,7 @@
       </p:sp>
       <p:sp>
         <p:nvSpPr>
-          <p:cNvPr id="447" name=""/>
+          <p:cNvPr id="424" name=""/>
           <p:cNvSpPr txBox="1"/>
           <p:nvPr/>
         </p:nvSpPr>
@@ -11679,7 +10862,7 @@
       </p:sp>
       <p:sp>
         <p:nvSpPr>
-          <p:cNvPr id="448" name=""/>
+          <p:cNvPr id="425" name=""/>
           <p:cNvSpPr/>
           <p:nvPr/>
         </p:nvSpPr>
@@ -11719,7 +10902,7 @@
       </p:sp>
       <p:sp>
         <p:nvSpPr>
-          <p:cNvPr id="449" name=""/>
+          <p:cNvPr id="426" name=""/>
           <p:cNvSpPr/>
           <p:nvPr/>
         </p:nvSpPr>
@@ -11759,7 +10942,7 @@
       </p:sp>
       <p:sp>
         <p:nvSpPr>
-          <p:cNvPr id="450" name=""/>
+          <p:cNvPr id="427" name=""/>
           <p:cNvSpPr/>
           <p:nvPr/>
         </p:nvSpPr>
@@ -11796,7 +10979,7 @@
       </p:sp>
       <p:sp>
         <p:nvSpPr>
-          <p:cNvPr id="451" name=""/>
+          <p:cNvPr id="428" name=""/>
           <p:cNvSpPr/>
           <p:nvPr/>
         </p:nvSpPr>
@@ -11833,7 +11016,7 @@
       </p:sp>
       <p:sp>
         <p:nvSpPr>
-          <p:cNvPr id="452" name=""/>
+          <p:cNvPr id="429" name=""/>
           <p:cNvSpPr/>
           <p:nvPr/>
         </p:nvSpPr>
@@ -11870,7 +11053,7 @@
       </p:sp>
       <p:sp>
         <p:nvSpPr>
-          <p:cNvPr id="453" name=""/>
+          <p:cNvPr id="430" name=""/>
           <p:cNvSpPr/>
           <p:nvPr/>
         </p:nvSpPr>
@@ -11907,7 +11090,7 @@
       </p:sp>
       <p:sp>
         <p:nvSpPr>
-          <p:cNvPr id="454" name=""/>
+          <p:cNvPr id="431" name=""/>
           <p:cNvSpPr/>
           <p:nvPr/>
         </p:nvSpPr>
@@ -11944,7 +11127,7 @@
       </p:sp>
       <p:sp>
         <p:nvSpPr>
-          <p:cNvPr id="455" name=""/>
+          <p:cNvPr id="432" name=""/>
           <p:cNvSpPr/>
           <p:nvPr/>
         </p:nvSpPr>
@@ -11981,7 +11164,7 @@
       </p:sp>
       <p:sp>
         <p:nvSpPr>
-          <p:cNvPr id="456" name=""/>
+          <p:cNvPr id="433" name=""/>
           <p:cNvSpPr/>
           <p:nvPr/>
         </p:nvSpPr>
@@ -12018,7 +11201,7 @@
       </p:sp>
       <p:sp>
         <p:nvSpPr>
-          <p:cNvPr id="457" name=""/>
+          <p:cNvPr id="434" name=""/>
           <p:cNvSpPr/>
           <p:nvPr/>
         </p:nvSpPr>
@@ -12055,7 +11238,7 @@
       </p:sp>
       <p:sp>
         <p:nvSpPr>
-          <p:cNvPr id="458" name=""/>
+          <p:cNvPr id="435" name=""/>
           <p:cNvSpPr/>
           <p:nvPr/>
         </p:nvSpPr>
@@ -12092,7 +11275,7 @@
       </p:sp>
       <p:sp>
         <p:nvSpPr>
-          <p:cNvPr id="459" name=""/>
+          <p:cNvPr id="436" name=""/>
           <p:cNvSpPr/>
           <p:nvPr/>
         </p:nvSpPr>
@@ -12129,7 +11312,7 @@
       </p:sp>
       <p:sp>
         <p:nvSpPr>
-          <p:cNvPr id="460" name=""/>
+          <p:cNvPr id="437" name=""/>
           <p:cNvSpPr/>
           <p:nvPr/>
         </p:nvSpPr>
@@ -12166,7 +11349,7 @@
       </p:sp>
       <p:sp>
         <p:nvSpPr>
-          <p:cNvPr id="461" name=""/>
+          <p:cNvPr id="438" name=""/>
           <p:cNvSpPr/>
           <p:nvPr/>
         </p:nvSpPr>
@@ -12203,7 +11386,7 @@
       </p:sp>
       <p:sp>
         <p:nvSpPr>
-          <p:cNvPr id="462" name=""/>
+          <p:cNvPr id="439" name=""/>
           <p:cNvSpPr/>
           <p:nvPr/>
         </p:nvSpPr>
@@ -12240,7 +11423,7 @@
       </p:sp>
       <p:sp>
         <p:nvSpPr>
-          <p:cNvPr id="463" name=""/>
+          <p:cNvPr id="440" name=""/>
           <p:cNvSpPr/>
           <p:nvPr/>
         </p:nvSpPr>
@@ -12277,7 +11460,7 @@
       </p:sp>
       <p:sp>
         <p:nvSpPr>
-          <p:cNvPr id="464" name=""/>
+          <p:cNvPr id="441" name=""/>
           <p:cNvSpPr/>
           <p:nvPr/>
         </p:nvSpPr>
@@ -12314,7 +11497,7 @@
       </p:sp>
       <p:sp>
         <p:nvSpPr>
-          <p:cNvPr id="465" name=""/>
+          <p:cNvPr id="442" name=""/>
           <p:cNvSpPr/>
           <p:nvPr/>
         </p:nvSpPr>
@@ -12351,7 +11534,7 @@
       </p:sp>
       <p:sp>
         <p:nvSpPr>
-          <p:cNvPr id="466" name=""/>
+          <p:cNvPr id="443" name=""/>
           <p:cNvSpPr/>
           <p:nvPr/>
         </p:nvSpPr>
@@ -12388,7 +11571,7 @@
       </p:sp>
       <p:sp>
         <p:nvSpPr>
-          <p:cNvPr id="467" name=""/>
+          <p:cNvPr id="444" name=""/>
           <p:cNvSpPr/>
           <p:nvPr/>
         </p:nvSpPr>
@@ -12425,7 +11608,7 @@
       </p:sp>
       <p:sp>
         <p:nvSpPr>
-          <p:cNvPr id="468" name=""/>
+          <p:cNvPr id="445" name=""/>
           <p:cNvSpPr/>
           <p:nvPr/>
         </p:nvSpPr>
@@ -12462,7 +11645,7 @@
       </p:sp>
       <p:sp>
         <p:nvSpPr>
-          <p:cNvPr id="469" name=""/>
+          <p:cNvPr id="446" name=""/>
           <p:cNvSpPr/>
           <p:nvPr/>
         </p:nvSpPr>
@@ -12499,7 +11682,7 @@
       </p:sp>
       <p:sp>
         <p:nvSpPr>
-          <p:cNvPr id="470" name=""/>
+          <p:cNvPr id="447" name=""/>
           <p:cNvSpPr/>
           <p:nvPr/>
         </p:nvSpPr>
@@ -12536,7 +11719,7 @@
       </p:sp>
       <p:sp>
         <p:nvSpPr>
-          <p:cNvPr id="471" name=""/>
+          <p:cNvPr id="448" name=""/>
           <p:cNvSpPr/>
           <p:nvPr/>
         </p:nvSpPr>
@@ -12573,7 +11756,7 @@
       </p:sp>
       <p:sp>
         <p:nvSpPr>
-          <p:cNvPr id="472" name=""/>
+          <p:cNvPr id="449" name=""/>
           <p:cNvSpPr/>
           <p:nvPr/>
         </p:nvSpPr>
@@ -12610,7 +11793,7 @@
       </p:sp>
       <p:sp>
         <p:nvSpPr>
-          <p:cNvPr id="473" name=""/>
+          <p:cNvPr id="450" name=""/>
           <p:cNvSpPr/>
           <p:nvPr/>
         </p:nvSpPr>
@@ -12647,7 +11830,7 @@
       </p:sp>
       <p:sp>
         <p:nvSpPr>
-          <p:cNvPr id="474" name=""/>
+          <p:cNvPr id="451" name=""/>
           <p:cNvSpPr/>
           <p:nvPr/>
         </p:nvSpPr>
@@ -12684,7 +11867,7 @@
       </p:sp>
       <p:sp>
         <p:nvSpPr>
-          <p:cNvPr id="475" name=""/>
+          <p:cNvPr id="452" name=""/>
           <p:cNvSpPr/>
           <p:nvPr/>
         </p:nvSpPr>
@@ -12721,7 +11904,7 @@
       </p:sp>
       <p:sp>
         <p:nvSpPr>
-          <p:cNvPr id="476" name=""/>
+          <p:cNvPr id="453" name=""/>
           <p:cNvSpPr/>
           <p:nvPr/>
         </p:nvSpPr>
@@ -12758,7 +11941,7 @@
       </p:sp>
       <p:sp>
         <p:nvSpPr>
-          <p:cNvPr id="477" name=""/>
+          <p:cNvPr id="454" name=""/>
           <p:cNvSpPr/>
           <p:nvPr/>
         </p:nvSpPr>
@@ -12795,7 +11978,7 @@
       </p:sp>
       <p:sp>
         <p:nvSpPr>
-          <p:cNvPr id="478" name=""/>
+          <p:cNvPr id="455" name=""/>
           <p:cNvSpPr/>
           <p:nvPr/>
         </p:nvSpPr>
@@ -12832,7 +12015,7 @@
       </p:sp>
       <p:sp>
         <p:nvSpPr>
-          <p:cNvPr id="479" name=""/>
+          <p:cNvPr id="456" name=""/>
           <p:cNvSpPr/>
           <p:nvPr/>
         </p:nvSpPr>
@@ -12869,7 +12052,7 @@
       </p:sp>
       <p:sp>
         <p:nvSpPr>
-          <p:cNvPr id="480" name=""/>
+          <p:cNvPr id="457" name=""/>
           <p:cNvSpPr/>
           <p:nvPr/>
         </p:nvSpPr>
@@ -12906,7 +12089,7 @@
       </p:sp>
       <p:sp>
         <p:nvSpPr>
-          <p:cNvPr id="481" name=""/>
+          <p:cNvPr id="458" name=""/>
           <p:cNvSpPr/>
           <p:nvPr/>
         </p:nvSpPr>
@@ -12943,7 +12126,7 @@
       </p:sp>
       <p:sp>
         <p:nvSpPr>
-          <p:cNvPr id="482" name=""/>
+          <p:cNvPr id="459" name=""/>
           <p:cNvSpPr/>
           <p:nvPr/>
         </p:nvSpPr>
@@ -12980,7 +12163,7 @@
       </p:sp>
       <p:sp>
         <p:nvSpPr>
-          <p:cNvPr id="483" name=""/>
+          <p:cNvPr id="460" name=""/>
           <p:cNvSpPr/>
           <p:nvPr/>
         </p:nvSpPr>
@@ -13017,7 +12200,7 @@
       </p:sp>
       <p:sp>
         <p:nvSpPr>
-          <p:cNvPr id="484" name=""/>
+          <p:cNvPr id="461" name=""/>
           <p:cNvSpPr/>
           <p:nvPr/>
         </p:nvSpPr>
@@ -13054,7 +12237,7 @@
       </p:sp>
       <p:sp>
         <p:nvSpPr>
-          <p:cNvPr id="485" name=""/>
+          <p:cNvPr id="462" name=""/>
           <p:cNvSpPr/>
           <p:nvPr/>
         </p:nvSpPr>
@@ -13091,7 +12274,7 @@
       </p:sp>
       <p:sp>
         <p:nvSpPr>
-          <p:cNvPr id="486" name=""/>
+          <p:cNvPr id="463" name=""/>
           <p:cNvSpPr/>
           <p:nvPr/>
         </p:nvSpPr>
@@ -13128,7 +12311,7 @@
       </p:sp>
       <p:sp>
         <p:nvSpPr>
-          <p:cNvPr id="487" name=""/>
+          <p:cNvPr id="464" name=""/>
           <p:cNvSpPr/>
           <p:nvPr/>
         </p:nvSpPr>
@@ -13165,7 +12348,7 @@
       </p:sp>
       <p:sp>
         <p:nvSpPr>
-          <p:cNvPr id="488" name=""/>
+          <p:cNvPr id="465" name=""/>
           <p:cNvSpPr/>
           <p:nvPr/>
         </p:nvSpPr>
@@ -13202,7 +12385,7 @@
       </p:sp>
       <p:sp>
         <p:nvSpPr>
-          <p:cNvPr id="489" name=""/>
+          <p:cNvPr id="466" name=""/>
           <p:cNvSpPr/>
           <p:nvPr/>
         </p:nvSpPr>
@@ -13239,7 +12422,7 @@
       </p:sp>
       <p:sp>
         <p:nvSpPr>
-          <p:cNvPr id="490" name=""/>
+          <p:cNvPr id="467" name=""/>
           <p:cNvSpPr/>
           <p:nvPr/>
         </p:nvSpPr>
@@ -13276,7 +12459,7 @@
       </p:sp>
       <p:sp>
         <p:nvSpPr>
-          <p:cNvPr id="491" name=""/>
+          <p:cNvPr id="468" name=""/>
           <p:cNvSpPr/>
           <p:nvPr/>
         </p:nvSpPr>
@@ -13313,7 +12496,7 @@
       </p:sp>
       <p:sp>
         <p:nvSpPr>
-          <p:cNvPr id="492" name=""/>
+          <p:cNvPr id="469" name=""/>
           <p:cNvSpPr/>
           <p:nvPr/>
         </p:nvSpPr>
@@ -13350,7 +12533,7 @@
       </p:sp>
       <p:sp>
         <p:nvSpPr>
-          <p:cNvPr id="493" name=""/>
+          <p:cNvPr id="470" name=""/>
           <p:cNvSpPr/>
           <p:nvPr/>
         </p:nvSpPr>
@@ -13387,7 +12570,7 @@
       </p:sp>
       <p:sp>
         <p:nvSpPr>
-          <p:cNvPr id="494" name=""/>
+          <p:cNvPr id="471" name=""/>
           <p:cNvSpPr/>
           <p:nvPr/>
         </p:nvSpPr>
@@ -13424,7 +12607,7 @@
       </p:sp>
       <p:sp>
         <p:nvSpPr>
-          <p:cNvPr id="495" name=""/>
+          <p:cNvPr id="472" name=""/>
           <p:cNvSpPr/>
           <p:nvPr/>
         </p:nvSpPr>
@@ -13461,7 +12644,7 @@
       </p:sp>
       <p:sp>
         <p:nvSpPr>
-          <p:cNvPr id="496" name=""/>
+          <p:cNvPr id="473" name=""/>
           <p:cNvSpPr/>
           <p:nvPr/>
         </p:nvSpPr>
@@ -13498,7 +12681,7 @@
       </p:sp>
       <p:sp>
         <p:nvSpPr>
-          <p:cNvPr id="497" name=""/>
+          <p:cNvPr id="474" name=""/>
           <p:cNvSpPr/>
           <p:nvPr/>
         </p:nvSpPr>
@@ -13535,7 +12718,7 @@
       </p:sp>
       <p:sp>
         <p:nvSpPr>
-          <p:cNvPr id="498" name=""/>
+          <p:cNvPr id="475" name=""/>
           <p:cNvSpPr/>
           <p:nvPr/>
         </p:nvSpPr>
@@ -13572,7 +12755,7 @@
       </p:sp>
       <p:sp>
         <p:nvSpPr>
-          <p:cNvPr id="499" name=""/>
+          <p:cNvPr id="476" name=""/>
           <p:cNvSpPr/>
           <p:nvPr/>
         </p:nvSpPr>
@@ -13609,7 +12792,7 @@
       </p:sp>
       <p:sp>
         <p:nvSpPr>
-          <p:cNvPr id="500" name=""/>
+          <p:cNvPr id="477" name=""/>
           <p:cNvSpPr/>
           <p:nvPr/>
         </p:nvSpPr>
@@ -13646,7 +12829,7 @@
       </p:sp>
       <p:sp>
         <p:nvSpPr>
-          <p:cNvPr id="501" name=""/>
+          <p:cNvPr id="478" name=""/>
           <p:cNvSpPr/>
           <p:nvPr/>
         </p:nvSpPr>
@@ -13683,7 +12866,7 @@
       </p:sp>
       <p:sp>
         <p:nvSpPr>
-          <p:cNvPr id="502" name=""/>
+          <p:cNvPr id="479" name=""/>
           <p:cNvSpPr/>
           <p:nvPr/>
         </p:nvSpPr>
@@ -13720,7 +12903,7 @@
       </p:sp>
       <p:sp>
         <p:nvSpPr>
-          <p:cNvPr id="503" name=""/>
+          <p:cNvPr id="480" name=""/>
           <p:cNvSpPr/>
           <p:nvPr/>
         </p:nvSpPr>
@@ -13757,7 +12940,7 @@
       </p:sp>
       <p:sp>
         <p:nvSpPr>
-          <p:cNvPr id="504" name=""/>
+          <p:cNvPr id="481" name=""/>
           <p:cNvSpPr/>
           <p:nvPr/>
         </p:nvSpPr>
@@ -13794,7 +12977,7 @@
       </p:sp>
       <p:sp>
         <p:nvSpPr>
-          <p:cNvPr id="505" name=""/>
+          <p:cNvPr id="482" name=""/>
           <p:cNvSpPr/>
           <p:nvPr/>
         </p:nvSpPr>
@@ -13831,7 +13014,7 @@
       </p:sp>
       <p:sp>
         <p:nvSpPr>
-          <p:cNvPr id="506" name=""/>
+          <p:cNvPr id="483" name=""/>
           <p:cNvSpPr/>
           <p:nvPr/>
         </p:nvSpPr>
@@ -13868,7 +13051,7 @@
       </p:sp>
       <p:sp>
         <p:nvSpPr>
-          <p:cNvPr id="507" name=""/>
+          <p:cNvPr id="484" name=""/>
           <p:cNvSpPr/>
           <p:nvPr/>
         </p:nvSpPr>
@@ -13905,7 +13088,7 @@
       </p:sp>
       <p:sp>
         <p:nvSpPr>
-          <p:cNvPr id="508" name=""/>
+          <p:cNvPr id="485" name=""/>
           <p:cNvSpPr/>
           <p:nvPr/>
         </p:nvSpPr>
@@ -13942,7 +13125,7 @@
       </p:sp>
       <p:sp>
         <p:nvSpPr>
-          <p:cNvPr id="509" name=""/>
+          <p:cNvPr id="486" name=""/>
           <p:cNvSpPr/>
           <p:nvPr/>
         </p:nvSpPr>
@@ -13979,7 +13162,7 @@
       </p:sp>
       <p:sp>
         <p:nvSpPr>
-          <p:cNvPr id="510" name=""/>
+          <p:cNvPr id="487" name=""/>
           <p:cNvSpPr/>
           <p:nvPr/>
         </p:nvSpPr>
@@ -14016,7 +13199,7 @@
       </p:sp>
       <p:sp>
         <p:nvSpPr>
-          <p:cNvPr id="511" name=""/>
+          <p:cNvPr id="488" name=""/>
           <p:cNvSpPr/>
           <p:nvPr/>
         </p:nvSpPr>
@@ -14053,7 +13236,7 @@
       </p:sp>
       <p:sp>
         <p:nvSpPr>
-          <p:cNvPr id="512" name=""/>
+          <p:cNvPr id="489" name=""/>
           <p:cNvSpPr/>
           <p:nvPr/>
         </p:nvSpPr>
@@ -14090,7 +13273,7 @@
       </p:sp>
       <p:sp>
         <p:nvSpPr>
-          <p:cNvPr id="513" name=""/>
+          <p:cNvPr id="490" name=""/>
           <p:cNvSpPr/>
           <p:nvPr/>
         </p:nvSpPr>
@@ -14127,7 +13310,7 @@
       </p:sp>
       <p:sp>
         <p:nvSpPr>
-          <p:cNvPr id="514" name=""/>
+          <p:cNvPr id="491" name=""/>
           <p:cNvSpPr/>
           <p:nvPr/>
         </p:nvSpPr>
@@ -14164,7 +13347,7 @@
       </p:sp>
       <p:sp>
         <p:nvSpPr>
-          <p:cNvPr id="515" name=""/>
+          <p:cNvPr id="492" name=""/>
           <p:cNvSpPr/>
           <p:nvPr/>
         </p:nvSpPr>
@@ -14201,7 +13384,7 @@
       </p:sp>
       <p:sp>
         <p:nvSpPr>
-          <p:cNvPr id="516" name=""/>
+          <p:cNvPr id="493" name=""/>
           <p:cNvSpPr/>
           <p:nvPr/>
         </p:nvSpPr>
@@ -14238,7 +13421,7 @@
       </p:sp>
       <p:sp>
         <p:nvSpPr>
-          <p:cNvPr id="517" name=""/>
+          <p:cNvPr id="494" name=""/>
           <p:cNvSpPr/>
           <p:nvPr/>
         </p:nvSpPr>
@@ -14275,7 +13458,7 @@
       </p:sp>
       <p:sp>
         <p:nvSpPr>
-          <p:cNvPr id="518" name=""/>
+          <p:cNvPr id="495" name=""/>
           <p:cNvSpPr/>
           <p:nvPr/>
         </p:nvSpPr>
@@ -14312,7 +13495,7 @@
       </p:sp>
       <p:sp>
         <p:nvSpPr>
-          <p:cNvPr id="519" name=""/>
+          <p:cNvPr id="496" name=""/>
           <p:cNvSpPr/>
           <p:nvPr/>
         </p:nvSpPr>
@@ -14349,7 +13532,7 @@
       </p:sp>
       <p:sp>
         <p:nvSpPr>
-          <p:cNvPr id="520" name=""/>
+          <p:cNvPr id="497" name=""/>
           <p:cNvSpPr/>
           <p:nvPr/>
         </p:nvSpPr>
@@ -14386,7 +13569,7 @@
       </p:sp>
       <p:sp>
         <p:nvSpPr>
-          <p:cNvPr id="521" name=""/>
+          <p:cNvPr id="498" name=""/>
           <p:cNvSpPr/>
           <p:nvPr/>
         </p:nvSpPr>
@@ -14423,7 +13606,7 @@
       </p:sp>
       <p:sp>
         <p:nvSpPr>
-          <p:cNvPr id="522" name=""/>
+          <p:cNvPr id="499" name=""/>
           <p:cNvSpPr/>
           <p:nvPr/>
         </p:nvSpPr>
@@ -14460,7 +13643,7 @@
       </p:sp>
       <p:sp>
         <p:nvSpPr>
-          <p:cNvPr id="523" name=""/>
+          <p:cNvPr id="500" name=""/>
           <p:cNvSpPr/>
           <p:nvPr/>
         </p:nvSpPr>
@@ -14497,7 +13680,7 @@
       </p:sp>
       <p:sp>
         <p:nvSpPr>
-          <p:cNvPr id="524" name=""/>
+          <p:cNvPr id="501" name=""/>
           <p:cNvSpPr/>
           <p:nvPr/>
         </p:nvSpPr>
@@ -14534,7 +13717,7 @@
       </p:sp>
       <p:sp>
         <p:nvSpPr>
-          <p:cNvPr id="525" name=""/>
+          <p:cNvPr id="502" name=""/>
           <p:cNvSpPr/>
           <p:nvPr/>
         </p:nvSpPr>
@@ -14571,7 +13754,7 @@
       </p:sp>
       <p:sp>
         <p:nvSpPr>
-          <p:cNvPr id="526" name=""/>
+          <p:cNvPr id="503" name=""/>
           <p:cNvSpPr/>
           <p:nvPr/>
         </p:nvSpPr>
@@ -14608,7 +13791,7 @@
       </p:sp>
       <p:sp>
         <p:nvSpPr>
-          <p:cNvPr id="527" name=""/>
+          <p:cNvPr id="504" name=""/>
           <p:cNvSpPr/>
           <p:nvPr/>
         </p:nvSpPr>
@@ -14645,7 +13828,7 @@
       </p:sp>
       <p:sp>
         <p:nvSpPr>
-          <p:cNvPr id="528" name=""/>
+          <p:cNvPr id="505" name=""/>
           <p:cNvSpPr/>
           <p:nvPr/>
         </p:nvSpPr>
@@ -14682,7 +13865,7 @@
       </p:sp>
       <p:sp>
         <p:nvSpPr>
-          <p:cNvPr id="529" name=""/>
+          <p:cNvPr id="506" name=""/>
           <p:cNvSpPr/>
           <p:nvPr/>
         </p:nvSpPr>
@@ -14719,7 +13902,7 @@
       </p:sp>
       <p:sp>
         <p:nvSpPr>
-          <p:cNvPr id="530" name=""/>
+          <p:cNvPr id="507" name=""/>
           <p:cNvSpPr/>
           <p:nvPr/>
         </p:nvSpPr>
@@ -14756,7 +13939,7 @@
       </p:sp>
       <p:sp>
         <p:nvSpPr>
-          <p:cNvPr id="531" name=""/>
+          <p:cNvPr id="508" name=""/>
           <p:cNvSpPr/>
           <p:nvPr/>
         </p:nvSpPr>
@@ -14793,7 +13976,7 @@
       </p:sp>
       <p:sp>
         <p:nvSpPr>
-          <p:cNvPr id="532" name=""/>
+          <p:cNvPr id="509" name=""/>
           <p:cNvSpPr/>
           <p:nvPr/>
         </p:nvSpPr>
@@ -14830,7 +14013,7 @@
       </p:sp>
       <p:sp>
         <p:nvSpPr>
-          <p:cNvPr id="533" name=""/>
+          <p:cNvPr id="510" name=""/>
           <p:cNvSpPr/>
           <p:nvPr/>
         </p:nvSpPr>
@@ -14867,7 +14050,7 @@
       </p:sp>
       <p:sp>
         <p:nvSpPr>
-          <p:cNvPr id="534" name=""/>
+          <p:cNvPr id="511" name=""/>
           <p:cNvSpPr/>
           <p:nvPr/>
         </p:nvSpPr>
@@ -14904,7 +14087,7 @@
       </p:sp>
       <p:sp>
         <p:nvSpPr>
-          <p:cNvPr id="535" name=""/>
+          <p:cNvPr id="512" name=""/>
           <p:cNvSpPr/>
           <p:nvPr/>
         </p:nvSpPr>
@@ -14941,7 +14124,7 @@
       </p:sp>
       <p:sp>
         <p:nvSpPr>
-          <p:cNvPr id="536" name=""/>
+          <p:cNvPr id="513" name=""/>
           <p:cNvSpPr/>
           <p:nvPr/>
         </p:nvSpPr>
@@ -14978,7 +14161,7 @@
       </p:sp>
       <p:sp>
         <p:nvSpPr>
-          <p:cNvPr id="537" name=""/>
+          <p:cNvPr id="514" name=""/>
           <p:cNvSpPr/>
           <p:nvPr/>
         </p:nvSpPr>
@@ -15015,7 +14198,7 @@
       </p:sp>
       <p:sp>
         <p:nvSpPr>
-          <p:cNvPr id="538" name=""/>
+          <p:cNvPr id="515" name=""/>
           <p:cNvSpPr/>
           <p:nvPr/>
         </p:nvSpPr>
@@ -15052,7 +14235,7 @@
       </p:sp>
       <p:sp>
         <p:nvSpPr>
-          <p:cNvPr id="539" name=""/>
+          <p:cNvPr id="516" name=""/>
           <p:cNvSpPr/>
           <p:nvPr/>
         </p:nvSpPr>
@@ -15089,7 +14272,7 @@
       </p:sp>
       <p:sp>
         <p:nvSpPr>
-          <p:cNvPr id="540" name=""/>
+          <p:cNvPr id="517" name=""/>
           <p:cNvSpPr/>
           <p:nvPr/>
         </p:nvSpPr>
@@ -15126,7 +14309,7 @@
       </p:sp>
       <p:sp>
         <p:nvSpPr>
-          <p:cNvPr id="541" name=""/>
+          <p:cNvPr id="518" name=""/>
           <p:cNvSpPr/>
           <p:nvPr/>
         </p:nvSpPr>
@@ -15163,7 +14346,7 @@
       </p:sp>
       <p:sp>
         <p:nvSpPr>
-          <p:cNvPr id="542" name=""/>
+          <p:cNvPr id="519" name=""/>
           <p:cNvSpPr/>
           <p:nvPr/>
         </p:nvSpPr>
@@ -15200,7 +14383,7 @@
       </p:sp>
       <p:sp>
         <p:nvSpPr>
-          <p:cNvPr id="543" name=""/>
+          <p:cNvPr id="520" name=""/>
           <p:cNvSpPr/>
           <p:nvPr/>
         </p:nvSpPr>
@@ -15237,7 +14420,7 @@
       </p:sp>
       <p:sp>
         <p:nvSpPr>
-          <p:cNvPr id="544" name=""/>
+          <p:cNvPr id="521" name=""/>
           <p:cNvSpPr/>
           <p:nvPr/>
         </p:nvSpPr>
@@ -15274,7 +14457,7 @@
       </p:sp>
       <p:sp>
         <p:nvSpPr>
-          <p:cNvPr id="545" name=""/>
+          <p:cNvPr id="522" name=""/>
           <p:cNvSpPr/>
           <p:nvPr/>
         </p:nvSpPr>
@@ -15311,7 +14494,7 @@
       </p:sp>
       <p:sp>
         <p:nvSpPr>
-          <p:cNvPr id="546" name=""/>
+          <p:cNvPr id="523" name=""/>
           <p:cNvSpPr/>
           <p:nvPr/>
         </p:nvSpPr>
@@ -15348,7 +14531,7 @@
       </p:sp>
       <p:sp>
         <p:nvSpPr>
-          <p:cNvPr id="547" name=""/>
+          <p:cNvPr id="524" name=""/>
           <p:cNvSpPr/>
           <p:nvPr/>
         </p:nvSpPr>
@@ -15385,7 +14568,7 @@
       </p:sp>
       <p:sp>
         <p:nvSpPr>
-          <p:cNvPr id="548" name=""/>
+          <p:cNvPr id="525" name=""/>
           <p:cNvSpPr/>
           <p:nvPr/>
         </p:nvSpPr>
@@ -15422,7 +14605,7 @@
       </p:sp>
       <p:sp>
         <p:nvSpPr>
-          <p:cNvPr id="549" name=""/>
+          <p:cNvPr id="526" name=""/>
           <p:cNvSpPr/>
           <p:nvPr/>
         </p:nvSpPr>
@@ -15459,7 +14642,7 @@
       </p:sp>
       <p:sp>
         <p:nvSpPr>
-          <p:cNvPr id="550" name=""/>
+          <p:cNvPr id="527" name=""/>
           <p:cNvSpPr/>
           <p:nvPr/>
         </p:nvSpPr>
@@ -15496,7 +14679,7 @@
       </p:sp>
       <p:sp>
         <p:nvSpPr>
-          <p:cNvPr id="551" name=""/>
+          <p:cNvPr id="528" name=""/>
           <p:cNvSpPr/>
           <p:nvPr/>
         </p:nvSpPr>
@@ -15533,7 +14716,7 @@
       </p:sp>
       <p:sp>
         <p:nvSpPr>
-          <p:cNvPr id="552" name=""/>
+          <p:cNvPr id="529" name=""/>
           <p:cNvSpPr/>
           <p:nvPr/>
         </p:nvSpPr>
@@ -15570,7 +14753,7 @@
       </p:sp>
       <p:sp>
         <p:nvSpPr>
-          <p:cNvPr id="553" name=""/>
+          <p:cNvPr id="530" name=""/>
           <p:cNvSpPr/>
           <p:nvPr/>
         </p:nvSpPr>
@@ -15607,7 +14790,7 @@
       </p:sp>
       <p:sp>
         <p:nvSpPr>
-          <p:cNvPr id="554" name=""/>
+          <p:cNvPr id="531" name=""/>
           <p:cNvSpPr/>
           <p:nvPr/>
         </p:nvSpPr>
@@ -15644,7 +14827,7 @@
       </p:sp>
       <p:sp>
         <p:nvSpPr>
-          <p:cNvPr id="555" name=""/>
+          <p:cNvPr id="532" name=""/>
           <p:cNvSpPr/>
           <p:nvPr/>
         </p:nvSpPr>
@@ -15681,7 +14864,7 @@
       </p:sp>
       <p:sp>
         <p:nvSpPr>
-          <p:cNvPr id="556" name=""/>
+          <p:cNvPr id="533" name=""/>
           <p:cNvSpPr/>
           <p:nvPr/>
         </p:nvSpPr>
@@ -15718,7 +14901,7 @@
       </p:sp>
       <p:sp>
         <p:nvSpPr>
-          <p:cNvPr id="557" name=""/>
+          <p:cNvPr id="534" name=""/>
           <p:cNvSpPr/>
           <p:nvPr/>
         </p:nvSpPr>
@@ -15755,7 +14938,7 @@
       </p:sp>
       <p:sp>
         <p:nvSpPr>
-          <p:cNvPr id="558" name=""/>
+          <p:cNvPr id="535" name=""/>
           <p:cNvSpPr/>
           <p:nvPr/>
         </p:nvSpPr>
@@ -15792,7 +14975,7 @@
       </p:sp>
       <p:sp>
         <p:nvSpPr>
-          <p:cNvPr id="559" name=""/>
+          <p:cNvPr id="536" name=""/>
           <p:cNvSpPr/>
           <p:nvPr/>
         </p:nvSpPr>
@@ -15829,7 +15012,7 @@
       </p:sp>
       <p:sp>
         <p:nvSpPr>
-          <p:cNvPr id="560" name=""/>
+          <p:cNvPr id="537" name=""/>
           <p:cNvSpPr/>
           <p:nvPr/>
         </p:nvSpPr>
@@ -15866,7 +15049,7 @@
       </p:sp>
       <p:sp>
         <p:nvSpPr>
-          <p:cNvPr id="561" name=""/>
+          <p:cNvPr id="538" name=""/>
           <p:cNvSpPr/>
           <p:nvPr/>
         </p:nvSpPr>
@@ -15903,7 +15086,7 @@
       </p:sp>
       <p:sp>
         <p:nvSpPr>
-          <p:cNvPr id="562" name=""/>
+          <p:cNvPr id="539" name=""/>
           <p:cNvSpPr/>
           <p:nvPr/>
         </p:nvSpPr>
@@ -15940,7 +15123,7 @@
       </p:sp>
       <p:sp>
         <p:nvSpPr>
-          <p:cNvPr id="563" name=""/>
+          <p:cNvPr id="540" name=""/>
           <p:cNvSpPr/>
           <p:nvPr/>
         </p:nvSpPr>
@@ -15977,7 +15160,7 @@
       </p:sp>
       <p:sp>
         <p:nvSpPr>
-          <p:cNvPr id="564" name=""/>
+          <p:cNvPr id="541" name=""/>
           <p:cNvSpPr/>
           <p:nvPr/>
         </p:nvSpPr>
@@ -16014,7 +15197,7 @@
       </p:sp>
       <p:sp>
         <p:nvSpPr>
-          <p:cNvPr id="565" name=""/>
+          <p:cNvPr id="542" name=""/>
           <p:cNvSpPr/>
           <p:nvPr/>
         </p:nvSpPr>
@@ -16051,7 +15234,7 @@
       </p:sp>
       <p:sp>
         <p:nvSpPr>
-          <p:cNvPr id="566" name=""/>
+          <p:cNvPr id="543" name=""/>
           <p:cNvSpPr/>
           <p:nvPr/>
         </p:nvSpPr>
@@ -16088,7 +15271,7 @@
       </p:sp>
       <p:sp>
         <p:nvSpPr>
-          <p:cNvPr id="567" name=""/>
+          <p:cNvPr id="544" name=""/>
           <p:cNvSpPr/>
           <p:nvPr/>
         </p:nvSpPr>
@@ -16125,7 +15308,7 @@
       </p:sp>
       <p:sp>
         <p:nvSpPr>
-          <p:cNvPr id="568" name=""/>
+          <p:cNvPr id="545" name=""/>
           <p:cNvSpPr/>
           <p:nvPr/>
         </p:nvSpPr>
@@ -16162,7 +15345,7 @@
       </p:sp>
       <p:sp>
         <p:nvSpPr>
-          <p:cNvPr id="569" name=""/>
+          <p:cNvPr id="546" name=""/>
           <p:cNvSpPr/>
           <p:nvPr/>
         </p:nvSpPr>
@@ -16199,7 +15382,7 @@
       </p:sp>
       <p:sp>
         <p:nvSpPr>
-          <p:cNvPr id="570" name=""/>
+          <p:cNvPr id="547" name=""/>
           <p:cNvSpPr/>
           <p:nvPr/>
         </p:nvSpPr>
@@ -16236,7 +15419,7 @@
       </p:sp>
       <p:sp>
         <p:nvSpPr>
-          <p:cNvPr id="571" name=""/>
+          <p:cNvPr id="548" name=""/>
           <p:cNvSpPr/>
           <p:nvPr/>
         </p:nvSpPr>
@@ -16273,7 +15456,7 @@
       </p:sp>
       <p:sp>
         <p:nvSpPr>
-          <p:cNvPr id="572" name=""/>
+          <p:cNvPr id="549" name=""/>
           <p:cNvSpPr/>
           <p:nvPr/>
         </p:nvSpPr>
@@ -16310,7 +15493,7 @@
       </p:sp>
       <p:sp>
         <p:nvSpPr>
-          <p:cNvPr id="573" name=""/>
+          <p:cNvPr id="550" name=""/>
           <p:cNvSpPr/>
           <p:nvPr/>
         </p:nvSpPr>
@@ -16347,7 +15530,7 @@
       </p:sp>
       <p:sp>
         <p:nvSpPr>
-          <p:cNvPr id="574" name=""/>
+          <p:cNvPr id="551" name=""/>
           <p:cNvSpPr/>
           <p:nvPr/>
         </p:nvSpPr>
@@ -16384,7 +15567,7 @@
       </p:sp>
       <p:sp>
         <p:nvSpPr>
-          <p:cNvPr id="575" name=""/>
+          <p:cNvPr id="552" name=""/>
           <p:cNvSpPr/>
           <p:nvPr/>
         </p:nvSpPr>
@@ -16421,7 +15604,7 @@
       </p:sp>
       <p:sp>
         <p:nvSpPr>
-          <p:cNvPr id="576" name=""/>
+          <p:cNvPr id="553" name=""/>
           <p:cNvSpPr/>
           <p:nvPr/>
         </p:nvSpPr>
@@ -16458,7 +15641,7 @@
       </p:sp>
       <p:sp>
         <p:nvSpPr>
-          <p:cNvPr id="577" name=""/>
+          <p:cNvPr id="554" name=""/>
           <p:cNvSpPr/>
           <p:nvPr/>
         </p:nvSpPr>
@@ -16495,7 +15678,7 @@
       </p:sp>
       <p:sp>
         <p:nvSpPr>
-          <p:cNvPr id="578" name=""/>
+          <p:cNvPr id="555" name=""/>
           <p:cNvSpPr/>
           <p:nvPr/>
         </p:nvSpPr>
@@ -16532,7 +15715,7 @@
       </p:sp>
       <p:sp>
         <p:nvSpPr>
-          <p:cNvPr id="579" name=""/>
+          <p:cNvPr id="556" name=""/>
           <p:cNvSpPr/>
           <p:nvPr/>
         </p:nvSpPr>
@@ -16569,7 +15752,7 @@
       </p:sp>
       <p:sp>
         <p:nvSpPr>
-          <p:cNvPr id="580" name=""/>
+          <p:cNvPr id="557" name=""/>
           <p:cNvSpPr/>
           <p:nvPr/>
         </p:nvSpPr>
@@ -16606,7 +15789,7 @@
       </p:sp>
       <p:sp>
         <p:nvSpPr>
-          <p:cNvPr id="581" name=""/>
+          <p:cNvPr id="558" name=""/>
           <p:cNvSpPr/>
           <p:nvPr/>
         </p:nvSpPr>
@@ -16643,7 +15826,7 @@
       </p:sp>
       <p:sp>
         <p:nvSpPr>
-          <p:cNvPr id="582" name=""/>
+          <p:cNvPr id="559" name=""/>
           <p:cNvSpPr/>
           <p:nvPr/>
         </p:nvSpPr>
@@ -16680,7 +15863,7 @@
       </p:sp>
       <p:sp>
         <p:nvSpPr>
-          <p:cNvPr id="583" name=""/>
+          <p:cNvPr id="560" name=""/>
           <p:cNvSpPr/>
           <p:nvPr/>
         </p:nvSpPr>
@@ -16717,7 +15900,7 @@
       </p:sp>
       <p:sp>
         <p:nvSpPr>
-          <p:cNvPr id="584" name=""/>
+          <p:cNvPr id="561" name=""/>
           <p:cNvSpPr/>
           <p:nvPr/>
         </p:nvSpPr>
@@ -16754,7 +15937,7 @@
       </p:sp>
       <p:sp>
         <p:nvSpPr>
-          <p:cNvPr id="585" name=""/>
+          <p:cNvPr id="562" name=""/>
           <p:cNvSpPr/>
           <p:nvPr/>
         </p:nvSpPr>
@@ -16791,7 +15974,7 @@
       </p:sp>
       <p:sp>
         <p:nvSpPr>
-          <p:cNvPr id="586" name=""/>
+          <p:cNvPr id="563" name=""/>
           <p:cNvSpPr/>
           <p:nvPr/>
         </p:nvSpPr>
@@ -16828,7 +16011,7 @@
       </p:sp>
       <p:sp>
         <p:nvSpPr>
-          <p:cNvPr id="587" name=""/>
+          <p:cNvPr id="564" name=""/>
           <p:cNvSpPr/>
           <p:nvPr/>
         </p:nvSpPr>
@@ -16865,7 +16048,7 @@
       </p:sp>
       <p:sp>
         <p:nvSpPr>
-          <p:cNvPr id="588" name=""/>
+          <p:cNvPr id="565" name=""/>
           <p:cNvSpPr/>
           <p:nvPr/>
         </p:nvSpPr>
@@ -16902,7 +16085,7 @@
       </p:sp>
       <p:sp>
         <p:nvSpPr>
-          <p:cNvPr id="589" name=""/>
+          <p:cNvPr id="566" name=""/>
           <p:cNvSpPr/>
           <p:nvPr/>
         </p:nvSpPr>
@@ -16939,7 +16122,7 @@
       </p:sp>
       <p:sp>
         <p:nvSpPr>
-          <p:cNvPr id="590" name=""/>
+          <p:cNvPr id="567" name=""/>
           <p:cNvSpPr/>
           <p:nvPr/>
         </p:nvSpPr>
@@ -16976,7 +16159,7 @@
       </p:sp>
       <p:sp>
         <p:nvSpPr>
-          <p:cNvPr id="591" name=""/>
+          <p:cNvPr id="568" name=""/>
           <p:cNvSpPr/>
           <p:nvPr/>
         </p:nvSpPr>
@@ -17013,7 +16196,7 @@
       </p:sp>
       <p:sp>
         <p:nvSpPr>
-          <p:cNvPr id="592" name=""/>
+          <p:cNvPr id="569" name=""/>
           <p:cNvSpPr/>
           <p:nvPr/>
         </p:nvSpPr>
@@ -17050,7 +16233,7 @@
       </p:sp>
       <p:sp>
         <p:nvSpPr>
-          <p:cNvPr id="593" name=""/>
+          <p:cNvPr id="570" name=""/>
           <p:cNvSpPr/>
           <p:nvPr/>
         </p:nvSpPr>
@@ -17087,7 +16270,7 @@
       </p:sp>
       <p:sp>
         <p:nvSpPr>
-          <p:cNvPr id="594" name=""/>
+          <p:cNvPr id="571" name=""/>
           <p:cNvSpPr/>
           <p:nvPr/>
         </p:nvSpPr>
@@ -17124,7 +16307,7 @@
       </p:sp>
       <p:sp>
         <p:nvSpPr>
-          <p:cNvPr id="595" name=""/>
+          <p:cNvPr id="572" name=""/>
           <p:cNvSpPr/>
           <p:nvPr/>
         </p:nvSpPr>
@@ -17161,7 +16344,7 @@
       </p:sp>
       <p:sp>
         <p:nvSpPr>
-          <p:cNvPr id="596" name=""/>
+          <p:cNvPr id="573" name=""/>
           <p:cNvSpPr/>
           <p:nvPr/>
         </p:nvSpPr>
@@ -17198,7 +16381,7 @@
       </p:sp>
       <p:sp>
         <p:nvSpPr>
-          <p:cNvPr id="597" name=""/>
+          <p:cNvPr id="574" name=""/>
           <p:cNvSpPr/>
           <p:nvPr/>
         </p:nvSpPr>
@@ -17235,7 +16418,7 @@
       </p:sp>
       <p:sp>
         <p:nvSpPr>
-          <p:cNvPr id="598" name=""/>
+          <p:cNvPr id="575" name=""/>
           <p:cNvSpPr/>
           <p:nvPr/>
         </p:nvSpPr>
@@ -17272,7 +16455,7 @@
       </p:sp>
       <p:sp>
         <p:nvSpPr>
-          <p:cNvPr id="599" name=""/>
+          <p:cNvPr id="576" name=""/>
           <p:cNvSpPr/>
           <p:nvPr/>
         </p:nvSpPr>
@@ -17309,7 +16492,7 @@
       </p:sp>
       <p:sp>
         <p:nvSpPr>
-          <p:cNvPr id="600" name=""/>
+          <p:cNvPr id="577" name=""/>
           <p:cNvSpPr/>
           <p:nvPr/>
         </p:nvSpPr>
@@ -17346,7 +16529,7 @@
       </p:sp>
       <p:sp>
         <p:nvSpPr>
-          <p:cNvPr id="601" name=""/>
+          <p:cNvPr id="578" name=""/>
           <p:cNvSpPr/>
           <p:nvPr/>
         </p:nvSpPr>
@@ -17383,7 +16566,7 @@
       </p:sp>
       <p:sp>
         <p:nvSpPr>
-          <p:cNvPr id="602" name=""/>
+          <p:cNvPr id="579" name=""/>
           <p:cNvSpPr/>
           <p:nvPr/>
         </p:nvSpPr>
@@ -17420,7 +16603,7 @@
       </p:sp>
       <p:sp>
         <p:nvSpPr>
-          <p:cNvPr id="603" name=""/>
+          <p:cNvPr id="580" name=""/>
           <p:cNvSpPr/>
           <p:nvPr/>
         </p:nvSpPr>
@@ -17457,7 +16640,7 @@
       </p:sp>
       <p:sp>
         <p:nvSpPr>
-          <p:cNvPr id="604" name=""/>
+          <p:cNvPr id="581" name=""/>
           <p:cNvSpPr/>
           <p:nvPr/>
         </p:nvSpPr>
@@ -17494,7 +16677,7 @@
       </p:sp>
       <p:sp>
         <p:nvSpPr>
-          <p:cNvPr id="605" name=""/>
+          <p:cNvPr id="582" name=""/>
           <p:cNvSpPr/>
           <p:nvPr/>
         </p:nvSpPr>
@@ -17531,7 +16714,7 @@
       </p:sp>
       <p:sp>
         <p:nvSpPr>
-          <p:cNvPr id="606" name=""/>
+          <p:cNvPr id="583" name=""/>
           <p:cNvSpPr/>
           <p:nvPr/>
         </p:nvSpPr>
@@ -17568,7 +16751,7 @@
       </p:sp>
       <p:sp>
         <p:nvSpPr>
-          <p:cNvPr id="607" name=""/>
+          <p:cNvPr id="584" name=""/>
           <p:cNvSpPr/>
           <p:nvPr/>
         </p:nvSpPr>
@@ -17605,7 +16788,7 @@
       </p:sp>
       <p:sp>
         <p:nvSpPr>
-          <p:cNvPr id="608" name=""/>
+          <p:cNvPr id="585" name=""/>
           <p:cNvSpPr/>
           <p:nvPr/>
         </p:nvSpPr>
@@ -17642,7 +16825,7 @@
       </p:sp>
       <p:sp>
         <p:nvSpPr>
-          <p:cNvPr id="609" name=""/>
+          <p:cNvPr id="586" name=""/>
           <p:cNvSpPr/>
           <p:nvPr/>
         </p:nvSpPr>
@@ -17679,7 +16862,7 @@
       </p:sp>
       <p:sp>
         <p:nvSpPr>
-          <p:cNvPr id="610" name=""/>
+          <p:cNvPr id="587" name=""/>
           <p:cNvSpPr txBox="1"/>
           <p:nvPr/>
         </p:nvSpPr>
@@ -17726,7 +16909,7 @@
       </p:sp>
       <p:sp>
         <p:nvSpPr>
-          <p:cNvPr id="611" name=""/>
+          <p:cNvPr id="588" name=""/>
           <p:cNvSpPr txBox="1"/>
           <p:nvPr/>
         </p:nvSpPr>
@@ -17773,7 +16956,7 @@
       </p:sp>
       <p:sp>
         <p:nvSpPr>
-          <p:cNvPr id="612" name=""/>
+          <p:cNvPr id="589" name=""/>
           <p:cNvSpPr txBox="1"/>
           <p:nvPr/>
         </p:nvSpPr>
@@ -17819,7 +17002,7 @@
       </p:sp>
       <p:sp>
         <p:nvSpPr>
-          <p:cNvPr id="613" name=""/>
+          <p:cNvPr id="590" name=""/>
           <p:cNvSpPr txBox="1"/>
           <p:nvPr/>
         </p:nvSpPr>
@@ -17903,7 +17086,7 @@
       </p:grpSpPr>
       <p:sp>
         <p:nvSpPr>
-          <p:cNvPr id="614" name=""/>
+          <p:cNvPr id="591" name=""/>
           <p:cNvSpPr/>
           <p:nvPr/>
         </p:nvSpPr>
@@ -17940,7 +17123,7 @@
       </p:sp>
       <p:sp>
         <p:nvSpPr>
-          <p:cNvPr id="615" name=""/>
+          <p:cNvPr id="592" name=""/>
           <p:cNvSpPr/>
           <p:nvPr/>
         </p:nvSpPr>
@@ -17977,7 +17160,7 @@
       </p:sp>
       <p:sp>
         <p:nvSpPr>
-          <p:cNvPr id="616" name=""/>
+          <p:cNvPr id="593" name=""/>
           <p:cNvSpPr/>
           <p:nvPr/>
         </p:nvSpPr>
@@ -18014,7 +17197,7 @@
       </p:sp>
       <p:sp>
         <p:nvSpPr>
-          <p:cNvPr id="617" name=""/>
+          <p:cNvPr id="594" name=""/>
           <p:cNvSpPr/>
           <p:nvPr/>
         </p:nvSpPr>
@@ -18051,7 +17234,7 @@
       </p:sp>
       <p:sp>
         <p:nvSpPr>
-          <p:cNvPr id="618" name=""/>
+          <p:cNvPr id="595" name=""/>
           <p:cNvSpPr/>
           <p:nvPr/>
         </p:nvSpPr>
@@ -18088,7 +17271,7 @@
       </p:sp>
       <p:sp>
         <p:nvSpPr>
-          <p:cNvPr id="619" name=""/>
+          <p:cNvPr id="596" name=""/>
           <p:cNvSpPr/>
           <p:nvPr/>
         </p:nvSpPr>
@@ -18125,7 +17308,7 @@
       </p:sp>
       <p:sp>
         <p:nvSpPr>
-          <p:cNvPr id="620" name=""/>
+          <p:cNvPr id="597" name=""/>
           <p:cNvSpPr/>
           <p:nvPr/>
         </p:nvSpPr>
@@ -18162,7 +17345,7 @@
       </p:sp>
       <p:sp>
         <p:nvSpPr>
-          <p:cNvPr id="621" name=""/>
+          <p:cNvPr id="598" name=""/>
           <p:cNvSpPr txBox="1"/>
           <p:nvPr/>
         </p:nvSpPr>
@@ -18208,7 +17391,7 @@
       </p:sp>
       <p:sp>
         <p:nvSpPr>
-          <p:cNvPr id="622" name=""/>
+          <p:cNvPr id="599" name=""/>
           <p:cNvSpPr txBox="1"/>
           <p:nvPr/>
         </p:nvSpPr>
@@ -18254,7 +17437,7 @@
       </p:sp>
       <p:sp>
         <p:nvSpPr>
-          <p:cNvPr id="623" name=""/>
+          <p:cNvPr id="600" name=""/>
           <p:cNvSpPr txBox="1"/>
           <p:nvPr/>
         </p:nvSpPr>
@@ -18384,7 +17567,7 @@
       </p:sp>
       <p:sp>
         <p:nvSpPr>
-          <p:cNvPr id="624" name=""/>
+          <p:cNvPr id="601" name=""/>
           <p:cNvSpPr/>
           <p:nvPr/>
         </p:nvSpPr>
@@ -18424,7 +17607,7 @@
       </p:sp>
       <p:sp>
         <p:nvSpPr>
-          <p:cNvPr id="625" name=""/>
+          <p:cNvPr id="602" name=""/>
           <p:cNvSpPr txBox="1"/>
           <p:nvPr/>
         </p:nvSpPr>
@@ -18575,7 +17758,7 @@
       </p:sp>
       <p:sp>
         <p:nvSpPr>
-          <p:cNvPr id="626" name=""/>
+          <p:cNvPr id="603" name=""/>
           <p:cNvSpPr txBox="1"/>
           <p:nvPr/>
         </p:nvSpPr>
@@ -18621,7 +17804,7 @@
       </p:sp>
       <p:sp>
         <p:nvSpPr>
-          <p:cNvPr id="627" name=""/>
+          <p:cNvPr id="604" name=""/>
           <p:cNvSpPr txBox="1"/>
           <p:nvPr/>
         </p:nvSpPr>
@@ -25062,7 +24245,7 @@
                 <a:uFillTx/>
                 <a:latin typeface="Arial"/>
               </a:rPr>
-              <a:t>LIVE BUILD · LINEAR</a:t>
+              <a:t>STEP 1 · LINEAR</a:t>
             </a:r>
             <a:endParaRPr lang="en-US" sz="1150" b="0" u="none" strike="noStrike">
               <a:solidFill>
@@ -25084,7 +24267,7 @@
         <p:spPr>
           <a:xfrm>
             <a:off x="630000" y="702000"/>
-            <a:ext cx="3780000" cy="936000"/>
+            <a:ext cx="5040000" cy="936000"/>
           </a:xfrm>
           <a:prstGeom prst="rect">
             <a:avLst/>
@@ -25100,7 +24283,7 @@
           </a:bodyPr>
           <a:p>
             <a:r>
-              <a:rPr lang="en-US" sz="2600" b="1" u="none" strike="noStrike">
+              <a:rPr lang="en-US" sz="2700" b="1" u="none" strike="noStrike">
                 <a:solidFill>
                   <a:srgbClr val="ECEEF2"/>
                 </a:solidFill>
@@ -25110,7 +24293,7 @@
               </a:rPr>
               <a:t>Build one learned layer</a:t>
             </a:r>
-            <a:endParaRPr lang="en-US" sz="2600" b="0" u="none" strike="noStrike">
+            <a:endParaRPr lang="en-US" sz="2700" b="0" u="none" strike="noStrike">
               <a:solidFill>
                 <a:srgbClr val="FFFFFF"/>
               </a:solidFill>
@@ -25129,8 +24312,8 @@
         </p:nvSpPr>
         <p:spPr>
           <a:xfrm>
-            <a:off x="4572000" y="972000"/>
-            <a:ext cx="3942000" cy="3204000"/>
+            <a:off x="630000" y="1224000"/>
+            <a:ext cx="5040000" cy="2412000"/>
           </a:xfrm>
           <a:prstGeom prst="rect">
             <a:avLst/>
@@ -25169,8 +24352,8 @@
         </p:nvSpPr>
         <p:spPr>
           <a:xfrm>
-            <a:off x="4752000" y="1134000"/>
-            <a:ext cx="3582000" cy="2916000"/>
+            <a:off x="810000" y="1386000"/>
+            <a:ext cx="4680000" cy="2124000"/>
           </a:xfrm>
           <a:prstGeom prst="rect">
             <a:avLst/>
@@ -25186,7 +24369,7 @@
           </a:bodyPr>
           <a:p>
             <a:r>
-              <a:rPr lang="en-US" sz="950" b="0" u="none" strike="noStrike">
+              <a:rPr lang="en-US" sz="900" b="0" u="none" strike="noStrike">
                 <a:solidFill>
                   <a:srgbClr val="ECEEF2"/>
                 </a:solidFill>
@@ -25196,18 +24379,18 @@
               </a:rPr>
               <a:t>class Linear:</a:t>
             </a:r>
-            <a:endParaRPr lang="en-US" sz="950" b="0" u="none" strike="noStrike">
-              <a:solidFill>
-                <a:srgbClr val="FFFFFF"/>
-              </a:solidFill>
-              <a:effectLst/>
-              <a:uFillTx/>
-              <a:latin typeface="Arial"/>
-            </a:endParaRPr>
-          </a:p>
-          <a:p>
-            <a:r>
-              <a:rPr lang="en-US" sz="950" b="0" u="none" strike="noStrike">
+            <a:endParaRPr lang="en-US" sz="900" b="0" u="none" strike="noStrike">
+              <a:solidFill>
+                <a:srgbClr val="FFFFFF"/>
+              </a:solidFill>
+              <a:effectLst/>
+              <a:uFillTx/>
+              <a:latin typeface="Arial"/>
+            </a:endParaRPr>
+          </a:p>
+          <a:p>
+            <a:r>
+              <a:rPr lang="en-US" sz="900" b="0" u="none" strike="noStrike">
                 <a:solidFill>
                   <a:srgbClr val="ECEEF2"/>
                 </a:solidFill>
@@ -25217,18 +24400,18 @@
               </a:rPr>
               <a:t>    def __init__(self, in_features, out_features):</a:t>
             </a:r>
-            <a:endParaRPr lang="en-US" sz="950" b="0" u="none" strike="noStrike">
-              <a:solidFill>
-                <a:srgbClr val="FFFFFF"/>
-              </a:solidFill>
-              <a:effectLst/>
-              <a:uFillTx/>
-              <a:latin typeface="Arial"/>
-            </a:endParaRPr>
-          </a:p>
-          <a:p>
-            <a:r>
-              <a:rPr lang="en-US" sz="950" b="0" u="none" strike="noStrike">
+            <a:endParaRPr lang="en-US" sz="900" b="0" u="none" strike="noStrike">
+              <a:solidFill>
+                <a:srgbClr val="FFFFFF"/>
+              </a:solidFill>
+              <a:effectLst/>
+              <a:uFillTx/>
+              <a:latin typeface="Arial"/>
+            </a:endParaRPr>
+          </a:p>
+          <a:p>
+            <a:r>
+              <a:rPr lang="en-US" sz="900" b="0" u="none" strike="noStrike">
                 <a:solidFill>
                   <a:srgbClr val="ECEEF2"/>
                 </a:solidFill>
@@ -25238,18 +24421,18 @@
               </a:rPr>
               <a:t>        std = (2 / in_features) ** 0.5</a:t>
             </a:r>
-            <a:endParaRPr lang="en-US" sz="950" b="0" u="none" strike="noStrike">
-              <a:solidFill>
-                <a:srgbClr val="FFFFFF"/>
-              </a:solidFill>
-              <a:effectLst/>
-              <a:uFillTx/>
-              <a:latin typeface="Arial"/>
-            </a:endParaRPr>
-          </a:p>
-          <a:p>
-            <a:r>
-              <a:rPr lang="en-US" sz="950" b="0" u="none" strike="noStrike">
+            <a:endParaRPr lang="en-US" sz="900" b="0" u="none" strike="noStrike">
+              <a:solidFill>
+                <a:srgbClr val="FFFFFF"/>
+              </a:solidFill>
+              <a:effectLst/>
+              <a:uFillTx/>
+              <a:latin typeface="Arial"/>
+            </a:endParaRPr>
+          </a:p>
+          <a:p>
+            <a:r>
+              <a:rPr lang="en-US" sz="900" b="0" u="none" strike="noStrike">
                 <a:solidFill>
                   <a:srgbClr val="ECEEF2"/>
                 </a:solidFill>
@@ -25257,20 +24440,20 @@
                 <a:uFillTx/>
                 <a:latin typeface="Arial"/>
               </a:rPr>
-              <a:t>        self.weights = torch.randn(</a:t>
-            </a:r>
-            <a:endParaRPr lang="en-US" sz="950" b="0" u="none" strike="noStrike">
-              <a:solidFill>
-                <a:srgbClr val="FFFFFF"/>
-              </a:solidFill>
-              <a:effectLst/>
-              <a:uFillTx/>
-              <a:latin typeface="Arial"/>
-            </a:endParaRPr>
-          </a:p>
-          <a:p>
-            <a:r>
-              <a:rPr lang="en-US" sz="950" b="0" u="none" strike="noStrike">
+              <a:t>        self.weights = torch.randn(in_features, out_features) * std</a:t>
+            </a:r>
+            <a:endParaRPr lang="en-US" sz="900" b="0" u="none" strike="noStrike">
+              <a:solidFill>
+                <a:srgbClr val="FFFFFF"/>
+              </a:solidFill>
+              <a:effectLst/>
+              <a:uFillTx/>
+              <a:latin typeface="Arial"/>
+            </a:endParaRPr>
+          </a:p>
+          <a:p>
+            <a:r>
+              <a:rPr lang="en-US" sz="900" b="0" u="none" strike="noStrike">
                 <a:solidFill>
                   <a:srgbClr val="ECEEF2"/>
                 </a:solidFill>
@@ -25278,20 +24461,30 @@
                 <a:uFillTx/>
                 <a:latin typeface="Arial"/>
               </a:rPr>
-              <a:t>            in_features, out_features) * std</a:t>
-            </a:r>
-            <a:endParaRPr lang="en-US" sz="950" b="0" u="none" strike="noStrike">
-              <a:solidFill>
-                <a:srgbClr val="FFFFFF"/>
-              </a:solidFill>
-              <a:effectLst/>
-              <a:uFillTx/>
-              <a:latin typeface="Arial"/>
-            </a:endParaRPr>
-          </a:p>
-          <a:p>
-            <a:r>
-              <a:rPr lang="en-US" sz="950" b="0" u="none" strike="noStrike">
+              <a:t>        self.bias = torch.zeros(out_features)</a:t>
+            </a:r>
+            <a:endParaRPr lang="en-US" sz="900" b="0" u="none" strike="noStrike">
+              <a:solidFill>
+                <a:srgbClr val="FFFFFF"/>
+              </a:solidFill>
+              <a:effectLst/>
+              <a:uFillTx/>
+              <a:latin typeface="Arial"/>
+            </a:endParaRPr>
+          </a:p>
+          <a:p>
+            <a:endParaRPr lang="en-US" sz="900" b="0" u="none" strike="noStrike">
+              <a:solidFill>
+                <a:srgbClr val="FFFFFF"/>
+              </a:solidFill>
+              <a:effectLst/>
+              <a:uFillTx/>
+              <a:latin typeface="Arial"/>
+            </a:endParaRPr>
+          </a:p>
+          <a:p>
+            <a:r>
+              <a:rPr lang="en-US" sz="900" b="0" u="none" strike="noStrike">
                 <a:solidFill>
                   <a:srgbClr val="ECEEF2"/>
                 </a:solidFill>
@@ -25299,30 +24492,20 @@
                 <a:uFillTx/>
                 <a:latin typeface="Arial"/>
               </a:rPr>
-              <a:t>        self.bias = torch.zeros(out_features)</a:t>
-            </a:r>
-            <a:endParaRPr lang="en-US" sz="950" b="0" u="none" strike="noStrike">
-              <a:solidFill>
-                <a:srgbClr val="FFFFFF"/>
-              </a:solidFill>
-              <a:effectLst/>
-              <a:uFillTx/>
-              <a:latin typeface="Arial"/>
-            </a:endParaRPr>
-          </a:p>
-          <a:p>
-            <a:endParaRPr lang="en-US" sz="950" b="0" u="none" strike="noStrike">
-              <a:solidFill>
-                <a:srgbClr val="FFFFFF"/>
-              </a:solidFill>
-              <a:effectLst/>
-              <a:uFillTx/>
-              <a:latin typeface="Arial"/>
-            </a:endParaRPr>
-          </a:p>
-          <a:p>
-            <a:r>
-              <a:rPr lang="en-US" sz="950" b="0" u="none" strike="noStrike">
+              <a:t>        self.weights.requires_grad_()</a:t>
+            </a:r>
+            <a:endParaRPr lang="en-US" sz="900" b="0" u="none" strike="noStrike">
+              <a:solidFill>
+                <a:srgbClr val="FFFFFF"/>
+              </a:solidFill>
+              <a:effectLst/>
+              <a:uFillTx/>
+              <a:latin typeface="Arial"/>
+            </a:endParaRPr>
+          </a:p>
+          <a:p>
+            <a:r>
+              <a:rPr lang="en-US" sz="900" b="0" u="none" strike="noStrike">
                 <a:solidFill>
                   <a:srgbClr val="ECEEF2"/>
                 </a:solidFill>
@@ -25330,20 +24513,30 @@
                 <a:uFillTx/>
                 <a:latin typeface="Arial"/>
               </a:rPr>
-              <a:t>        self.weights.requires_grad_()</a:t>
-            </a:r>
-            <a:endParaRPr lang="en-US" sz="950" b="0" u="none" strike="noStrike">
-              <a:solidFill>
-                <a:srgbClr val="FFFFFF"/>
-              </a:solidFill>
-              <a:effectLst/>
-              <a:uFillTx/>
-              <a:latin typeface="Arial"/>
-            </a:endParaRPr>
-          </a:p>
-          <a:p>
-            <a:r>
-              <a:rPr lang="en-US" sz="950" b="0" u="none" strike="noStrike">
+              <a:t>        self.bias.requires_grad_()</a:t>
+            </a:r>
+            <a:endParaRPr lang="en-US" sz="900" b="0" u="none" strike="noStrike">
+              <a:solidFill>
+                <a:srgbClr val="FFFFFF"/>
+              </a:solidFill>
+              <a:effectLst/>
+              <a:uFillTx/>
+              <a:latin typeface="Arial"/>
+            </a:endParaRPr>
+          </a:p>
+          <a:p>
+            <a:endParaRPr lang="en-US" sz="900" b="0" u="none" strike="noStrike">
+              <a:solidFill>
+                <a:srgbClr val="FFFFFF"/>
+              </a:solidFill>
+              <a:effectLst/>
+              <a:uFillTx/>
+              <a:latin typeface="Arial"/>
+            </a:endParaRPr>
+          </a:p>
+          <a:p>
+            <a:r>
+              <a:rPr lang="en-US" sz="900" b="0" u="none" strike="noStrike">
                 <a:solidFill>
                   <a:srgbClr val="ECEEF2"/>
                 </a:solidFill>
@@ -25351,30 +24544,20 @@
                 <a:uFillTx/>
                 <a:latin typeface="Arial"/>
               </a:rPr>
-              <a:t>        self.bias.requires_grad_()</a:t>
-            </a:r>
-            <a:endParaRPr lang="en-US" sz="950" b="0" u="none" strike="noStrike">
-              <a:solidFill>
-                <a:srgbClr val="FFFFFF"/>
-              </a:solidFill>
-              <a:effectLst/>
-              <a:uFillTx/>
-              <a:latin typeface="Arial"/>
-            </a:endParaRPr>
-          </a:p>
-          <a:p>
-            <a:endParaRPr lang="en-US" sz="950" b="0" u="none" strike="noStrike">
-              <a:solidFill>
-                <a:srgbClr val="FFFFFF"/>
-              </a:solidFill>
-              <a:effectLst/>
-              <a:uFillTx/>
-              <a:latin typeface="Arial"/>
-            </a:endParaRPr>
-          </a:p>
-          <a:p>
-            <a:r>
-              <a:rPr lang="en-US" sz="950" b="0" u="none" strike="noStrike">
+              <a:t>    def forward(self, x):</a:t>
+            </a:r>
+            <a:endParaRPr lang="en-US" sz="900" b="0" u="none" strike="noStrike">
+              <a:solidFill>
+                <a:srgbClr val="FFFFFF"/>
+              </a:solidFill>
+              <a:effectLst/>
+              <a:uFillTx/>
+              <a:latin typeface="Arial"/>
+            </a:endParaRPr>
+          </a:p>
+          <a:p>
+            <a:r>
+              <a:rPr lang="en-US" sz="900" b="0" u="none" strike="noStrike">
                 <a:solidFill>
                   <a:srgbClr val="ECEEF2"/>
                 </a:solidFill>
@@ -25382,20 +24565,30 @@
                 <a:uFillTx/>
                 <a:latin typeface="Arial"/>
               </a:rPr>
-              <a:t>    def forward(self, x):</a:t>
-            </a:r>
-            <a:endParaRPr lang="en-US" sz="950" b="0" u="none" strike="noStrike">
-              <a:solidFill>
-                <a:srgbClr val="FFFFFF"/>
-              </a:solidFill>
-              <a:effectLst/>
-              <a:uFillTx/>
-              <a:latin typeface="Arial"/>
-            </a:endParaRPr>
-          </a:p>
-          <a:p>
-            <a:r>
-              <a:rPr lang="en-US" sz="950" b="0" u="none" strike="noStrike">
+              <a:t>        return x @ self.weights + self.bias</a:t>
+            </a:r>
+            <a:endParaRPr lang="en-US" sz="900" b="0" u="none" strike="noStrike">
+              <a:solidFill>
+                <a:srgbClr val="FFFFFF"/>
+              </a:solidFill>
+              <a:effectLst/>
+              <a:uFillTx/>
+              <a:latin typeface="Arial"/>
+            </a:endParaRPr>
+          </a:p>
+          <a:p>
+            <a:endParaRPr lang="en-US" sz="900" b="0" u="none" strike="noStrike">
+              <a:solidFill>
+                <a:srgbClr val="FFFFFF"/>
+              </a:solidFill>
+              <a:effectLst/>
+              <a:uFillTx/>
+              <a:latin typeface="Arial"/>
+            </a:endParaRPr>
+          </a:p>
+          <a:p>
+            <a:r>
+              <a:rPr lang="en-US" sz="900" b="0" u="none" strike="noStrike">
                 <a:solidFill>
                   <a:srgbClr val="ECEEF2"/>
                 </a:solidFill>
@@ -25403,30 +24596,20 @@
                 <a:uFillTx/>
                 <a:latin typeface="Arial"/>
               </a:rPr>
-              <a:t>        return x @ self.weights + self.bias</a:t>
-            </a:r>
-            <a:endParaRPr lang="en-US" sz="950" b="0" u="none" strike="noStrike">
-              <a:solidFill>
-                <a:srgbClr val="FFFFFF"/>
-              </a:solidFill>
-              <a:effectLst/>
-              <a:uFillTx/>
-              <a:latin typeface="Arial"/>
-            </a:endParaRPr>
-          </a:p>
-          <a:p>
-            <a:endParaRPr lang="en-US" sz="950" b="0" u="none" strike="noStrike">
-              <a:solidFill>
-                <a:srgbClr val="FFFFFF"/>
-              </a:solidFill>
-              <a:effectLst/>
-              <a:uFillTx/>
-              <a:latin typeface="Arial"/>
-            </a:endParaRPr>
-          </a:p>
-          <a:p>
-            <a:r>
-              <a:rPr lang="en-US" sz="950" b="0" u="none" strike="noStrike">
+              <a:t>    def parameters(self):</a:t>
+            </a:r>
+            <a:endParaRPr lang="en-US" sz="900" b="0" u="none" strike="noStrike">
+              <a:solidFill>
+                <a:srgbClr val="FFFFFF"/>
+              </a:solidFill>
+              <a:effectLst/>
+              <a:uFillTx/>
+              <a:latin typeface="Arial"/>
+            </a:endParaRPr>
+          </a:p>
+          <a:p>
+            <a:r>
+              <a:rPr lang="en-US" sz="900" b="0" u="none" strike="noStrike">
                 <a:solidFill>
                   <a:srgbClr val="ECEEF2"/>
                 </a:solidFill>
@@ -25434,30 +24617,9 @@
                 <a:uFillTx/>
                 <a:latin typeface="Arial"/>
               </a:rPr>
-              <a:t>    def parameters(self):</a:t>
-            </a:r>
-            <a:endParaRPr lang="en-US" sz="950" b="0" u="none" strike="noStrike">
-              <a:solidFill>
-                <a:srgbClr val="FFFFFF"/>
-              </a:solidFill>
-              <a:effectLst/>
-              <a:uFillTx/>
-              <a:latin typeface="Arial"/>
-            </a:endParaRPr>
-          </a:p>
-          <a:p>
-            <a:r>
-              <a:rPr lang="en-US" sz="950" b="0" u="none" strike="noStrike">
-                <a:solidFill>
-                  <a:srgbClr val="ECEEF2"/>
-                </a:solidFill>
-                <a:effectLst/>
-                <a:uFillTx/>
-                <a:latin typeface="Arial"/>
-              </a:rPr>
               <a:t>        return [self.weights, self.bias]</a:t>
             </a:r>
-            <a:endParaRPr lang="en-US" sz="950" b="0" u="none" strike="noStrike">
+            <a:endParaRPr lang="en-US" sz="900" b="0" u="none" strike="noStrike">
               <a:solidFill>
                 <a:srgbClr val="FFFFFF"/>
               </a:solidFill>
@@ -25476,8 +24638,8 @@
         </p:nvSpPr>
         <p:spPr>
           <a:xfrm>
-            <a:off x="630000" y="1836000"/>
-            <a:ext cx="3672000" cy="1735200"/>
+            <a:off x="5616000" y="1224000"/>
+            <a:ext cx="2898000" cy="1958400"/>
           </a:xfrm>
           <a:prstGeom prst="rect">
             <a:avLst/>
@@ -25516,8 +24678,8 @@
         </p:nvSpPr>
         <p:spPr>
           <a:xfrm>
-            <a:off x="828000" y="1987200"/>
-            <a:ext cx="3276000" cy="1483200"/>
+            <a:off x="5814000" y="1375200"/>
+            <a:ext cx="2502000" cy="1706400"/>
           </a:xfrm>
           <a:prstGeom prst="rect">
             <a:avLst/>
@@ -25562,7 +24724,28 @@
                 <a:uFillTx/>
                 <a:latin typeface="Arial"/>
               </a:rPr>
-              <a:t>Random weights, zero biases.</a:t>
+              <a:t>Random weights,</a:t>
+            </a:r>
+            <a:endParaRPr lang="en-US" sz="1150" b="0" u="none" strike="noStrike">
+              <a:solidFill>
+                <a:srgbClr val="FFFFFF"/>
+              </a:solidFill>
+              <a:effectLst/>
+              <a:uFillTx/>
+              <a:latin typeface="Arial"/>
+            </a:endParaRPr>
+          </a:p>
+          <a:p>
+            <a:r>
+              <a:rPr lang="en-US" sz="1150" b="0" u="none" strike="noStrike">
+                <a:solidFill>
+                  <a:srgbClr val="ECEEF2"/>
+                </a:solidFill>
+                <a:effectLst/>
+                <a:uFillTx/>
+                <a:latin typeface="Arial"/>
+              </a:rPr>
+              <a:t>zero biases.</a:t>
             </a:r>
             <a:endParaRPr lang="en-US" sz="1150" b="0" u="none" strike="noStrike">
               <a:solidFill>
@@ -25732,7 +24915,7 @@
                 <a:uFillTx/>
                 <a:latin typeface="Arial"/>
               </a:rPr>
-              <a:t>✓ Checkpoint 1 - save the file, run the cell. Expect (3, 784) -&gt; (3, 128).</a:t>
+              <a:t>✓ Checkpoint 1 · three images through one layer. Expect (3, 784) -&gt; (3, 128).</a:t>
             </a:r>
             <a:endParaRPr lang="en-US" sz="1150" b="0" u="none" strike="noStrike">
               <a:solidFill>
@@ -26121,7 +25304,7 @@
                 <a:uFillTx/>
                 <a:latin typeface="Arial"/>
               </a:rPr>
-              <a:t>LIVE BUILD · RELU</a:t>
+              <a:t>STEP 2 · RELU</a:t>
             </a:r>
             <a:endParaRPr lang="en-US" sz="1150" b="0" u="none" strike="noStrike">
               <a:solidFill>
@@ -26952,7 +26135,7 @@
                 <a:uFillTx/>
                 <a:latin typeface="Arial"/>
               </a:rPr>
-              <a:t>LIVE BUILD · NETWORK</a:t>
+              <a:t>STEP 3 · NEURALNETWORK</a:t>
             </a:r>
             <a:endParaRPr lang="en-US" sz="1150" b="0" u="none" strike="noStrike">
               <a:solidFill>
@@ -26974,7 +26157,7 @@
         <p:spPr>
           <a:xfrm>
             <a:off x="630000" y="702000"/>
-            <a:ext cx="6300000" cy="936000"/>
+            <a:ext cx="4680000" cy="936000"/>
           </a:xfrm>
           <a:prstGeom prst="rect">
             <a:avLst/>
@@ -26990,7 +26173,7 @@
           </a:bodyPr>
           <a:p>
             <a:r>
-              <a:rPr lang="en-US" sz="3000" b="1" u="none" strike="noStrike">
+              <a:rPr lang="en-US" sz="2800" b="1" u="none" strike="noStrike">
                 <a:solidFill>
                   <a:srgbClr val="ECEEF2"/>
                 </a:solidFill>
@@ -27000,7 +26183,7 @@
               </a:rPr>
               <a:t>784 -&gt; 128 -&gt; 128 -&gt; 10</a:t>
             </a:r>
-            <a:endParaRPr lang="en-US" sz="3000" b="0" u="none" strike="noStrike">
+            <a:endParaRPr lang="en-US" sz="2800" b="0" u="none" strike="noStrike">
               <a:solidFill>
                 <a:srgbClr val="FFFFFF"/>
               </a:solidFill>
@@ -27014,59 +26197,13 @@
       <p:sp>
         <p:nvSpPr>
           <p:cNvPr id="295" name=""/>
-          <p:cNvSpPr txBox="1"/>
-          <p:nvPr/>
-        </p:nvSpPr>
-        <p:spPr>
-          <a:xfrm>
-            <a:off x="630000" y="1404000"/>
-            <a:ext cx="7920000" cy="288000"/>
-          </a:xfrm>
-          <a:prstGeom prst="rect">
-            <a:avLst/>
-          </a:prstGeom>
-          <a:noFill/>
-          <a:ln w="0">
-            <a:noFill/>
-          </a:ln>
-        </p:spPr>
-        <p:txBody>
-          <a:bodyPr lIns="0" tIns="0" rIns="0" bIns="0" anchor="t">
-            <a:noAutofit/>
-          </a:bodyPr>
-          <a:p>
-            <a:r>
-              <a:rPr lang="en-US" sz="1200" b="0" i="1" u="none" strike="noStrike">
-                <a:solidFill>
-                  <a:srgbClr val="6B7480"/>
-                </a:solidFill>
-                <a:effectLst/>
-                <a:uFillTx/>
-                <a:latin typeface="Arial"/>
-              </a:rPr>
-              <a:t>Linear, ReLU, Linear, ReLU, Linear. The ReLUs change values, not dimensions.</a:t>
-            </a:r>
-            <a:endParaRPr lang="en-US" sz="1200" b="0" u="none" strike="noStrike">
-              <a:solidFill>
-                <a:srgbClr val="FFFFFF"/>
-              </a:solidFill>
-              <a:effectLst/>
-              <a:uFillTx/>
-              <a:latin typeface="Arial"/>
-            </a:endParaRPr>
-          </a:p>
-        </p:txBody>
-      </p:sp>
-      <p:sp>
-        <p:nvSpPr>
-          <p:cNvPr id="296" name=""/>
-          <p:cNvSpPr/>
-          <p:nvPr/>
-        </p:nvSpPr>
-        <p:spPr>
-          <a:xfrm>
-            <a:off x="3564000" y="1764000"/>
-            <a:ext cx="4950000" cy="2448000"/>
+          <p:cNvSpPr/>
+          <p:nvPr/>
+        </p:nvSpPr>
+        <p:spPr>
+          <a:xfrm>
+            <a:off x="630000" y="1224000"/>
+            <a:ext cx="4752000" cy="1404000"/>
           </a:xfrm>
           <a:prstGeom prst="rect">
             <a:avLst/>
@@ -27099,14 +26236,226 @@
       </p:sp>
       <p:sp>
         <p:nvSpPr>
+          <p:cNvPr id="296" name=""/>
+          <p:cNvSpPr txBox="1"/>
+          <p:nvPr/>
+        </p:nvSpPr>
+        <p:spPr>
+          <a:xfrm>
+            <a:off x="810000" y="1386000"/>
+            <a:ext cx="4392000" cy="1116000"/>
+          </a:xfrm>
+          <a:prstGeom prst="rect">
+            <a:avLst/>
+          </a:prstGeom>
+          <a:noFill/>
+          <a:ln w="0">
+            <a:noFill/>
+          </a:ln>
+        </p:spPr>
+        <p:txBody>
+          <a:bodyPr lIns="0" tIns="0" rIns="0" bIns="0" anchor="t">
+            <a:noAutofit/>
+          </a:bodyPr>
+          <a:p>
+            <a:r>
+              <a:rPr lang="en-US" sz="900" b="0" u="none" strike="noStrike">
+                <a:solidFill>
+                  <a:srgbClr val="ECEEF2"/>
+                </a:solidFill>
+                <a:effectLst/>
+                <a:uFillTx/>
+                <a:latin typeface="Arial"/>
+              </a:rPr>
+              <a:t>class NeuralNetwork:</a:t>
+            </a:r>
+            <a:endParaRPr lang="en-US" sz="900" b="0" u="none" strike="noStrike">
+              <a:solidFill>
+                <a:srgbClr val="FFFFFF"/>
+              </a:solidFill>
+              <a:effectLst/>
+              <a:uFillTx/>
+              <a:latin typeface="Arial"/>
+            </a:endParaRPr>
+          </a:p>
+          <a:p>
+            <a:r>
+              <a:rPr lang="en-US" sz="900" b="0" u="none" strike="noStrike">
+                <a:solidFill>
+                  <a:srgbClr val="ECEEF2"/>
+                </a:solidFill>
+                <a:effectLst/>
+                <a:uFillTx/>
+                <a:latin typeface="Arial"/>
+              </a:rPr>
+              <a:t>    def __init__(self, input_size, hidden_size, output_size):</a:t>
+            </a:r>
+            <a:endParaRPr lang="en-US" sz="900" b="0" u="none" strike="noStrike">
+              <a:solidFill>
+                <a:srgbClr val="FFFFFF"/>
+              </a:solidFill>
+              <a:effectLst/>
+              <a:uFillTx/>
+              <a:latin typeface="Arial"/>
+            </a:endParaRPr>
+          </a:p>
+          <a:p>
+            <a:r>
+              <a:rPr lang="en-US" sz="900" b="0" u="none" strike="noStrike">
+                <a:solidFill>
+                  <a:srgbClr val="ECEEF2"/>
+                </a:solidFill>
+                <a:effectLst/>
+                <a:uFillTx/>
+                <a:latin typeface="Arial"/>
+              </a:rPr>
+              <a:t>        self.layer1 = Linear(input_size, hidden_size)</a:t>
+            </a:r>
+            <a:endParaRPr lang="en-US" sz="900" b="0" u="none" strike="noStrike">
+              <a:solidFill>
+                <a:srgbClr val="FFFFFF"/>
+              </a:solidFill>
+              <a:effectLst/>
+              <a:uFillTx/>
+              <a:latin typeface="Arial"/>
+            </a:endParaRPr>
+          </a:p>
+          <a:p>
+            <a:r>
+              <a:rPr lang="en-US" sz="900" b="0" u="none" strike="noStrike">
+                <a:solidFill>
+                  <a:srgbClr val="ECEEF2"/>
+                </a:solidFill>
+                <a:effectLst/>
+                <a:uFillTx/>
+                <a:latin typeface="Arial"/>
+              </a:rPr>
+              <a:t>        self.layer2 = Linear(hidden_size, hidden_size)</a:t>
+            </a:r>
+            <a:endParaRPr lang="en-US" sz="900" b="0" u="none" strike="noStrike">
+              <a:solidFill>
+                <a:srgbClr val="FFFFFF"/>
+              </a:solidFill>
+              <a:effectLst/>
+              <a:uFillTx/>
+              <a:latin typeface="Arial"/>
+            </a:endParaRPr>
+          </a:p>
+          <a:p>
+            <a:r>
+              <a:rPr lang="en-US" sz="900" b="0" u="none" strike="noStrike">
+                <a:solidFill>
+                  <a:srgbClr val="ECEEF2"/>
+                </a:solidFill>
+                <a:effectLst/>
+                <a:uFillTx/>
+                <a:latin typeface="Arial"/>
+              </a:rPr>
+              <a:t>        self.layer3 = Linear(hidden_size, output_size)</a:t>
+            </a:r>
+            <a:endParaRPr lang="en-US" sz="900" b="0" u="none" strike="noStrike">
+              <a:solidFill>
+                <a:srgbClr val="FFFFFF"/>
+              </a:solidFill>
+              <a:effectLst/>
+              <a:uFillTx/>
+              <a:latin typeface="Arial"/>
+            </a:endParaRPr>
+          </a:p>
+          <a:p>
+            <a:r>
+              <a:rPr lang="en-US" sz="900" b="0" u="none" strike="noStrike">
+                <a:solidFill>
+                  <a:srgbClr val="ECEEF2"/>
+                </a:solidFill>
+                <a:effectLst/>
+                <a:uFillTx/>
+                <a:latin typeface="Arial"/>
+              </a:rPr>
+              <a:t>        self.relu1 = ReLU()</a:t>
+            </a:r>
+            <a:endParaRPr lang="en-US" sz="900" b="0" u="none" strike="noStrike">
+              <a:solidFill>
+                <a:srgbClr val="FFFFFF"/>
+              </a:solidFill>
+              <a:effectLst/>
+              <a:uFillTx/>
+              <a:latin typeface="Arial"/>
+            </a:endParaRPr>
+          </a:p>
+          <a:p>
+            <a:r>
+              <a:rPr lang="en-US" sz="900" b="0" u="none" strike="noStrike">
+                <a:solidFill>
+                  <a:srgbClr val="ECEEF2"/>
+                </a:solidFill>
+                <a:effectLst/>
+                <a:uFillTx/>
+                <a:latin typeface="Arial"/>
+              </a:rPr>
+              <a:t>        self.relu2 = ReLU()</a:t>
+            </a:r>
+            <a:endParaRPr lang="en-US" sz="900" b="0" u="none" strike="noStrike">
+              <a:solidFill>
+                <a:srgbClr val="FFFFFF"/>
+              </a:solidFill>
+              <a:effectLst/>
+              <a:uFillTx/>
+              <a:latin typeface="Arial"/>
+            </a:endParaRPr>
+          </a:p>
+        </p:txBody>
+      </p:sp>
+      <p:sp>
+        <p:nvSpPr>
           <p:cNvPr id="297" name=""/>
+          <p:cNvSpPr/>
+          <p:nvPr/>
+        </p:nvSpPr>
+        <p:spPr>
+          <a:xfrm>
+            <a:off x="5328000" y="1224000"/>
+            <a:ext cx="3186000" cy="2520000"/>
+          </a:xfrm>
+          <a:prstGeom prst="rect">
+            <a:avLst/>
+          </a:prstGeom>
+          <a:solidFill>
+            <a:srgbClr val="0A0C12"/>
+          </a:solidFill>
+          <a:ln w="9360">
+            <a:solidFill>
+              <a:srgbClr val="272C38"/>
+            </a:solidFill>
+            <a:round/>
+          </a:ln>
+        </p:spPr>
+        <p:txBody>
+          <a:bodyPr lIns="0" tIns="0" rIns="0" bIns="0" anchor="t">
+            <a:noAutofit/>
+          </a:bodyPr>
+          <a:p>
+            <a:endParaRPr lang="en-US" sz="1800" b="0" u="none" strike="noStrike">
+              <a:solidFill>
+                <a:srgbClr val="FFFFFF"/>
+              </a:solidFill>
+              <a:effectLst/>
+              <a:uFillTx/>
+              <a:latin typeface="Arial"/>
+            </a:endParaRPr>
+          </a:p>
+        </p:txBody>
+      </p:sp>
+      <p:sp>
+        <p:nvSpPr>
+          <p:cNvPr id="298" name=""/>
           <p:cNvSpPr txBox="1"/>
           <p:nvPr/>
         </p:nvSpPr>
         <p:spPr>
           <a:xfrm>
-            <a:off x="3744000" y="1926000"/>
-            <a:ext cx="4590000" cy="2160000"/>
+            <a:off x="5508000" y="1386000"/>
+            <a:ext cx="2826000" cy="2232000"/>
           </a:xfrm>
           <a:prstGeom prst="rect">
             <a:avLst/>
@@ -27122,7 +26471,7 @@
           </a:bodyPr>
           <a:p>
             <a:r>
-              <a:rPr lang="en-US" sz="850" b="0" u="none" strike="noStrike">
+              <a:rPr lang="en-US" sz="900" b="0" u="none" strike="noStrike">
                 <a:solidFill>
                   <a:srgbClr val="ECEEF2"/>
                 </a:solidFill>
@@ -27130,20 +26479,20 @@
                 <a:uFillTx/>
                 <a:latin typeface="Arial"/>
               </a:rPr>
-              <a:t>class NeuralNetwork:</a:t>
-            </a:r>
-            <a:endParaRPr lang="en-US" sz="850" b="0" u="none" strike="noStrike">
-              <a:solidFill>
-                <a:srgbClr val="FFFFFF"/>
-              </a:solidFill>
-              <a:effectLst/>
-              <a:uFillTx/>
-              <a:latin typeface="Arial"/>
-            </a:endParaRPr>
-          </a:p>
-          <a:p>
-            <a:r>
-              <a:rPr lang="en-US" sz="850" b="0" u="none" strike="noStrike">
+              <a:t>    def forward(self, x):</a:t>
+            </a:r>
+            <a:endParaRPr lang="en-US" sz="900" b="0" u="none" strike="noStrike">
+              <a:solidFill>
+                <a:srgbClr val="FFFFFF"/>
+              </a:solidFill>
+              <a:effectLst/>
+              <a:uFillTx/>
+              <a:latin typeface="Arial"/>
+            </a:endParaRPr>
+          </a:p>
+          <a:p>
+            <a:r>
+              <a:rPr lang="en-US" sz="900" b="0" u="none" strike="noStrike">
                 <a:solidFill>
                   <a:srgbClr val="ECEEF2"/>
                 </a:solidFill>
@@ -27151,20 +26500,20 @@
                 <a:uFillTx/>
                 <a:latin typeface="Arial"/>
               </a:rPr>
-              <a:t>    def __init__(self, input_size, hidden_size, output_size):</a:t>
-            </a:r>
-            <a:endParaRPr lang="en-US" sz="850" b="0" u="none" strike="noStrike">
-              <a:solidFill>
-                <a:srgbClr val="FFFFFF"/>
-              </a:solidFill>
-              <a:effectLst/>
-              <a:uFillTx/>
-              <a:latin typeface="Arial"/>
-            </a:endParaRPr>
-          </a:p>
-          <a:p>
-            <a:r>
-              <a:rPr lang="en-US" sz="850" b="0" u="none" strike="noStrike">
+              <a:t>        x = self.layer1.forward(x)</a:t>
+            </a:r>
+            <a:endParaRPr lang="en-US" sz="900" b="0" u="none" strike="noStrike">
+              <a:solidFill>
+                <a:srgbClr val="FFFFFF"/>
+              </a:solidFill>
+              <a:effectLst/>
+              <a:uFillTx/>
+              <a:latin typeface="Arial"/>
+            </a:endParaRPr>
+          </a:p>
+          <a:p>
+            <a:r>
+              <a:rPr lang="en-US" sz="900" b="0" u="none" strike="noStrike">
                 <a:solidFill>
                   <a:srgbClr val="ECEEF2"/>
                 </a:solidFill>
@@ -27172,20 +26521,20 @@
                 <a:uFillTx/>
                 <a:latin typeface="Arial"/>
               </a:rPr>
-              <a:t>        self.layer1 = Linear(input_size, hidden_size)</a:t>
-            </a:r>
-            <a:endParaRPr lang="en-US" sz="850" b="0" u="none" strike="noStrike">
-              <a:solidFill>
-                <a:srgbClr val="FFFFFF"/>
-              </a:solidFill>
-              <a:effectLst/>
-              <a:uFillTx/>
-              <a:latin typeface="Arial"/>
-            </a:endParaRPr>
-          </a:p>
-          <a:p>
-            <a:r>
-              <a:rPr lang="en-US" sz="850" b="0" u="none" strike="noStrike">
+              <a:t>        x = self.relu1.forward(x)</a:t>
+            </a:r>
+            <a:endParaRPr lang="en-US" sz="900" b="0" u="none" strike="noStrike">
+              <a:solidFill>
+                <a:srgbClr val="FFFFFF"/>
+              </a:solidFill>
+              <a:effectLst/>
+              <a:uFillTx/>
+              <a:latin typeface="Arial"/>
+            </a:endParaRPr>
+          </a:p>
+          <a:p>
+            <a:r>
+              <a:rPr lang="en-US" sz="900" b="0" u="none" strike="noStrike">
                 <a:solidFill>
                   <a:srgbClr val="ECEEF2"/>
                 </a:solidFill>
@@ -27193,20 +26542,20 @@
                 <a:uFillTx/>
                 <a:latin typeface="Arial"/>
               </a:rPr>
-              <a:t>        self.layer2 = Linear(hidden_size, hidden_size)</a:t>
-            </a:r>
-            <a:endParaRPr lang="en-US" sz="850" b="0" u="none" strike="noStrike">
-              <a:solidFill>
-                <a:srgbClr val="FFFFFF"/>
-              </a:solidFill>
-              <a:effectLst/>
-              <a:uFillTx/>
-              <a:latin typeface="Arial"/>
-            </a:endParaRPr>
-          </a:p>
-          <a:p>
-            <a:r>
-              <a:rPr lang="en-US" sz="850" b="0" u="none" strike="noStrike">
+              <a:t>        x = self.layer2.forward(x)</a:t>
+            </a:r>
+            <a:endParaRPr lang="en-US" sz="900" b="0" u="none" strike="noStrike">
+              <a:solidFill>
+                <a:srgbClr val="FFFFFF"/>
+              </a:solidFill>
+              <a:effectLst/>
+              <a:uFillTx/>
+              <a:latin typeface="Arial"/>
+            </a:endParaRPr>
+          </a:p>
+          <a:p>
+            <a:r>
+              <a:rPr lang="en-US" sz="900" b="0" u="none" strike="noStrike">
                 <a:solidFill>
                   <a:srgbClr val="ECEEF2"/>
                 </a:solidFill>
@@ -27214,20 +26563,20 @@
                 <a:uFillTx/>
                 <a:latin typeface="Arial"/>
               </a:rPr>
-              <a:t>        self.layer3 = Linear(hidden_size, output_size)</a:t>
-            </a:r>
-            <a:endParaRPr lang="en-US" sz="850" b="0" u="none" strike="noStrike">
-              <a:solidFill>
-                <a:srgbClr val="FFFFFF"/>
-              </a:solidFill>
-              <a:effectLst/>
-              <a:uFillTx/>
-              <a:latin typeface="Arial"/>
-            </a:endParaRPr>
-          </a:p>
-          <a:p>
-            <a:r>
-              <a:rPr lang="en-US" sz="850" b="0" u="none" strike="noStrike">
+              <a:t>        x = self.relu2.forward(x)</a:t>
+            </a:r>
+            <a:endParaRPr lang="en-US" sz="900" b="0" u="none" strike="noStrike">
+              <a:solidFill>
+                <a:srgbClr val="FFFFFF"/>
+              </a:solidFill>
+              <a:effectLst/>
+              <a:uFillTx/>
+              <a:latin typeface="Arial"/>
+            </a:endParaRPr>
+          </a:p>
+          <a:p>
+            <a:r>
+              <a:rPr lang="en-US" sz="900" b="0" u="none" strike="noStrike">
                 <a:solidFill>
                   <a:srgbClr val="ECEEF2"/>
                 </a:solidFill>
@@ -27235,20 +26584,20 @@
                 <a:uFillTx/>
                 <a:latin typeface="Arial"/>
               </a:rPr>
-              <a:t>        self.relu1 = ReLU()</a:t>
-            </a:r>
-            <a:endParaRPr lang="en-US" sz="850" b="0" u="none" strike="noStrike">
-              <a:solidFill>
-                <a:srgbClr val="FFFFFF"/>
-              </a:solidFill>
-              <a:effectLst/>
-              <a:uFillTx/>
-              <a:latin typeface="Arial"/>
-            </a:endParaRPr>
-          </a:p>
-          <a:p>
-            <a:r>
-              <a:rPr lang="en-US" sz="850" b="0" u="none" strike="noStrike">
+              <a:t>        x = self.layer3.forward(x)</a:t>
+            </a:r>
+            <a:endParaRPr lang="en-US" sz="900" b="0" u="none" strike="noStrike">
+              <a:solidFill>
+                <a:srgbClr val="FFFFFF"/>
+              </a:solidFill>
+              <a:effectLst/>
+              <a:uFillTx/>
+              <a:latin typeface="Arial"/>
+            </a:endParaRPr>
+          </a:p>
+          <a:p>
+            <a:r>
+              <a:rPr lang="en-US" sz="900" b="0" u="none" strike="noStrike">
                 <a:solidFill>
                   <a:srgbClr val="ECEEF2"/>
                 </a:solidFill>
@@ -27256,30 +26605,30 @@
                 <a:uFillTx/>
                 <a:latin typeface="Arial"/>
               </a:rPr>
-              <a:t>        self.relu2 = ReLU()</a:t>
-            </a:r>
-            <a:endParaRPr lang="en-US" sz="850" b="0" u="none" strike="noStrike">
-              <a:solidFill>
-                <a:srgbClr val="FFFFFF"/>
-              </a:solidFill>
-              <a:effectLst/>
-              <a:uFillTx/>
-              <a:latin typeface="Arial"/>
-            </a:endParaRPr>
-          </a:p>
-          <a:p>
-            <a:endParaRPr lang="en-US" sz="850" b="0" u="none" strike="noStrike">
-              <a:solidFill>
-                <a:srgbClr val="FFFFFF"/>
-              </a:solidFill>
-              <a:effectLst/>
-              <a:uFillTx/>
-              <a:latin typeface="Arial"/>
-            </a:endParaRPr>
-          </a:p>
-          <a:p>
-            <a:r>
-              <a:rPr lang="en-US" sz="850" b="0" u="none" strike="noStrike">
+              <a:t>        return x</a:t>
+            </a:r>
+            <a:endParaRPr lang="en-US" sz="900" b="0" u="none" strike="noStrike">
+              <a:solidFill>
+                <a:srgbClr val="FFFFFF"/>
+              </a:solidFill>
+              <a:effectLst/>
+              <a:uFillTx/>
+              <a:latin typeface="Arial"/>
+            </a:endParaRPr>
+          </a:p>
+          <a:p>
+            <a:endParaRPr lang="en-US" sz="900" b="0" u="none" strike="noStrike">
+              <a:solidFill>
+                <a:srgbClr val="FFFFFF"/>
+              </a:solidFill>
+              <a:effectLst/>
+              <a:uFillTx/>
+              <a:latin typeface="Arial"/>
+            </a:endParaRPr>
+          </a:p>
+          <a:p>
+            <a:r>
+              <a:rPr lang="en-US" sz="900" b="0" u="none" strike="noStrike">
                 <a:solidFill>
                   <a:srgbClr val="ECEEF2"/>
                 </a:solidFill>
@@ -27287,20 +26636,20 @@
                 <a:uFillTx/>
                 <a:latin typeface="Arial"/>
               </a:rPr>
-              <a:t>    def forward(self, x):</a:t>
-            </a:r>
-            <a:endParaRPr lang="en-US" sz="850" b="0" u="none" strike="noStrike">
-              <a:solidFill>
-                <a:srgbClr val="FFFFFF"/>
-              </a:solidFill>
-              <a:effectLst/>
-              <a:uFillTx/>
-              <a:latin typeface="Arial"/>
-            </a:endParaRPr>
-          </a:p>
-          <a:p>
-            <a:r>
-              <a:rPr lang="en-US" sz="850" b="0" u="none" strike="noStrike">
+              <a:t>    def parameters(self):</a:t>
+            </a:r>
+            <a:endParaRPr lang="en-US" sz="900" b="0" u="none" strike="noStrike">
+              <a:solidFill>
+                <a:srgbClr val="FFFFFF"/>
+              </a:solidFill>
+              <a:effectLst/>
+              <a:uFillTx/>
+              <a:latin typeface="Arial"/>
+            </a:endParaRPr>
+          </a:p>
+          <a:p>
+            <a:r>
+              <a:rPr lang="en-US" sz="900" b="0" u="none" strike="noStrike">
                 <a:solidFill>
                   <a:srgbClr val="ECEEF2"/>
                 </a:solidFill>
@@ -27308,20 +26657,20 @@
                 <a:uFillTx/>
                 <a:latin typeface="Arial"/>
               </a:rPr>
-              <a:t>        x = self.layer1.forward(x)</a:t>
-            </a:r>
-            <a:endParaRPr lang="en-US" sz="850" b="0" u="none" strike="noStrike">
-              <a:solidFill>
-                <a:srgbClr val="FFFFFF"/>
-              </a:solidFill>
-              <a:effectLst/>
-              <a:uFillTx/>
-              <a:latin typeface="Arial"/>
-            </a:endParaRPr>
-          </a:p>
-          <a:p>
-            <a:r>
-              <a:rPr lang="en-US" sz="850" b="0" u="none" strike="noStrike">
+              <a:t>        return (</a:t>
+            </a:r>
+            <a:endParaRPr lang="en-US" sz="900" b="0" u="none" strike="noStrike">
+              <a:solidFill>
+                <a:srgbClr val="FFFFFF"/>
+              </a:solidFill>
+              <a:effectLst/>
+              <a:uFillTx/>
+              <a:latin typeface="Arial"/>
+            </a:endParaRPr>
+          </a:p>
+          <a:p>
+            <a:r>
+              <a:rPr lang="en-US" sz="900" b="0" u="none" strike="noStrike">
                 <a:solidFill>
                   <a:srgbClr val="ECEEF2"/>
                 </a:solidFill>
@@ -27329,20 +26678,20 @@
                 <a:uFillTx/>
                 <a:latin typeface="Arial"/>
               </a:rPr>
-              <a:t>        x = self.relu1.forward(x)</a:t>
-            </a:r>
-            <a:endParaRPr lang="en-US" sz="850" b="0" u="none" strike="noStrike">
-              <a:solidFill>
-                <a:srgbClr val="FFFFFF"/>
-              </a:solidFill>
-              <a:effectLst/>
-              <a:uFillTx/>
-              <a:latin typeface="Arial"/>
-            </a:endParaRPr>
-          </a:p>
-          <a:p>
-            <a:r>
-              <a:rPr lang="en-US" sz="850" b="0" u="none" strike="noStrike">
+              <a:t>            self.layer1.parameters()</a:t>
+            </a:r>
+            <a:endParaRPr lang="en-US" sz="900" b="0" u="none" strike="noStrike">
+              <a:solidFill>
+                <a:srgbClr val="FFFFFF"/>
+              </a:solidFill>
+              <a:effectLst/>
+              <a:uFillTx/>
+              <a:latin typeface="Arial"/>
+            </a:endParaRPr>
+          </a:p>
+          <a:p>
+            <a:r>
+              <a:rPr lang="en-US" sz="900" b="0" u="none" strike="noStrike">
                 <a:solidFill>
                   <a:srgbClr val="ECEEF2"/>
                 </a:solidFill>
@@ -27350,20 +26699,20 @@
                 <a:uFillTx/>
                 <a:latin typeface="Arial"/>
               </a:rPr>
-              <a:t>        x = self.layer2.forward(x)</a:t>
-            </a:r>
-            <a:endParaRPr lang="en-US" sz="850" b="0" u="none" strike="noStrike">
-              <a:solidFill>
-                <a:srgbClr val="FFFFFF"/>
-              </a:solidFill>
-              <a:effectLst/>
-              <a:uFillTx/>
-              <a:latin typeface="Arial"/>
-            </a:endParaRPr>
-          </a:p>
-          <a:p>
-            <a:r>
-              <a:rPr lang="en-US" sz="850" b="0" u="none" strike="noStrike">
+              <a:t>            + self.layer2.parameters()</a:t>
+            </a:r>
+            <a:endParaRPr lang="en-US" sz="900" b="0" u="none" strike="noStrike">
+              <a:solidFill>
+                <a:srgbClr val="FFFFFF"/>
+              </a:solidFill>
+              <a:effectLst/>
+              <a:uFillTx/>
+              <a:latin typeface="Arial"/>
+            </a:endParaRPr>
+          </a:p>
+          <a:p>
+            <a:r>
+              <a:rPr lang="en-US" sz="900" b="0" u="none" strike="noStrike">
                 <a:solidFill>
                   <a:srgbClr val="ECEEF2"/>
                 </a:solidFill>
@@ -27371,20 +26720,20 @@
                 <a:uFillTx/>
                 <a:latin typeface="Arial"/>
               </a:rPr>
-              <a:t>        x = self.relu2.forward(x)</a:t>
-            </a:r>
-            <a:endParaRPr lang="en-US" sz="850" b="0" u="none" strike="noStrike">
-              <a:solidFill>
-                <a:srgbClr val="FFFFFF"/>
-              </a:solidFill>
-              <a:effectLst/>
-              <a:uFillTx/>
-              <a:latin typeface="Arial"/>
-            </a:endParaRPr>
-          </a:p>
-          <a:p>
-            <a:r>
-              <a:rPr lang="en-US" sz="850" b="0" u="none" strike="noStrike">
+              <a:t>            + self.layer3.parameters()</a:t>
+            </a:r>
+            <a:endParaRPr lang="en-US" sz="900" b="0" u="none" strike="noStrike">
+              <a:solidFill>
+                <a:srgbClr val="FFFFFF"/>
+              </a:solidFill>
+              <a:effectLst/>
+              <a:uFillTx/>
+              <a:latin typeface="Arial"/>
+            </a:endParaRPr>
+          </a:p>
+          <a:p>
+            <a:r>
+              <a:rPr lang="en-US" sz="900" b="0" u="none" strike="noStrike">
                 <a:solidFill>
                   <a:srgbClr val="ECEEF2"/>
                 </a:solidFill>
@@ -27392,50 +26741,29 @@
                 <a:uFillTx/>
                 <a:latin typeface="Arial"/>
               </a:rPr>
-              <a:t>        x = self.layer3.forward(x)</a:t>
-            </a:r>
-            <a:endParaRPr lang="en-US" sz="850" b="0" u="none" strike="noStrike">
-              <a:solidFill>
-                <a:srgbClr val="FFFFFF"/>
-              </a:solidFill>
-              <a:effectLst/>
-              <a:uFillTx/>
-              <a:latin typeface="Arial"/>
-            </a:endParaRPr>
-          </a:p>
-          <a:p>
-            <a:r>
-              <a:rPr lang="en-US" sz="850" b="0" u="none" strike="noStrike">
-                <a:solidFill>
-                  <a:srgbClr val="ECEEF2"/>
-                </a:solidFill>
-                <a:effectLst/>
-                <a:uFillTx/>
-                <a:latin typeface="Arial"/>
-              </a:rPr>
-              <a:t>        return x</a:t>
-            </a:r>
-            <a:endParaRPr lang="en-US" sz="850" b="0" u="none" strike="noStrike">
-              <a:solidFill>
-                <a:srgbClr val="FFFFFF"/>
-              </a:solidFill>
-              <a:effectLst/>
-              <a:uFillTx/>
-              <a:latin typeface="Arial"/>
-            </a:endParaRPr>
-          </a:p>
-        </p:txBody>
-      </p:sp>
-      <p:sp>
-        <p:nvSpPr>
-          <p:cNvPr id="298" name=""/>
-          <p:cNvSpPr/>
-          <p:nvPr/>
-        </p:nvSpPr>
-        <p:spPr>
-          <a:xfrm>
-            <a:off x="630000" y="1872000"/>
-            <a:ext cx="2736000" cy="1288800"/>
+              <a:t>        )</a:t>
+            </a:r>
+            <a:endParaRPr lang="en-US" sz="900" b="0" u="none" strike="noStrike">
+              <a:solidFill>
+                <a:srgbClr val="FFFFFF"/>
+              </a:solidFill>
+              <a:effectLst/>
+              <a:uFillTx/>
+              <a:latin typeface="Arial"/>
+            </a:endParaRPr>
+          </a:p>
+        </p:txBody>
+      </p:sp>
+      <p:sp>
+        <p:nvSpPr>
+          <p:cNvPr id="299" name=""/>
+          <p:cNvSpPr/>
+          <p:nvPr/>
+        </p:nvSpPr>
+        <p:spPr>
+          <a:xfrm>
+            <a:off x="630000" y="2772000"/>
+            <a:ext cx="4752000" cy="1512000"/>
           </a:xfrm>
           <a:prstGeom prst="rect">
             <a:avLst/>
@@ -27468,14 +26796,14 @@
       </p:sp>
       <p:sp>
         <p:nvSpPr>
-          <p:cNvPr id="299" name=""/>
+          <p:cNvPr id="300" name=""/>
           <p:cNvSpPr txBox="1"/>
           <p:nvPr/>
         </p:nvSpPr>
         <p:spPr>
           <a:xfrm>
-            <a:off x="828000" y="2023200"/>
-            <a:ext cx="2340000" cy="1036800"/>
+            <a:off x="828000" y="2923200"/>
+            <a:ext cx="4356000" cy="1260000"/>
           </a:xfrm>
           <a:prstGeom prst="rect">
             <a:avLst/>
@@ -27499,7 +26827,7 @@
                 <a:uFillTx/>
                 <a:latin typeface="Arial"/>
               </a:rPr>
-              <a:t>READ IT AS</a:t>
+              <a:t>TYPE ALL OF IT</a:t>
             </a:r>
             <a:endParaRPr lang="en-US" sz="1050" b="0" u="none" strike="noStrike">
               <a:solidFill>
@@ -27520,7 +26848,7 @@
                 <a:uFillTx/>
                 <a:latin typeface="Arial"/>
               </a:rPr>
-              <a:t>Six trainable tensors:</a:t>
+              <a:t>All three methods, or Checkpoint 2 fails.</a:t>
             </a:r>
             <a:endParaRPr lang="en-US" sz="1150" b="0" u="none" strike="noStrike">
               <a:solidFill>
@@ -27541,7 +26869,7 @@
                 <a:uFillTx/>
                 <a:latin typeface="Arial"/>
               </a:rPr>
-              <a:t>three weights,</a:t>
+              <a:t>parameters() adds the three lists into</a:t>
             </a:r>
             <a:endParaRPr lang="en-US" sz="1150" b="0" u="none" strike="noStrike">
               <a:solidFill>
@@ -27562,7 +26890,7 @@
                 <a:uFillTx/>
                 <a:latin typeface="Arial"/>
               </a:rPr>
-              <a:t>three biases.</a:t>
+              <a:t>one flat list of six tensors:</a:t>
             </a:r>
             <a:endParaRPr lang="en-US" sz="1150" b="0" u="none" strike="noStrike">
               <a:solidFill>
@@ -27573,11 +26901,32 @@
               <a:latin typeface="Arial"/>
             </a:endParaRPr>
           </a:p>
-        </p:txBody>
-      </p:sp>
-      <p:sp>
-        <p:nvSpPr>
-          <p:cNvPr id="300" name=""/>
+          <a:p>
+            <a:r>
+              <a:rPr lang="en-US" sz="1150" b="0" u="none" strike="noStrike">
+                <a:solidFill>
+                  <a:srgbClr val="ECEEF2"/>
+                </a:solidFill>
+                <a:effectLst/>
+                <a:uFillTx/>
+                <a:latin typeface="Arial"/>
+              </a:rPr>
+              <a:t>three weights, three biases.</a:t>
+            </a:r>
+            <a:endParaRPr lang="en-US" sz="1150" b="0" u="none" strike="noStrike">
+              <a:solidFill>
+                <a:srgbClr val="FFFFFF"/>
+              </a:solidFill>
+              <a:effectLst/>
+              <a:uFillTx/>
+              <a:latin typeface="Arial"/>
+            </a:endParaRPr>
+          </a:p>
+        </p:txBody>
+      </p:sp>
+      <p:sp>
+        <p:nvSpPr>
+          <p:cNvPr id="301" name=""/>
           <p:cNvSpPr/>
           <p:nvPr/>
         </p:nvSpPr>
@@ -27617,7 +26966,7 @@
       </p:sp>
       <p:sp>
         <p:nvSpPr>
-          <p:cNvPr id="301" name=""/>
+          <p:cNvPr id="302" name=""/>
           <p:cNvSpPr txBox="1"/>
           <p:nvPr/>
         </p:nvSpPr>
@@ -27648,7 +26997,7 @@
                 <a:uFillTx/>
                 <a:latin typeface="Arial"/>
               </a:rPr>
-              <a:t>✓ Checkpoint 2 - four images become ten scores each. Expect (4, 784) -&gt; (4, 10).</a:t>
+              <a:t>✓ Checkpoint 2 · four images become ten scores each. Expect (4, 784) -&gt; (4, 10).</a:t>
             </a:r>
             <a:endParaRPr lang="en-US" sz="1150" b="0" u="none" strike="noStrike">
               <a:solidFill>
@@ -27663,7 +27012,7 @@
       </p:sp>
       <p:sp>
         <p:nvSpPr>
-          <p:cNvPr id="302" name=""/>
+          <p:cNvPr id="303" name=""/>
           <p:cNvSpPr txBox="1"/>
           <p:nvPr/>
         </p:nvSpPr>
@@ -27747,7 +27096,7 @@
       </p:grpSpPr>
       <p:sp>
         <p:nvSpPr>
-          <p:cNvPr id="303" name=""/>
+          <p:cNvPr id="304" name=""/>
           <p:cNvSpPr/>
           <p:nvPr/>
         </p:nvSpPr>
@@ -27784,7 +27133,7 @@
       </p:sp>
       <p:sp>
         <p:nvSpPr>
-          <p:cNvPr id="304" name=""/>
+          <p:cNvPr id="305" name=""/>
           <p:cNvSpPr/>
           <p:nvPr/>
         </p:nvSpPr>
@@ -27821,7 +27170,7 @@
       </p:sp>
       <p:sp>
         <p:nvSpPr>
-          <p:cNvPr id="305" name=""/>
+          <p:cNvPr id="306" name=""/>
           <p:cNvSpPr/>
           <p:nvPr/>
         </p:nvSpPr>
@@ -27858,7 +27207,7 @@
       </p:sp>
       <p:sp>
         <p:nvSpPr>
-          <p:cNvPr id="306" name=""/>
+          <p:cNvPr id="307" name=""/>
           <p:cNvSpPr/>
           <p:nvPr/>
         </p:nvSpPr>
@@ -27895,7 +27244,7 @@
       </p:sp>
       <p:sp>
         <p:nvSpPr>
-          <p:cNvPr id="307" name=""/>
+          <p:cNvPr id="308" name=""/>
           <p:cNvSpPr/>
           <p:nvPr/>
         </p:nvSpPr>
@@ -27932,7 +27281,7 @@
       </p:sp>
       <p:sp>
         <p:nvSpPr>
-          <p:cNvPr id="308" name=""/>
+          <p:cNvPr id="309" name=""/>
           <p:cNvSpPr/>
           <p:nvPr/>
         </p:nvSpPr>
@@ -27969,7 +27318,7 @@
       </p:sp>
       <p:sp>
         <p:nvSpPr>
-          <p:cNvPr id="309" name=""/>
+          <p:cNvPr id="310" name=""/>
           <p:cNvSpPr/>
           <p:nvPr/>
         </p:nvSpPr>
@@ -28006,7 +27355,7 @@
       </p:sp>
       <p:sp>
         <p:nvSpPr>
-          <p:cNvPr id="310" name=""/>
+          <p:cNvPr id="311" name=""/>
           <p:cNvSpPr txBox="1"/>
           <p:nvPr/>
         </p:nvSpPr>
@@ -28052,7 +27401,7 @@
       </p:sp>
       <p:sp>
         <p:nvSpPr>
-          <p:cNvPr id="311" name=""/>
+          <p:cNvPr id="312" name=""/>
           <p:cNvSpPr txBox="1"/>
           <p:nvPr/>
         </p:nvSpPr>
@@ -28098,7 +27447,7 @@
       </p:sp>
       <p:sp>
         <p:nvSpPr>
-          <p:cNvPr id="312" name=""/>
+          <p:cNvPr id="313" name=""/>
           <p:cNvSpPr/>
           <p:nvPr/>
         </p:nvSpPr>
@@ -28138,7 +27487,7 @@
       </p:sp>
       <p:sp>
         <p:nvSpPr>
-          <p:cNvPr id="313" name=""/>
+          <p:cNvPr id="314" name=""/>
           <p:cNvSpPr txBox="1"/>
           <p:nvPr/>
         </p:nvSpPr>
@@ -28184,7 +27533,7 @@
       </p:sp>
       <p:sp>
         <p:nvSpPr>
-          <p:cNvPr id="314" name=""/>
+          <p:cNvPr id="315" name=""/>
           <p:cNvSpPr txBox="1"/>
           <p:nvPr/>
         </p:nvSpPr>
@@ -28231,7 +27580,7 @@
       </p:sp>
       <p:sp>
         <p:nvSpPr>
-          <p:cNvPr id="315" name=""/>
+          <p:cNvPr id="316" name=""/>
           <p:cNvSpPr txBox="1"/>
           <p:nvPr/>
         </p:nvSpPr>
@@ -28278,7 +27627,7 @@
       </p:sp>
       <p:sp>
         <p:nvSpPr>
-          <p:cNvPr id="316" name=""/>
+          <p:cNvPr id="317" name=""/>
           <p:cNvSpPr/>
           <p:nvPr/>
         </p:nvSpPr>
@@ -28318,7 +27667,7 @@
       </p:sp>
       <p:sp>
         <p:nvSpPr>
-          <p:cNvPr id="317" name=""/>
+          <p:cNvPr id="318" name=""/>
           <p:cNvSpPr txBox="1"/>
           <p:nvPr/>
         </p:nvSpPr>
@@ -28364,7 +27713,7 @@
       </p:sp>
       <p:sp>
         <p:nvSpPr>
-          <p:cNvPr id="318" name=""/>
+          <p:cNvPr id="319" name=""/>
           <p:cNvSpPr txBox="1"/>
           <p:nvPr/>
         </p:nvSpPr>
@@ -28411,7 +27760,7 @@
       </p:sp>
       <p:sp>
         <p:nvSpPr>
-          <p:cNvPr id="319" name=""/>
+          <p:cNvPr id="320" name=""/>
           <p:cNvSpPr txBox="1"/>
           <p:nvPr/>
         </p:nvSpPr>
@@ -28458,7 +27807,7 @@
       </p:sp>
       <p:sp>
         <p:nvSpPr>
-          <p:cNvPr id="320" name=""/>
+          <p:cNvPr id="321" name=""/>
           <p:cNvSpPr/>
           <p:nvPr/>
         </p:nvSpPr>
@@ -28498,7 +27847,7 @@
       </p:sp>
       <p:sp>
         <p:nvSpPr>
-          <p:cNvPr id="321" name=""/>
+          <p:cNvPr id="322" name=""/>
           <p:cNvSpPr txBox="1"/>
           <p:nvPr/>
         </p:nvSpPr>
@@ -28544,7 +27893,7 @@
       </p:sp>
       <p:sp>
         <p:nvSpPr>
-          <p:cNvPr id="322" name=""/>
+          <p:cNvPr id="323" name=""/>
           <p:cNvSpPr txBox="1"/>
           <p:nvPr/>
         </p:nvSpPr>
@@ -28591,7 +27940,7 @@
       </p:sp>
       <p:sp>
         <p:nvSpPr>
-          <p:cNvPr id="323" name=""/>
+          <p:cNvPr id="324" name=""/>
           <p:cNvSpPr txBox="1"/>
           <p:nvPr/>
         </p:nvSpPr>
@@ -28638,7 +27987,7 @@
       </p:sp>
       <p:sp>
         <p:nvSpPr>
-          <p:cNvPr id="324" name=""/>
+          <p:cNvPr id="325" name=""/>
           <p:cNvSpPr txBox="1"/>
           <p:nvPr/>
         </p:nvSpPr>
@@ -28684,7 +28033,7 @@
       </p:sp>
       <p:sp>
         <p:nvSpPr>
-          <p:cNvPr id="325" name=""/>
+          <p:cNvPr id="326" name=""/>
           <p:cNvSpPr/>
           <p:nvPr/>
         </p:nvSpPr>
@@ -28724,7 +28073,7 @@
       </p:sp>
       <p:sp>
         <p:nvSpPr>
-          <p:cNvPr id="326" name=""/>
+          <p:cNvPr id="327" name=""/>
           <p:cNvSpPr/>
           <p:nvPr/>
         </p:nvSpPr>
@@ -28761,7 +28110,7 @@
       </p:sp>
       <p:sp>
         <p:nvSpPr>
-          <p:cNvPr id="327" name=""/>
+          <p:cNvPr id="328" name=""/>
           <p:cNvSpPr txBox="1"/>
           <p:nvPr/>
         </p:nvSpPr>
@@ -28808,7 +28157,7 @@
       </p:sp>
       <p:sp>
         <p:nvSpPr>
-          <p:cNvPr id="328" name=""/>
+          <p:cNvPr id="329" name=""/>
           <p:cNvSpPr txBox="1"/>
           <p:nvPr/>
         </p:nvSpPr>
@@ -28854,7 +28203,7 @@
       </p:sp>
       <p:sp>
         <p:nvSpPr>
-          <p:cNvPr id="329" name=""/>
+          <p:cNvPr id="330" name=""/>
           <p:cNvSpPr txBox="1"/>
           <p:nvPr/>
         </p:nvSpPr>
@@ -28938,7 +28287,7 @@
       </p:grpSpPr>
       <p:sp>
         <p:nvSpPr>
-          <p:cNvPr id="330" name=""/>
+          <p:cNvPr id="331" name=""/>
           <p:cNvSpPr/>
           <p:nvPr/>
         </p:nvSpPr>
@@ -28975,7 +28324,7 @@
       </p:sp>
       <p:sp>
         <p:nvSpPr>
-          <p:cNvPr id="331" name=""/>
+          <p:cNvPr id="332" name=""/>
           <p:cNvSpPr/>
           <p:nvPr/>
         </p:nvSpPr>
@@ -29012,7 +28361,7 @@
       </p:sp>
       <p:sp>
         <p:nvSpPr>
-          <p:cNvPr id="332" name=""/>
+          <p:cNvPr id="333" name=""/>
           <p:cNvSpPr/>
           <p:nvPr/>
         </p:nvSpPr>
@@ -29049,7 +28398,7 @@
       </p:sp>
       <p:sp>
         <p:nvSpPr>
-          <p:cNvPr id="333" name=""/>
+          <p:cNvPr id="334" name=""/>
           <p:cNvSpPr/>
           <p:nvPr/>
         </p:nvSpPr>
@@ -29086,7 +28435,7 @@
       </p:sp>
       <p:sp>
         <p:nvSpPr>
-          <p:cNvPr id="334" name=""/>
+          <p:cNvPr id="335" name=""/>
           <p:cNvSpPr/>
           <p:nvPr/>
         </p:nvSpPr>
@@ -29123,7 +28472,7 @@
       </p:sp>
       <p:sp>
         <p:nvSpPr>
-          <p:cNvPr id="335" name=""/>
+          <p:cNvPr id="336" name=""/>
           <p:cNvSpPr/>
           <p:nvPr/>
         </p:nvSpPr>
@@ -29160,7 +28509,7 @@
       </p:sp>
       <p:sp>
         <p:nvSpPr>
-          <p:cNvPr id="336" name=""/>
+          <p:cNvPr id="337" name=""/>
           <p:cNvSpPr/>
           <p:nvPr/>
         </p:nvSpPr>
@@ -29197,7 +28546,7 @@
       </p:sp>
       <p:sp>
         <p:nvSpPr>
-          <p:cNvPr id="337" name=""/>
+          <p:cNvPr id="338" name=""/>
           <p:cNvSpPr txBox="1"/>
           <p:nvPr/>
         </p:nvSpPr>
@@ -29228,7 +28577,7 @@
                 <a:uFillTx/>
                 <a:latin typeface="Arial"/>
               </a:rPr>
-              <a:t>LIVE BUILD · DATA</a:t>
+              <a:t>STEP 4 · LOAD_DATA + ACCURACY</a:t>
             </a:r>
             <a:endParaRPr lang="en-US" sz="1150" b="0" u="none" strike="noStrike">
               <a:solidFill>
@@ -29243,7 +28592,7 @@
       </p:sp>
       <p:sp>
         <p:nvSpPr>
-          <p:cNvPr id="338" name=""/>
+          <p:cNvPr id="339" name=""/>
           <p:cNvSpPr txBox="1"/>
           <p:nvPr/>
         </p:nvSpPr>
@@ -29289,14 +28638,14 @@
       </p:sp>
       <p:sp>
         <p:nvSpPr>
-          <p:cNvPr id="339" name=""/>
-          <p:cNvSpPr/>
-          <p:nvPr/>
-        </p:nvSpPr>
-        <p:spPr>
-          <a:xfrm>
-            <a:off x="3744000" y="972000"/>
-            <a:ext cx="4770000" cy="2592000"/>
+          <p:cNvPr id="340" name=""/>
+          <p:cNvSpPr/>
+          <p:nvPr/>
+        </p:nvSpPr>
+        <p:spPr>
+          <a:xfrm>
+            <a:off x="630000" y="1224000"/>
+            <a:ext cx="5184000" cy="2628000"/>
           </a:xfrm>
           <a:prstGeom prst="rect">
             <a:avLst/>
@@ -29329,14 +28678,14 @@
       </p:sp>
       <p:sp>
         <p:nvSpPr>
-          <p:cNvPr id="340" name=""/>
+          <p:cNvPr id="341" name=""/>
           <p:cNvSpPr txBox="1"/>
           <p:nvPr/>
         </p:nvSpPr>
         <p:spPr>
           <a:xfrm>
-            <a:off x="3924000" y="1134000"/>
-            <a:ext cx="4410000" cy="2304000"/>
+            <a:off x="810000" y="1386000"/>
+            <a:ext cx="4824000" cy="2340000"/>
           </a:xfrm>
           <a:prstGeom prst="rect">
             <a:avLst/>
@@ -29352,7 +28701,7 @@
           </a:bodyPr>
           <a:p>
             <a:r>
-              <a:rPr lang="en-US" sz="950" b="0" u="none" strike="noStrike">
+              <a:rPr lang="en-US" sz="900" b="0" u="none" strike="noStrike">
                 <a:solidFill>
                   <a:srgbClr val="ECEEF2"/>
                 </a:solidFill>
@@ -29360,20 +28709,20 @@
                 <a:uFillTx/>
                 <a:latin typeface="Arial"/>
               </a:rPr>
-              <a:t>train = torchvision.datasets.MNIST(</a:t>
-            </a:r>
-            <a:endParaRPr lang="en-US" sz="950" b="0" u="none" strike="noStrike">
-              <a:solidFill>
-                <a:srgbClr val="FFFFFF"/>
-              </a:solidFill>
-              <a:effectLst/>
-              <a:uFillTx/>
-              <a:latin typeface="Arial"/>
-            </a:endParaRPr>
-          </a:p>
-          <a:p>
-            <a:r>
-              <a:rPr lang="en-US" sz="950" b="0" u="none" strike="noStrike">
+              <a:t>def load_data():</a:t>
+            </a:r>
+            <a:endParaRPr lang="en-US" sz="900" b="0" u="none" strike="noStrike">
+              <a:solidFill>
+                <a:srgbClr val="FFFFFF"/>
+              </a:solidFill>
+              <a:effectLst/>
+              <a:uFillTx/>
+              <a:latin typeface="Arial"/>
+            </a:endParaRPr>
+          </a:p>
+          <a:p>
+            <a:r>
+              <a:rPr lang="en-US" sz="900" b="0" u="none" strike="noStrike">
                 <a:solidFill>
                   <a:srgbClr val="ECEEF2"/>
                 </a:solidFill>
@@ -29381,20 +28730,20 @@
                 <a:uFillTx/>
                 <a:latin typeface="Arial"/>
               </a:rPr>
-              <a:t>    root="./data", train=True, download=True)</a:t>
-            </a:r>
-            <a:endParaRPr lang="en-US" sz="950" b="0" u="none" strike="noStrike">
-              <a:solidFill>
-                <a:srgbClr val="FFFFFF"/>
-              </a:solidFill>
-              <a:effectLst/>
-              <a:uFillTx/>
-              <a:latin typeface="Arial"/>
-            </a:endParaRPr>
-          </a:p>
-          <a:p>
-            <a:r>
-              <a:rPr lang="en-US" sz="950" b="0" u="none" strike="noStrike">
+              <a:t>    train = torchvision.datasets.MNIST(</a:t>
+            </a:r>
+            <a:endParaRPr lang="en-US" sz="900" b="0" u="none" strike="noStrike">
+              <a:solidFill>
+                <a:srgbClr val="FFFFFF"/>
+              </a:solidFill>
+              <a:effectLst/>
+              <a:uFillTx/>
+              <a:latin typeface="Arial"/>
+            </a:endParaRPr>
+          </a:p>
+          <a:p>
+            <a:r>
+              <a:rPr lang="en-US" sz="900" b="0" u="none" strike="noStrike">
                 <a:solidFill>
                   <a:srgbClr val="ECEEF2"/>
                 </a:solidFill>
@@ -29402,20 +28751,20 @@
                 <a:uFillTx/>
                 <a:latin typeface="Arial"/>
               </a:rPr>
-              <a:t>test = torchvision.datasets.MNIST(</a:t>
-            </a:r>
-            <a:endParaRPr lang="en-US" sz="950" b="0" u="none" strike="noStrike">
-              <a:solidFill>
-                <a:srgbClr val="FFFFFF"/>
-              </a:solidFill>
-              <a:effectLst/>
-              <a:uFillTx/>
-              <a:latin typeface="Arial"/>
-            </a:endParaRPr>
-          </a:p>
-          <a:p>
-            <a:r>
-              <a:rPr lang="en-US" sz="950" b="0" u="none" strike="noStrike">
+              <a:t>        root="./data", train=True, download=True)</a:t>
+            </a:r>
+            <a:endParaRPr lang="en-US" sz="900" b="0" u="none" strike="noStrike">
+              <a:solidFill>
+                <a:srgbClr val="FFFFFF"/>
+              </a:solidFill>
+              <a:effectLst/>
+              <a:uFillTx/>
+              <a:latin typeface="Arial"/>
+            </a:endParaRPr>
+          </a:p>
+          <a:p>
+            <a:r>
+              <a:rPr lang="en-US" sz="900" b="0" u="none" strike="noStrike">
                 <a:solidFill>
                   <a:srgbClr val="ECEEF2"/>
                 </a:solidFill>
@@ -29423,30 +28772,20 @@
                 <a:uFillTx/>
                 <a:latin typeface="Arial"/>
               </a:rPr>
-              <a:t>    root="./data", train=False, download=True)</a:t>
-            </a:r>
-            <a:endParaRPr lang="en-US" sz="950" b="0" u="none" strike="noStrike">
-              <a:solidFill>
-                <a:srgbClr val="FFFFFF"/>
-              </a:solidFill>
-              <a:effectLst/>
-              <a:uFillTx/>
-              <a:latin typeface="Arial"/>
-            </a:endParaRPr>
-          </a:p>
-          <a:p>
-            <a:endParaRPr lang="en-US" sz="950" b="0" u="none" strike="noStrike">
-              <a:solidFill>
-                <a:srgbClr val="FFFFFF"/>
-              </a:solidFill>
-              <a:effectLst/>
-              <a:uFillTx/>
-              <a:latin typeface="Arial"/>
-            </a:endParaRPr>
-          </a:p>
-          <a:p>
-            <a:r>
-              <a:rPr lang="en-US" sz="950" b="0" u="none" strike="noStrike">
+              <a:t>    test = torchvision.datasets.MNIST(</a:t>
+            </a:r>
+            <a:endParaRPr lang="en-US" sz="900" b="0" u="none" strike="noStrike">
+              <a:solidFill>
+                <a:srgbClr val="FFFFFF"/>
+              </a:solidFill>
+              <a:effectLst/>
+              <a:uFillTx/>
+              <a:latin typeface="Arial"/>
+            </a:endParaRPr>
+          </a:p>
+          <a:p>
+            <a:r>
+              <a:rPr lang="en-US" sz="900" b="0" u="none" strike="noStrike">
                 <a:solidFill>
                   <a:srgbClr val="ECEEF2"/>
                 </a:solidFill>
@@ -29454,20 +28793,30 @@
                 <a:uFillTx/>
                 <a:latin typeface="Arial"/>
               </a:rPr>
-              <a:t>x = train.data.float().view(-1, 784) / 255.0</a:t>
-            </a:r>
-            <a:endParaRPr lang="en-US" sz="950" b="0" u="none" strike="noStrike">
-              <a:solidFill>
-                <a:srgbClr val="FFFFFF"/>
-              </a:solidFill>
-              <a:effectLst/>
-              <a:uFillTx/>
-              <a:latin typeface="Arial"/>
-            </a:endParaRPr>
-          </a:p>
-          <a:p>
-            <a:r>
-              <a:rPr lang="en-US" sz="950" b="0" u="none" strike="noStrike">
+              <a:t>        root="./data", train=False, download=True)</a:t>
+            </a:r>
+            <a:endParaRPr lang="en-US" sz="900" b="0" u="none" strike="noStrike">
+              <a:solidFill>
+                <a:srgbClr val="FFFFFF"/>
+              </a:solidFill>
+              <a:effectLst/>
+              <a:uFillTx/>
+              <a:latin typeface="Arial"/>
+            </a:endParaRPr>
+          </a:p>
+          <a:p>
+            <a:endParaRPr lang="en-US" sz="900" b="0" u="none" strike="noStrike">
+              <a:solidFill>
+                <a:srgbClr val="FFFFFF"/>
+              </a:solidFill>
+              <a:effectLst/>
+              <a:uFillTx/>
+              <a:latin typeface="Arial"/>
+            </a:endParaRPr>
+          </a:p>
+          <a:p>
+            <a:r>
+              <a:rPr lang="en-US" sz="900" b="0" u="none" strike="noStrike">
                 <a:solidFill>
                   <a:srgbClr val="ECEEF2"/>
                 </a:solidFill>
@@ -29475,20 +28824,20 @@
                 <a:uFillTx/>
                 <a:latin typeface="Arial"/>
               </a:rPr>
-              <a:t>target = train.targets</a:t>
-            </a:r>
-            <a:endParaRPr lang="en-US" sz="950" b="0" u="none" strike="noStrike">
-              <a:solidFill>
-                <a:srgbClr val="FFFFFF"/>
-              </a:solidFill>
-              <a:effectLst/>
-              <a:uFillTx/>
-              <a:latin typeface="Arial"/>
-            </a:endParaRPr>
-          </a:p>
-          <a:p>
-            <a:r>
-              <a:rPr lang="en-US" sz="950" b="0" u="none" strike="noStrike">
+              <a:t>    x = train.data.float().view(-1, 784) / 255.0</a:t>
+            </a:r>
+            <a:endParaRPr lang="en-US" sz="900" b="0" u="none" strike="noStrike">
+              <a:solidFill>
+                <a:srgbClr val="FFFFFF"/>
+              </a:solidFill>
+              <a:effectLst/>
+              <a:uFillTx/>
+              <a:latin typeface="Arial"/>
+            </a:endParaRPr>
+          </a:p>
+          <a:p>
+            <a:r>
+              <a:rPr lang="en-US" sz="900" b="0" u="none" strike="noStrike">
                 <a:solidFill>
                   <a:srgbClr val="ECEEF2"/>
                 </a:solidFill>
@@ -29496,20 +28845,20 @@
                 <a:uFillTx/>
                 <a:latin typeface="Arial"/>
               </a:rPr>
-              <a:t>x_test = test.data.float().view(-1, 784) / 255.0</a:t>
-            </a:r>
-            <a:endParaRPr lang="en-US" sz="950" b="0" u="none" strike="noStrike">
-              <a:solidFill>
-                <a:srgbClr val="FFFFFF"/>
-              </a:solidFill>
-              <a:effectLst/>
-              <a:uFillTx/>
-              <a:latin typeface="Arial"/>
-            </a:endParaRPr>
-          </a:p>
-          <a:p>
-            <a:r>
-              <a:rPr lang="en-US" sz="950" b="0" u="none" strike="noStrike">
+              <a:t>    target = train.targets</a:t>
+            </a:r>
+            <a:endParaRPr lang="en-US" sz="900" b="0" u="none" strike="noStrike">
+              <a:solidFill>
+                <a:srgbClr val="FFFFFF"/>
+              </a:solidFill>
+              <a:effectLst/>
+              <a:uFillTx/>
+              <a:latin typeface="Arial"/>
+            </a:endParaRPr>
+          </a:p>
+          <a:p>
+            <a:r>
+              <a:rPr lang="en-US" sz="900" b="0" u="none" strike="noStrike">
                 <a:solidFill>
                   <a:srgbClr val="ECEEF2"/>
                 </a:solidFill>
@@ -29517,29 +28866,133 @@
                 <a:uFillTx/>
                 <a:latin typeface="Arial"/>
               </a:rPr>
-              <a:t>target_test = test.targets</a:t>
-            </a:r>
-            <a:endParaRPr lang="en-US" sz="950" b="0" u="none" strike="noStrike">
-              <a:solidFill>
-                <a:srgbClr val="FFFFFF"/>
-              </a:solidFill>
-              <a:effectLst/>
-              <a:uFillTx/>
-              <a:latin typeface="Arial"/>
-            </a:endParaRPr>
-          </a:p>
-        </p:txBody>
-      </p:sp>
-      <p:sp>
-        <p:nvSpPr>
-          <p:cNvPr id="341" name=""/>
-          <p:cNvSpPr/>
-          <p:nvPr/>
-        </p:nvSpPr>
-        <p:spPr>
-          <a:xfrm>
-            <a:off x="630000" y="1656000"/>
-            <a:ext cx="3024000" cy="1735200"/>
+              <a:t>    x_test = test.data.float().view(-1, 784) / 255.0</a:t>
+            </a:r>
+            <a:endParaRPr lang="en-US" sz="900" b="0" u="none" strike="noStrike">
+              <a:solidFill>
+                <a:srgbClr val="FFFFFF"/>
+              </a:solidFill>
+              <a:effectLst/>
+              <a:uFillTx/>
+              <a:latin typeface="Arial"/>
+            </a:endParaRPr>
+          </a:p>
+          <a:p>
+            <a:r>
+              <a:rPr lang="en-US" sz="900" b="0" u="none" strike="noStrike">
+                <a:solidFill>
+                  <a:srgbClr val="ECEEF2"/>
+                </a:solidFill>
+                <a:effectLst/>
+                <a:uFillTx/>
+                <a:latin typeface="Arial"/>
+              </a:rPr>
+              <a:t>    target_test = test.targets</a:t>
+            </a:r>
+            <a:endParaRPr lang="en-US" sz="900" b="0" u="none" strike="noStrike">
+              <a:solidFill>
+                <a:srgbClr val="FFFFFF"/>
+              </a:solidFill>
+              <a:effectLst/>
+              <a:uFillTx/>
+              <a:latin typeface="Arial"/>
+            </a:endParaRPr>
+          </a:p>
+          <a:p>
+            <a:r>
+              <a:rPr lang="en-US" sz="900" b="0" u="none" strike="noStrike">
+                <a:solidFill>
+                  <a:srgbClr val="ECEEF2"/>
+                </a:solidFill>
+                <a:effectLst/>
+                <a:uFillTx/>
+                <a:latin typeface="Arial"/>
+              </a:rPr>
+              <a:t>    return x, target, x_test, target_test</a:t>
+            </a:r>
+            <a:endParaRPr lang="en-US" sz="900" b="0" u="none" strike="noStrike">
+              <a:solidFill>
+                <a:srgbClr val="FFFFFF"/>
+              </a:solidFill>
+              <a:effectLst/>
+              <a:uFillTx/>
+              <a:latin typeface="Arial"/>
+            </a:endParaRPr>
+          </a:p>
+          <a:p>
+            <a:endParaRPr lang="en-US" sz="900" b="0" u="none" strike="noStrike">
+              <a:solidFill>
+                <a:srgbClr val="FFFFFF"/>
+              </a:solidFill>
+              <a:effectLst/>
+              <a:uFillTx/>
+              <a:latin typeface="Arial"/>
+            </a:endParaRPr>
+          </a:p>
+          <a:p>
+            <a:endParaRPr lang="en-US" sz="900" b="0" u="none" strike="noStrike">
+              <a:solidFill>
+                <a:srgbClr val="FFFFFF"/>
+              </a:solidFill>
+              <a:effectLst/>
+              <a:uFillTx/>
+              <a:latin typeface="Arial"/>
+            </a:endParaRPr>
+          </a:p>
+          <a:p>
+            <a:r>
+              <a:rPr lang="en-US" sz="900" b="0" u="none" strike="noStrike">
+                <a:solidFill>
+                  <a:srgbClr val="ECEEF2"/>
+                </a:solidFill>
+                <a:effectLst/>
+                <a:uFillTx/>
+                <a:latin typeface="Arial"/>
+              </a:rPr>
+              <a:t>def accuracy(scores, targets):</a:t>
+            </a:r>
+            <a:endParaRPr lang="en-US" sz="900" b="0" u="none" strike="noStrike">
+              <a:solidFill>
+                <a:srgbClr val="FFFFFF"/>
+              </a:solidFill>
+              <a:effectLst/>
+              <a:uFillTx/>
+              <a:latin typeface="Arial"/>
+            </a:endParaRPr>
+          </a:p>
+          <a:p>
+            <a:r>
+              <a:rPr lang="en-US" sz="900" b="0" u="none" strike="noStrike">
+                <a:solidFill>
+                  <a:srgbClr val="ECEEF2"/>
+                </a:solidFill>
+                <a:effectLst/>
+                <a:uFillTx/>
+                <a:latin typeface="Arial"/>
+              </a:rPr>
+              <a:t>    return (scores.argmax(dim=1) == targets).float().mean().item()</a:t>
+            </a:r>
+            <a:endParaRPr lang="en-US" sz="900" b="0" u="none" strike="noStrike">
+              <a:solidFill>
+                <a:srgbClr val="FFFFFF"/>
+              </a:solidFill>
+              <a:effectLst/>
+              <a:uFillTx/>
+              <a:latin typeface="Arial"/>
+            </a:endParaRPr>
+          </a:p>
+        </p:txBody>
+      </p:sp>
+      <p:sp>
+        <p:nvSpPr>
+          <p:cNvPr id="342" name=""/>
+          <p:cNvSpPr/>
+          <p:nvPr/>
+        </p:nvSpPr>
+        <p:spPr>
+          <a:xfrm>
+            <a:off x="5760000" y="1224000"/>
+            <a:ext cx="2754000" cy="2181600"/>
           </a:xfrm>
           <a:prstGeom prst="rect">
             <a:avLst/>
@@ -29572,14 +29025,14 @@
       </p:sp>
       <p:sp>
         <p:nvSpPr>
-          <p:cNvPr id="342" name=""/>
+          <p:cNvPr id="343" name=""/>
           <p:cNvSpPr txBox="1"/>
           <p:nvPr/>
         </p:nvSpPr>
         <p:spPr>
           <a:xfrm>
-            <a:off x="828000" y="1807200"/>
-            <a:ext cx="2628000" cy="1483200"/>
+            <a:off x="5958000" y="1375200"/>
+            <a:ext cx="2358000" cy="1929600"/>
           </a:xfrm>
           <a:prstGeom prst="rect">
             <a:avLst/>
@@ -29719,11 +29172,53 @@
               <a:latin typeface="Arial"/>
             </a:endParaRPr>
           </a:p>
-        </p:txBody>
-      </p:sp>
-      <p:sp>
-        <p:nvSpPr>
-          <p:cNvPr id="343" name=""/>
+          <a:p>
+            <a:r>
+              <a:rPr lang="en-US" sz="1150" b="0" u="none" strike="noStrike">
+                <a:solidFill>
+                  <a:srgbClr val="ECEEF2"/>
+                </a:solidFill>
+                <a:effectLst/>
+                <a:uFillTx/>
+                <a:latin typeface="Arial"/>
+              </a:rPr>
+              <a:t>accuracy: how often the biggest</a:t>
+            </a:r>
+            <a:endParaRPr lang="en-US" sz="1150" b="0" u="none" strike="noStrike">
+              <a:solidFill>
+                <a:srgbClr val="FFFFFF"/>
+              </a:solidFill>
+              <a:effectLst/>
+              <a:uFillTx/>
+              <a:latin typeface="Arial"/>
+            </a:endParaRPr>
+          </a:p>
+          <a:p>
+            <a:r>
+              <a:rPr lang="en-US" sz="1150" b="0" u="none" strike="noStrike">
+                <a:solidFill>
+                  <a:srgbClr val="ECEEF2"/>
+                </a:solidFill>
+                <a:effectLst/>
+                <a:uFillTx/>
+                <a:latin typeface="Arial"/>
+              </a:rPr>
+              <a:t>score names the right digit.</a:t>
+            </a:r>
+            <a:endParaRPr lang="en-US" sz="1150" b="0" u="none" strike="noStrike">
+              <a:solidFill>
+                <a:srgbClr val="FFFFFF"/>
+              </a:solidFill>
+              <a:effectLst/>
+              <a:uFillTx/>
+              <a:latin typeface="Arial"/>
+            </a:endParaRPr>
+          </a:p>
+        </p:txBody>
+      </p:sp>
+      <p:sp>
+        <p:nvSpPr>
+          <p:cNvPr id="344" name=""/>
           <p:cNvSpPr txBox="1"/>
           <p:nvPr/>
         </p:nvSpPr>
